--- a/Clase_8/PPT/Clase08_Chi_Cuadrado.pptx
+++ b/Clase_8/PPT/Clase08_Chi_Cuadrado.pptx
@@ -4,6 +4,9 @@
   <p:sldMasterIdLst>
     <p:sldMasterId id="2147483648" r:id="rId1"/>
   </p:sldMasterIdLst>
+  <p:notesMasterIdLst>
+    <p:notesMasterId r:id="rId18"/>
+  </p:notesMasterIdLst>
   <p:sldIdLst>
     <p:sldId id="256" r:id="rId2"/>
     <p:sldId id="257" r:id="rId3"/>
@@ -22,9 +25,6 @@
     <p:sldId id="270" r:id="rId16"/>
     <p:sldId id="271" r:id="rId17"/>
   </p:sldIdLst>
-  <p:notesMasterIdLst>
-    <p:notesMasterId r:id="rId18"/>
-  </p:notesMasterIdLst>
   <p:sldSz cx="12192000" cy="6858000"/>
   <p:notesSz cx="6858000" cy="12192000"/>
   <p:defaultTextStyle>
@@ -119,6 +119,11 @@
       </a:defRPr>
     </a:lvl9pPr>
   </p:defaultTextStyle>
+  <p:extLst>
+    <p:ext uri="{EFAFB233-063F-42B5-8137-9DF3F51BA10A}">
+      <p15:sldGuideLst xmlns:p15="http://schemas.microsoft.com/office/powerpoint/2012/main"/>
+    </p:ext>
+  </p:extLst>
 </p:presentation>
 </file>
 
@@ -144,234 +149,10 @@
           <a:chExt cx="0" cy="0"/>
         </a:xfrm>
       </p:grpSpPr>
-      <p:sp>
-        <p:nvSpPr>
-          <p:cNvPr id="2" name="Header Placeholder 1"/>
-          <p:cNvSpPr>
-            <a:spLocks noGrp="1"/>
-          </p:cNvSpPr>
-          <p:nvPr>
-            <p:ph type="hdr" sz="quarter"/>
-          </p:nvPr>
-        </p:nvSpPr>
-        <p:spPr>
-          <a:xfrm>
-            <a:off x="0" y="0"/>
-            <a:ext cx="2971800" cy="458788"/>
-          </a:xfrm>
-          <a:prstGeom prst="rect">
-            <a:avLst/>
-          </a:prstGeom>
-        </p:spPr>
-        <p:txBody>
-          <a:bodyPr vert="horz" lIns="91440" tIns="45720" rIns="91440" bIns="45720" rtlCol="0"/>
-          <a:lstStyle>
-            <a:lvl1pPr algn="l">
-              <a:defRPr sz="1200"/>
-            </a:lvl1pPr>
-          </a:lstStyle>
-          <a:p>
-            <a:endParaRPr lang="en-US"/>
-          </a:p>
-        </p:txBody>
-      </p:sp>
-      <p:sp>
-        <p:nvSpPr>
-          <p:cNvPr id="3" name="Date Placeholder 2"/>
-          <p:cNvSpPr>
-            <a:spLocks noGrp="1"/>
-          </p:cNvSpPr>
-          <p:nvPr>
-            <p:ph type="dt" idx="1"/>
-          </p:nvPr>
-        </p:nvSpPr>
-        <p:spPr>
-          <a:xfrm>
-            <a:off x="3884613" y="0"/>
-            <a:ext cx="2971800" cy="458788"/>
-          </a:xfrm>
-          <a:prstGeom prst="rect">
-            <a:avLst/>
-          </a:prstGeom>
-        </p:spPr>
-        <p:txBody>
-          <a:bodyPr vert="horz" lIns="91440" tIns="45720" rIns="91440" bIns="45720" rtlCol="0"/>
-          <a:lstStyle>
-            <a:lvl1pPr algn="r">
-              <a:defRPr sz="1200"/>
-            </a:lvl1pPr>
-          </a:lstStyle>
-          <a:p>
-            <a:fld id="{5282F153-3F37-0F45-9E97-73ACFA13230C}" type="datetimeFigureOut">
-              <a:rPr lang="en-US"/>
-              <a:t>7/23/19</a:t>
-            </a:fld>
-            <a:endParaRPr lang="en-US"/>
-          </a:p>
-        </p:txBody>
-      </p:sp>
-      <p:sp>
-        <p:nvSpPr>
-          <p:cNvPr id="4" name="Slide Image Placeholder 3"/>
-          <p:cNvSpPr>
-            <a:spLocks noGrp="1" noRot="1" noChangeAspect="1"/>
-          </p:cNvSpPr>
-          <p:nvPr>
-            <p:ph type="sldImg" idx="2"/>
-          </p:nvPr>
-        </p:nvSpPr>
-        <p:spPr>
-          <a:xfrm>
-            <a:off x="685800" y="1143000"/>
-            <a:ext cx="5486400" cy="3086100"/>
-          </a:xfrm>
-          <a:prstGeom prst="rect">
-            <a:avLst/>
-          </a:prstGeom>
-          <a:noFill/>
-          <a:ln w="12700">
-            <a:solidFill>
-              <a:prstClr val="black"/>
-            </a:solidFill>
-          </a:ln>
-        </p:spPr>
-        <p:txBody>
-          <a:bodyPr vert="horz" lIns="91440" tIns="45720" rIns="91440" bIns="45720" rtlCol="0" anchor="ctr"/>
-          <a:lstStyle/>
-          <a:p>
-            <a:endParaRPr lang="en-US"/>
-          </a:p>
-        </p:txBody>
-      </p:sp>
-      <p:sp>
-        <p:nvSpPr>
-          <p:cNvPr id="5" name="Notes Placeholder 4"/>
-          <p:cNvSpPr>
-            <a:spLocks noGrp="1"/>
-          </p:cNvSpPr>
-          <p:nvPr>
-            <p:ph type="body" sz="quarter" idx="3"/>
-          </p:nvPr>
-        </p:nvSpPr>
-        <p:spPr>
-          <a:xfrm>
-            <a:off x="685800" y="4400550"/>
-            <a:ext cx="5486400" cy="3600450"/>
-          </a:xfrm>
-          <a:prstGeom prst="rect">
-            <a:avLst/>
-          </a:prstGeom>
-        </p:spPr>
-        <p:txBody>
-          <a:bodyPr vert="horz" lIns="91440" tIns="45720" rIns="91440" bIns="45720" rtlCol="0"/>
-          <a:lstStyle/>
-          <a:p>
-            <a:pPr lvl="0"/>
-            <a:r>
-              <a:rPr lang="en-US"/>
-              <a:t>Click to edit Master text styles</a:t>
-            </a:r>
-          </a:p>
-          <a:p>
-            <a:pPr lvl="1"/>
-            <a:r>
-              <a:rPr lang="en-US"/>
-              <a:t>Second level</a:t>
-            </a:r>
-          </a:p>
-          <a:p>
-            <a:pPr lvl="2"/>
-            <a:r>
-              <a:rPr lang="en-US"/>
-              <a:t>Third level</a:t>
-            </a:r>
-          </a:p>
-          <a:p>
-            <a:pPr lvl="3"/>
-            <a:r>
-              <a:rPr lang="en-US"/>
-              <a:t>Fourth level</a:t>
-            </a:r>
-          </a:p>
-          <a:p>
-            <a:pPr lvl="4"/>
-            <a:r>
-              <a:rPr lang="en-US"/>
-              <a:t>Fifth level</a:t>
-            </a:r>
-          </a:p>
-        </p:txBody>
-      </p:sp>
-      <p:sp>
-        <p:nvSpPr>
-          <p:cNvPr id="6" name="Footer Placeholder 5"/>
-          <p:cNvSpPr>
-            <a:spLocks noGrp="1"/>
-          </p:cNvSpPr>
-          <p:nvPr>
-            <p:ph type="ftr" sz="quarter" idx="4"/>
-          </p:nvPr>
-        </p:nvSpPr>
-        <p:spPr>
-          <a:xfrm>
-            <a:off x="0" y="8685213"/>
-            <a:ext cx="2971800" cy="458787"/>
-          </a:xfrm>
-          <a:prstGeom prst="rect">
-            <a:avLst/>
-          </a:prstGeom>
-        </p:spPr>
-        <p:txBody>
-          <a:bodyPr vert="horz" lIns="91440" tIns="45720" rIns="91440" bIns="45720" rtlCol="0" anchor="b"/>
-          <a:lstStyle>
-            <a:lvl1pPr algn="l">
-              <a:defRPr sz="1200"/>
-            </a:lvl1pPr>
-          </a:lstStyle>
-          <a:p>
-            <a:endParaRPr lang="en-US"/>
-          </a:p>
-        </p:txBody>
-      </p:sp>
-      <p:sp>
-        <p:nvSpPr>
-          <p:cNvPr id="7" name="Slide Number Placeholder 6"/>
-          <p:cNvSpPr>
-            <a:spLocks noGrp="1"/>
-          </p:cNvSpPr>
-          <p:nvPr>
-            <p:ph type="sldNum" sz="quarter" idx="5"/>
-          </p:nvPr>
-        </p:nvSpPr>
-        <p:spPr>
-          <a:xfrm>
-            <a:off x="3884613" y="8685213"/>
-            <a:ext cx="2971800" cy="458787"/>
-          </a:xfrm>
-          <a:prstGeom prst="rect">
-            <a:avLst/>
-          </a:prstGeom>
-        </p:spPr>
-        <p:txBody>
-          <a:bodyPr vert="horz" lIns="91440" tIns="45720" rIns="91440" bIns="45720" rtlCol="0" anchor="b"/>
-          <a:lstStyle>
-            <a:lvl1pPr algn="r">
-              <a:defRPr sz="1200"/>
-            </a:lvl1pPr>
-          </a:lstStyle>
-          <a:p>
-            <a:fld id="{CE5E9CC1-C706-0F49-92D6-E571CC5EEA8F}" type="slidenum">
-              <a:rPr lang="en-US"/>
-              <a:t>‹#›</a:t>
-            </a:fld>
-            <a:endParaRPr lang="en-US"/>
-          </a:p>
-        </p:txBody>
-      </p:sp>
     </p:spTree>
     <p:extLst>
       <p:ext uri="{BB962C8B-B14F-4D97-AF65-F5344CB8AC3E}">
-        <p14:creationId xmlns:p14="http://schemas.microsoft.com/office/powerpoint/2010/main" val="1024086991"/>
+        <p14:creationId xmlns:p14="http://schemas.microsoft.com/office/powerpoint/2010/main" val="2823194684"/>
       </p:ext>
     </p:extLst>
   </p:cSld>
@@ -519,7 +300,6 @@
               <a:rPr lang="en-US" dirty="0"/>
               <a:t>Empieza con la tabla en pantalla y la pregunta: 'de 200 solicitudes, agencia rechazó 40 y app rechazó 20. ¿Ustedes qué dirían, el canal tiene algo que ver?'. Deja que respondan a ojo. Casi todos dirán que sí. Perfecto: hoy vamos a ver cómo se demuestra eso, y también cómo se mide si esa relación es fuerte o apenas visible. Aviso de formato: hoy calculamos a mano en la pizarra antes de tocar el Colab.</a:t>
             </a:r>
-            <a:endParaRPr lang="en-US" dirty="0"/>
           </a:p>
         </p:txBody>
       </p:sp>
@@ -607,7 +387,6 @@
               <a:rPr lang="en-US" dirty="0"/>
               <a:t>El primero es el que abre la slide siguiente. El tercero es el que hay que decir mirando al grupo: correlación no es causalidad, y con categóricas es igual de cierto que con números. Ejemplo concreto para el tercero: si por agencia atienden a clientes sin historial crediticio, el canal no causa el rechazo — es un marcador de otra cosa.</a:t>
             </a:r>
-            <a:endParaRPr lang="en-US" dirty="0"/>
           </a:p>
         </p:txBody>
       </p:sp>
@@ -695,7 +474,6 @@
               <a:rPr lang="en-US" dirty="0"/>
               <a:t>Pregunta ANTES de mostrar la tabla de resultados: '¿qué creen que le pasa al chi cuadrado?'. Algunos dirán que no cambia, porque los porcentajes son los mismos. Es la respuesta intuitiva y es incorrecta. Después muestra: se multiplicó por 100. Y ahí introduces la última columna: hay algo que sí se mantuvo igual, y es lo que de verdad querías medir.</a:t>
             </a:r>
-            <a:endParaRPr lang="en-US" dirty="0"/>
           </a:p>
         </p:txBody>
       </p:sp>
@@ -783,7 +561,6 @@
               <a:rPr lang="en-US" dirty="0"/>
               <a:t>El punto que hay que dejar clarísimo: V va de 0 a 1 siempre, sin importar el tamaño de la tabla ni el de la muestra. Eso la hace comparable entre estudios, cosa que el chi cuadrado no permite. La frase de la tarjeta oscura es la que quiero que copien: chi cuadrado con sus gl y su p, y a continuación la V. Siempre juntos, nunca el p solo.</a:t>
             </a:r>
-            <a:endParaRPr lang="en-US" dirty="0"/>
           </a:p>
         </p:txBody>
       </p:sp>
@@ -871,7 +648,6 @@
               <a:rPr lang="en-US" dirty="0"/>
               <a:t>Dos minutos. Es una historia corta y simpática que fija la idea central de la clase. El punto no es la anécdota: es que Fisher no preguntó '¿acertó?' sino '¿qué pasaría si estuviera adivinando?'. Esa inversión es exactamente la tabla esperada. Si alguien pregunta si la señora acertó: acertó las ocho. Pero lo relevante para la clase es el método, no el resultado.</a:t>
             </a:r>
-            <a:endParaRPr lang="en-US" dirty="0"/>
           </a:p>
         </p:txBody>
       </p:sp>
@@ -959,7 +735,6 @@
               <a:rPr lang="en-US" dirty="0"/>
               <a:t>Anuncia 'slide para fotografiar' y da 20 segundos de silencio. El aviso de correction=False es el que más agradecen después, porque si no lo saben pierden media hora intentando entender por qué su cálculo manual no coincide con Python.</a:t>
             </a:r>
-            <a:endParaRPr lang="en-US" dirty="0"/>
           </a:p>
         </p:txBody>
       </p:sp>
@@ -1047,7 +822,6 @@
               <a:rPr lang="en-US" dirty="0"/>
               <a:t>El bloque 1 es de confianza: ven que Python da lo mismo que su lápiz. El bloque 3 es el que vale la sesión. Recorre el aula durante el bloque 2: ahí es donde se traban con crosstab y con la dirección de los porcentajes.</a:t>
             </a:r>
-            <a:endParaRPr lang="en-US" dirty="0"/>
           </a:p>
         </p:txBody>
       </p:sp>
@@ -1135,7 +909,6 @@
               <a:rPr lang="en-US" dirty="0"/>
               <a:t>Lee el checklist y pide pulgares en cada punto. El punto crítico es el segundo: si no entienden 'esperado', el resto es mecánica sin sentido. Si hay dudas ahí, vuelve 3 minutos a la slide 6. El reto tiene la gracia de que las dos preguntas pueden dar respuestas opuestas: significativa pero débil es el caso más común cuando hay muchos datos.</a:t>
             </a:r>
-            <a:endParaRPr lang="en-US" dirty="0"/>
           </a:p>
         </p:txBody>
       </p:sp>
@@ -1223,7 +996,6 @@
               <a:rPr lang="en-US" dirty="0"/>
               <a:t>La tabla se lee de arriba abajo en 60 segundos. El punto es que hoy NO es más difícil: es otra cosa. La tarjeta oscura es la que engancha: si trabajan en riesgo, la mitad de sus variables son categóricas.</a:t>
             </a:r>
-            <a:endParaRPr lang="en-US" dirty="0"/>
           </a:p>
         </p:txBody>
       </p:sp>
@@ -1311,7 +1083,6 @@
               <a:rPr lang="en-US" dirty="0"/>
               <a:t>Anuncia el formato: 60 minutos de pizarra y 45 de Colab, al revés de lo habitual. Y anuncia las tres ideas: si al final de la clase se llevan esas tres, la sesión funcionó. Todo lo demás es detalle.</a:t>
             </a:r>
-            <a:endParaRPr lang="en-US" dirty="0"/>
           </a:p>
         </p:txBody>
       </p:sp>
@@ -1399,7 +1170,6 @@
               <a:rPr lang="en-US" dirty="0"/>
               <a:t>Escribe la tabla en la pizarra tú mismo, no la proyectes solamente. Que la copien. Pregunta al aire: '¿el canal tiene que ver?'. Van a decir que sí por el 40 contra 20. Perfecto: la intuición es correcta y hoy aprendemos a demostrarla. El detalle importante es que los dos canales tienen 100 solicitudes cada uno, lo que hace la comparación fácil de ver.</a:t>
             </a:r>
-            <a:endParaRPr lang="en-US" dirty="0"/>
           </a:p>
         </p:txBody>
       </p:sp>
@@ -1487,7 +1257,6 @@
               <a:rPr lang="en-US" dirty="0"/>
               <a:t>Este es un error de lectura, no de cálculo, y por eso nadie lo detecta. Haz la pregunta al grupo antes de mostrar: '¿el 67 % de los rechazos son de agencia significa que agencia rechaza más?'. No necesariamente. Solo si los dos canales tienen el mismo volumen, que aquí sí, pero en la vida real casi nunca.</a:t>
             </a:r>
-            <a:endParaRPr lang="en-US" dirty="0"/>
           </a:p>
         </p:txBody>
       </p:sp>
@@ -1575,7 +1344,6 @@
               <a:rPr lang="en-US" dirty="0"/>
               <a:t>Esta es LA slide de la clase y hay que darla despacio, construyéndola en la pizarra. Guion: '¿cuánto se rechaza en total? 60 de 200, o sea el 30 %. Ahora imaginen un mundo donde el canal da igual. En ese mundo, ¿cuántos rechazos esperarían en agencia? El 30 % de sus 100, o sea 30. ¿Y en app? También 30.' Deja que ellos digan los números. La tabla esperada la construyen ellos, no tú. Y remata: 'la tabla esperada reparte los MISMOS 200 casos; solo cambia cómo'.</a:t>
             </a:r>
-            <a:endParaRPr lang="en-US" dirty="0"/>
           </a:p>
         </p:txBody>
       </p:sp>
@@ -1663,7 +1431,6 @@
               <a:rPr lang="en-US" dirty="0"/>
               <a:t>Calcula las cuatro celdas en la pizarra con ellos. Que hagan la multiplicación. La comprobación de los totales es un truco práctico que agradecen: si los márgenes no cuadran, se equivocaron. Y aclara lo de los decimales antes de que pregunten: en el laboratorio les van a salir esperados como 30.8.</a:t>
             </a:r>
-            <a:endParaRPr lang="en-US" dirty="0"/>
           </a:p>
         </p:txBody>
       </p:sp>
@@ -1751,7 +1518,6 @@
               <a:rPr lang="en-US" dirty="0"/>
               <a:t>Calcula las cuatro filas en la pizarra, una por una, con ellos. Es aritmética simple y les da confianza. Señala que las dos celdas de RECHAZADA aportan más (3.33 contra 1.43): es donde la diferencia pesa más en relación a lo esperado. Las dos preguntas de abajo salen siempre; contéstalas antes de que las hagan.</a:t>
             </a:r>
-            <a:endParaRPr lang="en-US" dirty="0"/>
           </a:p>
         </p:txBody>
       </p:sp>
@@ -1839,7 +1605,6 @@
               <a:rPr lang="en-US" dirty="0"/>
               <a:t>El truco de la casilla que determina el resto es lo que hace entender los grados de libertad sin fórmulas. Hazlo en vivo: tapa tres casillas y muestra que con una sola y los totales se reconstruye todo. Sobre el 3.84: es el valor de la tabla de χ² con gl=1 y 5 %. No hay que memorizarlo — scipy da el p directamente — pero verlo ayuda a entender que 9.52 no es un número suelto, sino que se compara con algo.</a:t>
             </a:r>
-            <a:endParaRPr lang="en-US" dirty="0"/>
           </a:p>
         </p:txBody>
       </p:sp>
@@ -1912,6 +1677,11 @@
 <file path=ppt/slideMasters/slideMaster1.xml><?xml version="1.0" encoding="utf-8"?>
 <p:sldMaster xmlns:a="http://schemas.openxmlformats.org/drawingml/2006/main" xmlns:r="http://schemas.openxmlformats.org/officeDocument/2006/relationships" xmlns:p="http://schemas.openxmlformats.org/presentationml/2006/main">
   <p:cSld>
+    <p:bg>
+      <p:bgRef idx="1001">
+        <a:schemeClr val="bg1"/>
+      </p:bgRef>
+    </p:bg>
     <p:spTree>
       <p:nvGrpSpPr>
         <p:cNvPr id="1" name=""/>
@@ -2194,6 +1964,7 @@
         <a:solidFill>
           <a:srgbClr val="0A2559"/>
         </a:solidFill>
+        <a:effectLst/>
       </p:bgPr>
     </p:bg>
     <p:spTree>
@@ -2258,7 +2029,7 @@
           <a:bodyPr wrap="square" lIns="0" tIns="0" rIns="0" bIns="0" rtlCol="0" anchor="ctr"/>
           <a:lstStyle/>
           <a:p>
-            <a:pPr algn="ctr" indent="0" marL="0">
+            <a:pPr marL="0" indent="0" algn="ctr">
               <a:buNone/>
             </a:pPr>
             <a:r>
@@ -2324,7 +2095,7 @@
           <a:bodyPr wrap="square" lIns="0" tIns="0" rIns="0" bIns="0" rtlCol="0" anchor="ctr"/>
           <a:lstStyle/>
           <a:p>
-            <a:pPr algn="ctr" indent="0" marL="0">
+            <a:pPr marL="0" indent="0" algn="ctr">
               <a:buNone/>
             </a:pPr>
             <a:r>
@@ -2390,7 +2161,7 @@
           <a:bodyPr wrap="square" lIns="0" tIns="0" rIns="0" bIns="0" rtlCol="0" anchor="ctr"/>
           <a:lstStyle/>
           <a:p>
-            <a:pPr algn="ctr" indent="0" marL="0">
+            <a:pPr marL="0" indent="0" algn="ctr">
               <a:buNone/>
             </a:pPr>
             <a:r>
@@ -2456,7 +2227,7 @@
           <a:bodyPr wrap="square" lIns="0" tIns="0" rIns="0" bIns="0" rtlCol="0" anchor="ctr"/>
           <a:lstStyle/>
           <a:p>
-            <a:pPr algn="ctr" indent="0" marL="0">
+            <a:pPr marL="0" indent="0" algn="ctr">
               <a:buNone/>
             </a:pPr>
             <a:r>
@@ -2495,7 +2266,7 @@
           <a:bodyPr wrap="square" lIns="0" tIns="0" rIns="0" bIns="0" rtlCol="0" anchor="ctr"/>
           <a:lstStyle/>
           <a:p>
-            <a:pPr algn="ctr" indent="0" marL="0">
+            <a:pPr marL="0" indent="0" algn="ctr">
               <a:buNone/>
             </a:pPr>
             <a:r>
@@ -2561,11 +2332,11 @@
           <a:bodyPr wrap="square" lIns="0" tIns="0" rIns="0" bIns="0" rtlCol="0" anchor="ctr"/>
           <a:lstStyle/>
           <a:p>
-            <a:pPr algn="ctr" indent="0" marL="0">
-              <a:buNone/>
-            </a:pPr>
-            <a:r>
-              <a:rPr lang="en-US" sz="1150" b="1" spc="100" kern="0" dirty="0">
+            <a:pPr marL="0" indent="0" algn="ctr">
+              <a:buNone/>
+            </a:pPr>
+            <a:r>
+              <a:rPr lang="en-US" sz="1150" b="1" kern="0" spc="100" dirty="0">
                 <a:solidFill>
                   <a:srgbClr val="FFFFFF"/>
                 </a:solidFill>
@@ -2600,7 +2371,7 @@
           <a:bodyPr wrap="square" lIns="0" tIns="0" rIns="0" bIns="0" rtlCol="0" anchor="t"/>
           <a:lstStyle/>
           <a:p>
-            <a:pPr indent="0" marL="0">
+            <a:pPr marL="0" indent="0">
               <a:lnSpc>
                 <a:spcPct val="98000"/>
               </a:lnSpc>
@@ -2620,7 +2391,7 @@
             <a:endParaRPr lang="en-US" sz="4000" dirty="0"/>
           </a:p>
           <a:p>
-            <a:pPr indent="0" marL="0">
+            <a:pPr marL="0" indent="0">
               <a:lnSpc>
                 <a:spcPct val="98000"/>
               </a:lnSpc>
@@ -2662,7 +2433,7 @@
           <a:bodyPr wrap="square" lIns="0" tIns="0" rIns="0" bIns="0" rtlCol="0" anchor="t"/>
           <a:lstStyle/>
           <a:p>
-            <a:pPr algn="l" indent="0" marL="0">
+            <a:pPr marL="0" indent="0" algn="l">
               <a:lnSpc>
                 <a:spcPct val="120000"/>
               </a:lnSpc>
@@ -2682,7 +2453,7 @@
             <a:endParaRPr lang="en-US" sz="1500" dirty="0"/>
           </a:p>
           <a:p>
-            <a:pPr algn="l" indent="0" marL="0">
+            <a:pPr marL="0" indent="0" algn="l">
               <a:lnSpc>
                 <a:spcPct val="120000"/>
               </a:lnSpc>
@@ -2724,7 +2495,7 @@
           <a:bodyPr wrap="square" lIns="0" tIns="0" rIns="0" bIns="0" rtlCol="0" anchor="ctr"/>
           <a:lstStyle/>
           <a:p>
-            <a:pPr indent="0" marL="0">
+            <a:pPr marL="0" indent="0">
               <a:buNone/>
             </a:pPr>
             <a:r>
@@ -2763,7 +2534,7 @@
           <a:bodyPr wrap="square" lIns="0" tIns="0" rIns="0" bIns="0" rtlCol="0" anchor="t"/>
           <a:lstStyle/>
           <a:p>
-            <a:pPr indent="0" marL="0">
+            <a:pPr marL="0" indent="0">
               <a:buNone/>
             </a:pPr>
             <a:r>
@@ -2802,7 +2573,7 @@
           <a:bodyPr wrap="square" lIns="0" tIns="0" rIns="0" bIns="0" rtlCol="0" anchor="ctr"/>
           <a:lstStyle/>
           <a:p>
-            <a:pPr indent="0" marL="0">
+            <a:pPr marL="0" indent="0">
               <a:buNone/>
             </a:pPr>
             <a:r>
@@ -2841,7 +2612,7 @@
           <a:bodyPr wrap="square" lIns="0" tIns="0" rIns="0" bIns="0" rtlCol="0" anchor="t"/>
           <a:lstStyle/>
           <a:p>
-            <a:pPr indent="0" marL="0">
+            <a:pPr marL="0" indent="0">
               <a:buNone/>
             </a:pPr>
             <a:r>
@@ -2880,7 +2651,7 @@
           <a:bodyPr wrap="square" lIns="0" tIns="0" rIns="0" bIns="0" rtlCol="0" anchor="ctr"/>
           <a:lstStyle/>
           <a:p>
-            <a:pPr indent="0" marL="0">
+            <a:pPr marL="0" indent="0">
               <a:buNone/>
             </a:pPr>
             <a:r>
@@ -2919,7 +2690,7 @@
           <a:bodyPr wrap="square" lIns="0" tIns="0" rIns="0" bIns="0" rtlCol="0" anchor="t"/>
           <a:lstStyle/>
           <a:p>
-            <a:pPr indent="0" marL="0">
+            <a:pPr marL="0" indent="0">
               <a:buNone/>
             </a:pPr>
             <a:r>
@@ -2958,7 +2729,7 @@
           <a:bodyPr wrap="square" lIns="0" tIns="0" rIns="0" bIns="0" rtlCol="0" anchor="ctr"/>
           <a:lstStyle/>
           <a:p>
-            <a:pPr indent="0" marL="0">
+            <a:pPr marL="0" indent="0">
               <a:buNone/>
             </a:pPr>
             <a:r>
@@ -2992,6 +2763,7 @@
         <a:solidFill>
           <a:srgbClr val="F5F7FB"/>
         </a:solidFill>
+        <a:effectLst/>
       </p:bgPr>
     </p:bg>
     <p:spTree>
@@ -3056,11 +2828,11 @@
           <a:bodyPr wrap="square" lIns="0" tIns="0" rIns="0" bIns="0" rtlCol="0" anchor="ctr"/>
           <a:lstStyle/>
           <a:p>
-            <a:pPr algn="ctr" indent="0" marL="0">
-              <a:buNone/>
-            </a:pPr>
-            <a:r>
-              <a:rPr lang="en-US" sz="1150" b="1" spc="100" kern="0" dirty="0">
+            <a:pPr marL="0" indent="0" algn="ctr">
+              <a:buNone/>
+            </a:pPr>
+            <a:r>
+              <a:rPr lang="en-US" sz="1150" b="1" kern="0" spc="100" dirty="0">
                 <a:solidFill>
                   <a:srgbClr val="FFFFFF"/>
                 </a:solidFill>
@@ -3095,7 +2867,7 @@
           <a:bodyPr wrap="square" lIns="0" tIns="0" rIns="0" bIns="0" rtlCol="0" anchor="ctr"/>
           <a:lstStyle/>
           <a:p>
-            <a:pPr indent="0" marL="0">
+            <a:pPr marL="0" indent="0">
               <a:buNone/>
             </a:pPr>
             <a:r>
@@ -3134,7 +2906,7 @@
           <a:bodyPr wrap="square" lIns="0" tIns="0" rIns="0" bIns="0" rtlCol="0" anchor="ctr"/>
           <a:lstStyle/>
           <a:p>
-            <a:pPr indent="0" marL="0">
+            <a:pPr marL="0" indent="0">
               <a:buNone/>
             </a:pPr>
             <a:r>
@@ -3227,7 +2999,7 @@
           <a:bodyPr wrap="square" lIns="0" tIns="0" rIns="0" bIns="0" rtlCol="0" anchor="ctr"/>
           <a:lstStyle/>
           <a:p>
-            <a:pPr algn="ctr" indent="0" marL="0">
+            <a:pPr marL="0" indent="0" algn="ctr">
               <a:buNone/>
             </a:pPr>
             <a:r>
@@ -3266,7 +3038,7 @@
           <a:bodyPr wrap="square" lIns="0" tIns="0" rIns="0" bIns="0" rtlCol="0" anchor="ctr"/>
           <a:lstStyle/>
           <a:p>
-            <a:pPr indent="0" marL="0">
+            <a:pPr marL="0" indent="0">
               <a:buNone/>
             </a:pPr>
             <a:r>
@@ -3305,7 +3077,7 @@
           <a:bodyPr wrap="square" lIns="0" tIns="0" rIns="0" bIns="0" rtlCol="0" anchor="t"/>
           <a:lstStyle/>
           <a:p>
-            <a:pPr algn="l" indent="0" marL="0">
+            <a:pPr marL="0" indent="0" algn="l">
               <a:lnSpc>
                 <a:spcPct val="106000"/>
               </a:lnSpc>
@@ -3347,7 +3119,7 @@
           <a:bodyPr wrap="square" lIns="0" tIns="0" rIns="0" bIns="0" rtlCol="0" anchor="t"/>
           <a:lstStyle/>
           <a:p>
-            <a:pPr algn="l" indent="0" marL="0">
+            <a:pPr marL="0" indent="0" algn="l">
               <a:lnSpc>
                 <a:spcPct val="108000"/>
               </a:lnSpc>
@@ -3443,7 +3215,7 @@
           <a:bodyPr wrap="square" lIns="0" tIns="0" rIns="0" bIns="0" rtlCol="0" anchor="ctr"/>
           <a:lstStyle/>
           <a:p>
-            <a:pPr algn="ctr" indent="0" marL="0">
+            <a:pPr marL="0" indent="0" algn="ctr">
               <a:buNone/>
             </a:pPr>
             <a:r>
@@ -3482,7 +3254,7 @@
           <a:bodyPr wrap="square" lIns="0" tIns="0" rIns="0" bIns="0" rtlCol="0" anchor="ctr"/>
           <a:lstStyle/>
           <a:p>
-            <a:pPr indent="0" marL="0">
+            <a:pPr marL="0" indent="0">
               <a:buNone/>
             </a:pPr>
             <a:r>
@@ -3521,7 +3293,7 @@
           <a:bodyPr wrap="square" lIns="0" tIns="0" rIns="0" bIns="0" rtlCol="0" anchor="t"/>
           <a:lstStyle/>
           <a:p>
-            <a:pPr algn="l" indent="0" marL="0">
+            <a:pPr marL="0" indent="0" algn="l">
               <a:lnSpc>
                 <a:spcPct val="106000"/>
               </a:lnSpc>
@@ -3563,7 +3335,7 @@
           <a:bodyPr wrap="square" lIns="0" tIns="0" rIns="0" bIns="0" rtlCol="0" anchor="t"/>
           <a:lstStyle/>
           <a:p>
-            <a:pPr algn="l" indent="0" marL="0">
+            <a:pPr marL="0" indent="0" algn="l">
               <a:lnSpc>
                 <a:spcPct val="108000"/>
               </a:lnSpc>
@@ -3659,7 +3431,7 @@
           <a:bodyPr wrap="square" lIns="0" tIns="0" rIns="0" bIns="0" rtlCol="0" anchor="ctr"/>
           <a:lstStyle/>
           <a:p>
-            <a:pPr algn="ctr" indent="0" marL="0">
+            <a:pPr marL="0" indent="0" algn="ctr">
               <a:buNone/>
             </a:pPr>
             <a:r>
@@ -3698,7 +3470,7 @@
           <a:bodyPr wrap="square" lIns="0" tIns="0" rIns="0" bIns="0" rtlCol="0" anchor="ctr"/>
           <a:lstStyle/>
           <a:p>
-            <a:pPr indent="0" marL="0">
+            <a:pPr marL="0" indent="0">
               <a:buNone/>
             </a:pPr>
             <a:r>
@@ -3737,7 +3509,7 @@
           <a:bodyPr wrap="square" lIns="0" tIns="0" rIns="0" bIns="0" rtlCol="0" anchor="t"/>
           <a:lstStyle/>
           <a:p>
-            <a:pPr algn="l" indent="0" marL="0">
+            <a:pPr marL="0" indent="0" algn="l">
               <a:lnSpc>
                 <a:spcPct val="106000"/>
               </a:lnSpc>
@@ -3779,7 +3551,7 @@
           <a:bodyPr wrap="square" lIns="0" tIns="0" rIns="0" bIns="0" rtlCol="0" anchor="t"/>
           <a:lstStyle/>
           <a:p>
-            <a:pPr algn="l" indent="0" marL="0">
+            <a:pPr marL="0" indent="0" algn="l">
               <a:lnSpc>
                 <a:spcPct val="108000"/>
               </a:lnSpc>
@@ -3821,7 +3593,7 @@
           <a:bodyPr wrap="square" lIns="0" tIns="0" rIns="0" bIns="0" rtlCol="0" anchor="ctr"/>
           <a:lstStyle/>
           <a:p>
-            <a:pPr indent="0" marL="0">
+            <a:pPr marL="0" indent="0">
               <a:buNone/>
             </a:pPr>
             <a:r>
@@ -3855,6 +3627,7 @@
         <a:solidFill>
           <a:srgbClr val="F5F7FB"/>
         </a:solidFill>
+        <a:effectLst/>
       </p:bgPr>
     </p:bg>
     <p:spTree>
@@ -3919,11 +3692,11 @@
           <a:bodyPr wrap="square" lIns="0" tIns="0" rIns="0" bIns="0" rtlCol="0" anchor="ctr"/>
           <a:lstStyle/>
           <a:p>
-            <a:pPr algn="ctr" indent="0" marL="0">
-              <a:buNone/>
-            </a:pPr>
-            <a:r>
-              <a:rPr lang="en-US" sz="1150" b="1" spc="100" kern="0" dirty="0">
+            <a:pPr marL="0" indent="0" algn="ctr">
+              <a:buNone/>
+            </a:pPr>
+            <a:r>
+              <a:rPr lang="en-US" sz="1150" b="1" kern="0" spc="100" dirty="0">
                 <a:solidFill>
                   <a:srgbClr val="FFFFFF"/>
                 </a:solidFill>
@@ -3958,7 +3731,7 @@
           <a:bodyPr wrap="square" lIns="0" tIns="0" rIns="0" bIns="0" rtlCol="0" anchor="ctr"/>
           <a:lstStyle/>
           <a:p>
-            <a:pPr indent="0" marL="0">
+            <a:pPr marL="0" indent="0">
               <a:buNone/>
             </a:pPr>
             <a:r>
@@ -3997,7 +3770,7 @@
           <a:bodyPr wrap="square" lIns="0" tIns="0" rIns="0" bIns="0" rtlCol="0" anchor="ctr"/>
           <a:lstStyle/>
           <a:p>
-            <a:pPr indent="0" marL="0">
+            <a:pPr marL="0" indent="0">
               <a:buNone/>
             </a:pPr>
             <a:r>
@@ -4036,7 +3809,7 @@
           <a:bodyPr wrap="square" lIns="0" tIns="0" rIns="0" bIns="0" rtlCol="0" anchor="t"/>
           <a:lstStyle/>
           <a:p>
-            <a:pPr algn="l" indent="0" marL="0">
+            <a:pPr marL="0" indent="0" algn="l">
               <a:lnSpc>
                 <a:spcPct val="108000"/>
               </a:lnSpc>
@@ -4103,7 +3876,7 @@
           <a:bodyPr wrap="square" lIns="0" tIns="0" rIns="0" bIns="0" rtlCol="0" anchor="ctr"/>
           <a:lstStyle/>
           <a:p>
-            <a:pPr algn="ctr" indent="0" marL="0">
+            <a:pPr marL="0" indent="0" algn="ctr">
               <a:buNone/>
             </a:pPr>
             <a:r>
@@ -4167,7 +3940,7 @@
           <a:bodyPr wrap="square" lIns="0" tIns="0" rIns="0" bIns="0" rtlCol="0" anchor="ctr"/>
           <a:lstStyle/>
           <a:p>
-            <a:pPr algn="ctr" indent="0" marL="0">
+            <a:pPr marL="0" indent="0" algn="ctr">
               <a:buNone/>
             </a:pPr>
             <a:r>
@@ -4231,7 +4004,7 @@
           <a:bodyPr wrap="square" lIns="1270" tIns="1270" rIns="1270" bIns="1270" rtlCol="0" anchor="ctr"/>
           <a:lstStyle/>
           <a:p>
-            <a:pPr algn="l" indent="0" marL="0">
+            <a:pPr marL="0" indent="0" algn="l">
               <a:buNone/>
             </a:pPr>
             <a:r>
@@ -4295,7 +4068,7 @@
           <a:bodyPr wrap="square" lIns="0" tIns="0" rIns="0" bIns="0" rtlCol="0" anchor="ctr"/>
           <a:lstStyle/>
           <a:p>
-            <a:pPr algn="ctr" indent="0" marL="0">
+            <a:pPr marL="0" indent="0" algn="ctr">
               <a:buNone/>
             </a:pPr>
             <a:r>
@@ -4359,7 +4132,7 @@
           <a:bodyPr wrap="square" lIns="0" tIns="0" rIns="0" bIns="0" rtlCol="0" anchor="ctr"/>
           <a:lstStyle/>
           <a:p>
-            <a:pPr algn="ctr" indent="0" marL="0">
+            <a:pPr marL="0" indent="0" algn="ctr">
               <a:buNone/>
             </a:pPr>
             <a:r>
@@ -4423,7 +4196,7 @@
           <a:bodyPr wrap="square" lIns="1270" tIns="1270" rIns="1270" bIns="1270" rtlCol="0" anchor="ctr"/>
           <a:lstStyle/>
           <a:p>
-            <a:pPr algn="l" indent="0" marL="0">
+            <a:pPr marL="0" indent="0" algn="l">
               <a:buNone/>
             </a:pPr>
             <a:r>
@@ -4487,7 +4260,7 @@
           <a:bodyPr wrap="square" lIns="0" tIns="0" rIns="0" bIns="0" rtlCol="0" anchor="ctr"/>
           <a:lstStyle/>
           <a:p>
-            <a:pPr algn="ctr" indent="0" marL="0">
+            <a:pPr marL="0" indent="0" algn="ctr">
               <a:buNone/>
             </a:pPr>
             <a:r>
@@ -4551,7 +4324,7 @@
           <a:bodyPr wrap="square" lIns="0" tIns="0" rIns="0" bIns="0" rtlCol="0" anchor="ctr"/>
           <a:lstStyle/>
           <a:p>
-            <a:pPr algn="ctr" indent="0" marL="0">
+            <a:pPr marL="0" indent="0" algn="ctr">
               <a:buNone/>
             </a:pPr>
             <a:r>
@@ -4590,7 +4363,7 @@
           <a:bodyPr wrap="square" lIns="0" tIns="0" rIns="0" bIns="0" rtlCol="0" anchor="ctr"/>
           <a:lstStyle/>
           <a:p>
-            <a:pPr algn="ctr" indent="0" marL="0">
+            <a:pPr marL="0" indent="0" algn="ctr">
               <a:buNone/>
             </a:pPr>
             <a:r>
@@ -4629,7 +4402,7 @@
           <a:bodyPr wrap="square" lIns="0" tIns="0" rIns="0" bIns="0" rtlCol="0" anchor="t"/>
           <a:lstStyle/>
           <a:p>
-            <a:pPr algn="l" indent="0" marL="0">
+            <a:pPr marL="0" indent="0" algn="l">
               <a:lnSpc>
                 <a:spcPct val="108000"/>
               </a:lnSpc>
@@ -4696,7 +4469,7 @@
           <a:bodyPr wrap="square" lIns="0" tIns="0" rIns="0" bIns="0" rtlCol="0" anchor="ctr"/>
           <a:lstStyle/>
           <a:p>
-            <a:pPr algn="ctr" indent="0" marL="0">
+            <a:pPr marL="0" indent="0" algn="ctr">
               <a:buNone/>
             </a:pPr>
             <a:r>
@@ -4760,7 +4533,7 @@
           <a:bodyPr wrap="square" lIns="0" tIns="0" rIns="0" bIns="0" rtlCol="0" anchor="ctr"/>
           <a:lstStyle/>
           <a:p>
-            <a:pPr algn="ctr" indent="0" marL="0">
+            <a:pPr marL="0" indent="0" algn="ctr">
               <a:buNone/>
             </a:pPr>
             <a:r>
@@ -4824,7 +4597,7 @@
           <a:bodyPr wrap="square" lIns="1270" tIns="1270" rIns="1270" bIns="1270" rtlCol="0" anchor="ctr"/>
           <a:lstStyle/>
           <a:p>
-            <a:pPr algn="l" indent="0" marL="0">
+            <a:pPr marL="0" indent="0" algn="l">
               <a:buNone/>
             </a:pPr>
             <a:r>
@@ -4888,7 +4661,7 @@
           <a:bodyPr wrap="square" lIns="0" tIns="0" rIns="0" bIns="0" rtlCol="0" anchor="ctr"/>
           <a:lstStyle/>
           <a:p>
-            <a:pPr algn="ctr" indent="0" marL="0">
+            <a:pPr marL="0" indent="0" algn="ctr">
               <a:buNone/>
             </a:pPr>
             <a:r>
@@ -4952,7 +4725,7 @@
           <a:bodyPr wrap="square" lIns="0" tIns="0" rIns="0" bIns="0" rtlCol="0" anchor="ctr"/>
           <a:lstStyle/>
           <a:p>
-            <a:pPr algn="ctr" indent="0" marL="0">
+            <a:pPr marL="0" indent="0" algn="ctr">
               <a:buNone/>
             </a:pPr>
             <a:r>
@@ -5016,7 +4789,7 @@
           <a:bodyPr wrap="square" lIns="1270" tIns="1270" rIns="1270" bIns="1270" rtlCol="0" anchor="ctr"/>
           <a:lstStyle/>
           <a:p>
-            <a:pPr algn="l" indent="0" marL="0">
+            <a:pPr marL="0" indent="0" algn="l">
               <a:buNone/>
             </a:pPr>
             <a:r>
@@ -5080,7 +4853,7 @@
           <a:bodyPr wrap="square" lIns="0" tIns="0" rIns="0" bIns="0" rtlCol="0" anchor="ctr"/>
           <a:lstStyle/>
           <a:p>
-            <a:pPr algn="ctr" indent="0" marL="0">
+            <a:pPr marL="0" indent="0" algn="ctr">
               <a:buNone/>
             </a:pPr>
             <a:r>
@@ -5144,7 +4917,7 @@
           <a:bodyPr wrap="square" lIns="0" tIns="0" rIns="0" bIns="0" rtlCol="0" anchor="ctr"/>
           <a:lstStyle/>
           <a:p>
-            <a:pPr algn="ctr" indent="0" marL="0">
+            <a:pPr marL="0" indent="0" algn="ctr">
               <a:buNone/>
             </a:pPr>
             <a:r>
@@ -5210,7 +4983,7 @@
           <a:bodyPr wrap="square" lIns="0" tIns="0" rIns="0" bIns="0" rtlCol="0" anchor="ctr"/>
           <a:lstStyle/>
           <a:p>
-            <a:pPr algn="ctr" indent="0" marL="0">
+            <a:pPr marL="0" indent="0" algn="ctr">
               <a:lnSpc>
                 <a:spcPct val="108000"/>
               </a:lnSpc>
@@ -5233,7 +5006,7 @@
       </p:sp>
       <p:graphicFrame>
         <p:nvGraphicFramePr>
-          <p:cNvPr id="12" name="Table 0"/>
+          <p:cNvPr id="43" name="Table 0"/>
           <p:cNvGraphicFramePr>
             <a:graphicFrameLocks noGrp="1"/>
           </p:cNvGraphicFramePr>
@@ -5247,18 +5020,48 @@
         </p:nvGraphicFramePr>
         <p:xfrm>
           <a:off x="548640" y="4206240"/>
-          <a:ext cx="11091672" cy="914400"/>
+          <a:ext cx="11091672" cy="1261872"/>
         </p:xfrm>
         <a:graphic>
           <a:graphicData uri="http://schemas.openxmlformats.org/drawingml/2006/table">
             <a:tbl>
               <a:tblPr/>
               <a:tblGrid>
-                <a:gridCol w="2651760"/>
-                <a:gridCol w="1737360"/>
-                <a:gridCol w="2011680"/>
-                <a:gridCol w="2377440"/>
-                <a:gridCol w="2313432"/>
+                <a:gridCol w="2651760">
+                  <a:extLst>
+                    <a:ext uri="{9D8B030D-6E8A-4147-A177-3AD203B41FA5}">
+                      <a16:colId xmlns:a16="http://schemas.microsoft.com/office/drawing/2014/main" val="20000"/>
+                    </a:ext>
+                  </a:extLst>
+                </a:gridCol>
+                <a:gridCol w="1737360">
+                  <a:extLst>
+                    <a:ext uri="{9D8B030D-6E8A-4147-A177-3AD203B41FA5}">
+                      <a16:colId xmlns:a16="http://schemas.microsoft.com/office/drawing/2014/main" val="20001"/>
+                    </a:ext>
+                  </a:extLst>
+                </a:gridCol>
+                <a:gridCol w="2011680">
+                  <a:extLst>
+                    <a:ext uri="{9D8B030D-6E8A-4147-A177-3AD203B41FA5}">
+                      <a16:colId xmlns:a16="http://schemas.microsoft.com/office/drawing/2014/main" val="20002"/>
+                    </a:ext>
+                  </a:extLst>
+                </a:gridCol>
+                <a:gridCol w="2377440">
+                  <a:extLst>
+                    <a:ext uri="{9D8B030D-6E8A-4147-A177-3AD203B41FA5}">
+                      <a16:colId xmlns:a16="http://schemas.microsoft.com/office/drawing/2014/main" val="20003"/>
+                    </a:ext>
+                  </a:extLst>
+                </a:gridCol>
+                <a:gridCol w="2313432">
+                  <a:extLst>
+                    <a:ext uri="{9D8B030D-6E8A-4147-A177-3AD203B41FA5}">
+                      <a16:colId xmlns:a16="http://schemas.microsoft.com/office/drawing/2014/main" val="20004"/>
+                    </a:ext>
+                  </a:extLst>
+                </a:gridCol>
               </a:tblGrid>
               <a:tr h="420624">
                 <a:tc>
@@ -5266,7 +5069,7 @@
                     <a:bodyPr/>
                     <a:lstStyle/>
                     <a:p>
-                      <a:pPr indent="0" marL="0">
+                      <a:pPr marL="0" indent="0">
                         <a:buNone/>
                       </a:pPr>
                       <a:endParaRPr lang="en-US" sz="1150" dirty="0">
@@ -5323,7 +5126,7 @@
                     <a:bodyPr/>
                     <a:lstStyle/>
                     <a:p>
-                      <a:pPr indent="0" marL="0">
+                      <a:pPr marL="0" indent="0">
                         <a:buNone/>
                       </a:pPr>
                       <a:r>
@@ -5391,7 +5194,7 @@
                     <a:bodyPr/>
                     <a:lstStyle/>
                     <a:p>
-                      <a:pPr indent="0" marL="0">
+                      <a:pPr marL="0" indent="0">
                         <a:buNone/>
                       </a:pPr>
                       <a:r>
@@ -5459,7 +5262,7 @@
                     <a:bodyPr/>
                     <a:lstStyle/>
                     <a:p>
-                      <a:pPr indent="0" marL="0">
+                      <a:pPr marL="0" indent="0">
                         <a:buNone/>
                       </a:pPr>
                       <a:r>
@@ -5527,7 +5330,7 @@
                     <a:bodyPr/>
                     <a:lstStyle/>
                     <a:p>
-                      <a:pPr indent="0" marL="0">
+                      <a:pPr marL="0" indent="0">
                         <a:buNone/>
                       </a:pPr>
                       <a:r>
@@ -5590,6 +5393,11 @@
                     </a:solidFill>
                   </a:tcPr>
                 </a:tc>
+                <a:extLst>
+                  <a:ext uri="{0D108BD9-81ED-4DB2-BD59-A6C34878D82A}">
+                    <a16:rowId xmlns:a16="http://schemas.microsoft.com/office/drawing/2014/main" val="10000"/>
+                  </a:ext>
+                </a:extLst>
               </a:tr>
               <a:tr h="420624">
                 <a:tc>
@@ -5597,7 +5405,7 @@
                     <a:bodyPr/>
                     <a:lstStyle/>
                     <a:p>
-                      <a:pPr indent="0" marL="0">
+                      <a:pPr marL="0" indent="0">
                         <a:buNone/>
                       </a:pPr>
                       <a:r>
@@ -5665,7 +5473,7 @@
                     <a:bodyPr/>
                     <a:lstStyle/>
                     <a:p>
-                      <a:pPr algn="ctr" indent="0" marL="0">
+                      <a:pPr marL="0" indent="0" algn="ctr">
                         <a:buNone/>
                       </a:pPr>
                       <a:r>
@@ -5733,7 +5541,7 @@
                     <a:bodyPr/>
                     <a:lstStyle/>
                     <a:p>
-                      <a:pPr algn="ctr" indent="0" marL="0">
+                      <a:pPr marL="0" indent="0" algn="ctr">
                         <a:buNone/>
                       </a:pPr>
                       <a:r>
@@ -5801,7 +5609,7 @@
                     <a:bodyPr/>
                     <a:lstStyle/>
                     <a:p>
-                      <a:pPr algn="ctr" indent="0" marL="0">
+                      <a:pPr marL="0" indent="0" algn="ctr">
                         <a:buNone/>
                       </a:pPr>
                       <a:r>
@@ -5869,7 +5677,7 @@
                     <a:bodyPr/>
                     <a:lstStyle/>
                     <a:p>
-                      <a:pPr algn="ctr" indent="0" marL="0">
+                      <a:pPr marL="0" indent="0" algn="ctr">
                         <a:buNone/>
                       </a:pPr>
                       <a:r>
@@ -5932,6 +5740,11 @@
                     </a:solidFill>
                   </a:tcPr>
                 </a:tc>
+                <a:extLst>
+                  <a:ext uri="{0D108BD9-81ED-4DB2-BD59-A6C34878D82A}">
+                    <a16:rowId xmlns:a16="http://schemas.microsoft.com/office/drawing/2014/main" val="10001"/>
+                  </a:ext>
+                </a:extLst>
               </a:tr>
               <a:tr h="420624">
                 <a:tc>
@@ -5939,7 +5752,7 @@
                     <a:bodyPr/>
                     <a:lstStyle/>
                     <a:p>
-                      <a:pPr indent="0" marL="0">
+                      <a:pPr marL="0" indent="0">
                         <a:buNone/>
                       </a:pPr>
                       <a:r>
@@ -6007,7 +5820,7 @@
                     <a:bodyPr/>
                     <a:lstStyle/>
                     <a:p>
-                      <a:pPr algn="ctr" indent="0" marL="0">
+                      <a:pPr marL="0" indent="0" algn="ctr">
                         <a:buNone/>
                       </a:pPr>
                       <a:r>
@@ -6075,7 +5888,7 @@
                     <a:bodyPr/>
                     <a:lstStyle/>
                     <a:p>
-                      <a:pPr algn="ctr" indent="0" marL="0">
+                      <a:pPr marL="0" indent="0" algn="ctr">
                         <a:buNone/>
                       </a:pPr>
                       <a:r>
@@ -6143,7 +5956,7 @@
                     <a:bodyPr/>
                     <a:lstStyle/>
                     <a:p>
-                      <a:pPr algn="ctr" indent="0" marL="0">
+                      <a:pPr marL="0" indent="0" algn="ctr">
                         <a:buNone/>
                       </a:pPr>
                       <a:r>
@@ -6211,7 +6024,7 @@
                     <a:bodyPr/>
                     <a:lstStyle/>
                     <a:p>
-                      <a:pPr algn="ctr" indent="0" marL="0">
+                      <a:pPr marL="0" indent="0" algn="ctr">
                         <a:buNone/>
                       </a:pPr>
                       <a:r>
@@ -6274,6 +6087,11 @@
                     </a:solidFill>
                   </a:tcPr>
                 </a:tc>
+                <a:extLst>
+                  <a:ext uri="{0D108BD9-81ED-4DB2-BD59-A6C34878D82A}">
+                    <a16:rowId xmlns:a16="http://schemas.microsoft.com/office/drawing/2014/main" val="10002"/>
+                  </a:ext>
+                </a:extLst>
               </a:tr>
             </a:tbl>
           </a:graphicData>
@@ -6327,7 +6145,7 @@
           <a:bodyPr wrap="square" lIns="0" tIns="0" rIns="0" bIns="0" rtlCol="0" anchor="ctr"/>
           <a:lstStyle/>
           <a:p>
-            <a:pPr algn="ctr" indent="0" marL="0">
+            <a:pPr marL="0" indent="0" algn="ctr">
               <a:lnSpc>
                 <a:spcPct val="108000"/>
               </a:lnSpc>
@@ -6364,6 +6182,7 @@
         <a:solidFill>
           <a:srgbClr val="F5F7FB"/>
         </a:solidFill>
+        <a:effectLst/>
       </p:bgPr>
     </p:bg>
     <p:spTree>
@@ -6428,11 +6247,11 @@
           <a:bodyPr wrap="square" lIns="0" tIns="0" rIns="0" bIns="0" rtlCol="0" anchor="ctr"/>
           <a:lstStyle/>
           <a:p>
-            <a:pPr algn="ctr" indent="0" marL="0">
-              <a:buNone/>
-            </a:pPr>
-            <a:r>
-              <a:rPr lang="en-US" sz="1150" b="1" spc="100" kern="0" dirty="0">
+            <a:pPr marL="0" indent="0" algn="ctr">
+              <a:buNone/>
+            </a:pPr>
+            <a:r>
+              <a:rPr lang="en-US" sz="1150" b="1" kern="0" spc="100" dirty="0">
                 <a:solidFill>
                   <a:srgbClr val="FFFFFF"/>
                 </a:solidFill>
@@ -6467,7 +6286,7 @@
           <a:bodyPr wrap="square" lIns="0" tIns="0" rIns="0" bIns="0" rtlCol="0" anchor="ctr"/>
           <a:lstStyle/>
           <a:p>
-            <a:pPr indent="0" marL="0">
+            <a:pPr marL="0" indent="0">
               <a:buNone/>
             </a:pPr>
             <a:r>
@@ -6506,7 +6325,7 @@
           <a:bodyPr wrap="square" lIns="0" tIns="0" rIns="0" bIns="0" rtlCol="0" anchor="ctr"/>
           <a:lstStyle/>
           <a:p>
-            <a:pPr indent="0" marL="0">
+            <a:pPr marL="0" indent="0">
               <a:buNone/>
             </a:pPr>
             <a:r>
@@ -6572,7 +6391,7 @@
           <a:bodyPr wrap="square" lIns="0" tIns="0" rIns="0" bIns="0" rtlCol="0" anchor="ctr"/>
           <a:lstStyle/>
           <a:p>
-            <a:pPr algn="ctr" indent="0" marL="0">
+            <a:pPr marL="0" indent="0" algn="ctr">
               <a:buNone/>
             </a:pPr>
             <a:r>
@@ -6611,7 +6430,7 @@
           <a:bodyPr wrap="square" lIns="0" tIns="0" rIns="0" bIns="0" rtlCol="0" anchor="t"/>
           <a:lstStyle/>
           <a:p>
-            <a:pPr algn="ctr" indent="0" marL="0">
+            <a:pPr marL="0" indent="0" algn="ctr">
               <a:lnSpc>
                 <a:spcPct val="108000"/>
               </a:lnSpc>
@@ -6707,7 +6526,7 @@
           <a:bodyPr wrap="square" lIns="0" tIns="0" rIns="0" bIns="0" rtlCol="0" anchor="ctr"/>
           <a:lstStyle/>
           <a:p>
-            <a:pPr indent="0" marL="0">
+            <a:pPr marL="0" indent="0">
               <a:buNone/>
             </a:pPr>
             <a:r>
@@ -6746,7 +6565,7 @@
           <a:bodyPr wrap="square" lIns="0" tIns="0" rIns="0" bIns="0" rtlCol="0" anchor="t"/>
           <a:lstStyle/>
           <a:p>
-            <a:pPr algn="l" indent="0" marL="0">
+            <a:pPr marL="0" indent="0" algn="l">
               <a:lnSpc>
                 <a:spcPct val="108000"/>
               </a:lnSpc>
@@ -6788,7 +6607,7 @@
           <a:bodyPr wrap="square" lIns="0" tIns="0" rIns="0" bIns="0" rtlCol="0" anchor="t"/>
           <a:lstStyle/>
           <a:p>
-            <a:pPr algn="l" indent="0" marL="0">
+            <a:pPr marL="0" indent="0" algn="l">
               <a:lnSpc>
                 <a:spcPct val="108000"/>
               </a:lnSpc>
@@ -6884,7 +6703,7 @@
           <a:bodyPr wrap="square" lIns="0" tIns="0" rIns="0" bIns="0" rtlCol="0" anchor="ctr"/>
           <a:lstStyle/>
           <a:p>
-            <a:pPr algn="ctr" indent="0" marL="0">
+            <a:pPr marL="0" indent="0" algn="ctr">
               <a:buNone/>
             </a:pPr>
             <a:r>
@@ -6923,7 +6742,7 @@
           <a:bodyPr wrap="square" lIns="0" tIns="0" rIns="0" bIns="0" rtlCol="0" anchor="ctr"/>
           <a:lstStyle/>
           <a:p>
-            <a:pPr indent="0" marL="0">
+            <a:pPr marL="0" indent="0">
               <a:buNone/>
             </a:pPr>
             <a:r>
@@ -7016,7 +6835,7 @@
           <a:bodyPr wrap="square" lIns="0" tIns="0" rIns="0" bIns="0" rtlCol="0" anchor="ctr"/>
           <a:lstStyle/>
           <a:p>
-            <a:pPr algn="ctr" indent="0" marL="0">
+            <a:pPr marL="0" indent="0" algn="ctr">
               <a:buNone/>
             </a:pPr>
             <a:r>
@@ -7055,7 +6874,7 @@
           <a:bodyPr wrap="square" lIns="0" tIns="0" rIns="0" bIns="0" rtlCol="0" anchor="ctr"/>
           <a:lstStyle/>
           <a:p>
-            <a:pPr indent="0" marL="0">
+            <a:pPr marL="0" indent="0">
               <a:buNone/>
             </a:pPr>
             <a:r>
@@ -7094,7 +6913,7 @@
           <a:bodyPr wrap="square" lIns="0" tIns="0" rIns="0" bIns="0" rtlCol="0" anchor="ctr"/>
           <a:lstStyle/>
           <a:p>
-            <a:pPr indent="0" marL="0">
+            <a:pPr marL="0" indent="0">
               <a:buNone/>
             </a:pPr>
             <a:r>
@@ -7187,7 +7006,7 @@
           <a:bodyPr wrap="square" lIns="0" tIns="0" rIns="0" bIns="0" rtlCol="0" anchor="ctr"/>
           <a:lstStyle/>
           <a:p>
-            <a:pPr algn="ctr" indent="0" marL="0">
+            <a:pPr marL="0" indent="0" algn="ctr">
               <a:buNone/>
             </a:pPr>
             <a:r>
@@ -7226,7 +7045,7 @@
           <a:bodyPr wrap="square" lIns="0" tIns="0" rIns="0" bIns="0" rtlCol="0" anchor="ctr"/>
           <a:lstStyle/>
           <a:p>
-            <a:pPr indent="0" marL="0">
+            <a:pPr marL="0" indent="0">
               <a:buNone/>
             </a:pPr>
             <a:r>
@@ -7319,7 +7138,7 @@
           <a:bodyPr wrap="square" lIns="0" tIns="0" rIns="0" bIns="0" rtlCol="0" anchor="ctr"/>
           <a:lstStyle/>
           <a:p>
-            <a:pPr algn="ctr" indent="0" marL="0">
+            <a:pPr marL="0" indent="0" algn="ctr">
               <a:buNone/>
             </a:pPr>
             <a:r>
@@ -7358,7 +7177,7 @@
           <a:bodyPr wrap="square" lIns="0" tIns="0" rIns="0" bIns="0" rtlCol="0" anchor="ctr"/>
           <a:lstStyle/>
           <a:p>
-            <a:pPr indent="0" marL="0">
+            <a:pPr marL="0" indent="0">
               <a:buNone/>
             </a:pPr>
             <a:r>
@@ -7451,7 +7270,7 @@
           <a:bodyPr wrap="square" lIns="0" tIns="0" rIns="0" bIns="0" rtlCol="0" anchor="ctr"/>
           <a:lstStyle/>
           <a:p>
-            <a:pPr indent="0" marL="0">
+            <a:pPr marL="0" indent="0">
               <a:buNone/>
             </a:pPr>
             <a:r>
@@ -7490,7 +7309,7 @@
           <a:bodyPr wrap="square" lIns="0" tIns="0" rIns="0" bIns="0" rtlCol="0" anchor="t"/>
           <a:lstStyle/>
           <a:p>
-            <a:pPr algn="l" indent="0" marL="0">
+            <a:pPr marL="0" indent="0" algn="l">
               <a:lnSpc>
                 <a:spcPct val="110000"/>
               </a:lnSpc>
@@ -7510,7 +7329,7 @@
             <a:endParaRPr lang="en-US" sz="1200" dirty="0"/>
           </a:p>
           <a:p>
-            <a:pPr algn="l" indent="0" marL="0">
+            <a:pPr marL="0" indent="0" algn="l">
               <a:lnSpc>
                 <a:spcPct val="110000"/>
               </a:lnSpc>
@@ -7519,7 +7338,7 @@
             <a:endParaRPr lang="en-US" sz="1200" dirty="0"/>
           </a:p>
           <a:p>
-            <a:pPr algn="l" indent="0" marL="0">
+            <a:pPr marL="0" indent="0" algn="l">
               <a:lnSpc>
                 <a:spcPct val="110000"/>
               </a:lnSpc>
@@ -7615,7 +7434,7 @@
           <a:bodyPr wrap="square" lIns="0" tIns="0" rIns="0" bIns="0" rtlCol="0" anchor="ctr"/>
           <a:lstStyle/>
           <a:p>
-            <a:pPr indent="0" marL="0">
+            <a:pPr marL="0" indent="0">
               <a:buNone/>
             </a:pPr>
             <a:r>
@@ -7654,7 +7473,7 @@
           <a:bodyPr wrap="square" lIns="0" tIns="0" rIns="0" bIns="0" rtlCol="0" anchor="t"/>
           <a:lstStyle/>
           <a:p>
-            <a:pPr algn="l" indent="0" marL="0">
+            <a:pPr marL="0" indent="0" algn="l">
               <a:lnSpc>
                 <a:spcPct val="108000"/>
               </a:lnSpc>
@@ -7691,6 +7510,7 @@
         <a:solidFill>
           <a:srgbClr val="F5F7FB"/>
         </a:solidFill>
+        <a:effectLst/>
       </p:bgPr>
     </p:bg>
     <p:spTree>
@@ -7755,11 +7575,11 @@
           <a:bodyPr wrap="square" lIns="0" tIns="0" rIns="0" bIns="0" rtlCol="0" anchor="ctr"/>
           <a:lstStyle/>
           <a:p>
-            <a:pPr algn="ctr" indent="0" marL="0">
-              <a:buNone/>
-            </a:pPr>
-            <a:r>
-              <a:rPr lang="en-US" sz="1150" b="1" spc="100" kern="0" dirty="0">
+            <a:pPr marL="0" indent="0" algn="ctr">
+              <a:buNone/>
+            </a:pPr>
+            <a:r>
+              <a:rPr lang="en-US" sz="1150" b="1" kern="0" spc="100" dirty="0">
                 <a:solidFill>
                   <a:srgbClr val="FFFFFF"/>
                 </a:solidFill>
@@ -7794,7 +7614,7 @@
           <a:bodyPr wrap="square" lIns="0" tIns="0" rIns="0" bIns="0" rtlCol="0" anchor="ctr"/>
           <a:lstStyle/>
           <a:p>
-            <a:pPr indent="0" marL="0">
+            <a:pPr marL="0" indent="0">
               <a:buNone/>
             </a:pPr>
             <a:r>
@@ -7833,7 +7653,7 @@
           <a:bodyPr wrap="square" lIns="0" tIns="0" rIns="0" bIns="0" rtlCol="0" anchor="ctr"/>
           <a:lstStyle/>
           <a:p>
-            <a:pPr indent="0" marL="0">
+            <a:pPr marL="0" indent="0">
               <a:buNone/>
             </a:pPr>
             <a:r>
@@ -7926,7 +7746,7 @@
           <a:bodyPr wrap="square" lIns="0" tIns="0" rIns="0" bIns="0" rtlCol="0" anchor="ctr"/>
           <a:lstStyle/>
           <a:p>
-            <a:pPr indent="0" marL="0">
+            <a:pPr marL="0" indent="0">
               <a:buNone/>
             </a:pPr>
             <a:r>
@@ -7965,7 +7785,7 @@
           <a:bodyPr wrap="square" lIns="0" tIns="0" rIns="0" bIns="0" rtlCol="0" anchor="t"/>
           <a:lstStyle/>
           <a:p>
-            <a:pPr algn="l" indent="0" marL="0">
+            <a:pPr marL="0" indent="0" algn="l">
               <a:lnSpc>
                 <a:spcPct val="110000"/>
               </a:lnSpc>
@@ -7985,7 +7805,7 @@
             <a:endParaRPr lang="en-US" sz="1150" dirty="0"/>
           </a:p>
           <a:p>
-            <a:pPr algn="l" indent="0" marL="0">
+            <a:pPr marL="0" indent="0" algn="l">
               <a:lnSpc>
                 <a:spcPct val="110000"/>
               </a:lnSpc>
@@ -7994,7 +7814,7 @@
             <a:endParaRPr lang="en-US" sz="1150" dirty="0"/>
           </a:p>
           <a:p>
-            <a:pPr algn="l" indent="0" marL="0">
+            <a:pPr marL="0" indent="0" algn="l">
               <a:lnSpc>
                 <a:spcPct val="110000"/>
               </a:lnSpc>
@@ -8014,7 +7834,7 @@
             <a:endParaRPr lang="en-US" sz="1150" dirty="0"/>
           </a:p>
           <a:p>
-            <a:pPr algn="l" indent="0" marL="0">
+            <a:pPr marL="0" indent="0" algn="l">
               <a:lnSpc>
                 <a:spcPct val="110000"/>
               </a:lnSpc>
@@ -8023,7 +7843,7 @@
             <a:endParaRPr lang="en-US" sz="1150" dirty="0"/>
           </a:p>
           <a:p>
-            <a:pPr algn="l" indent="0" marL="0">
+            <a:pPr marL="0" indent="0" algn="l">
               <a:lnSpc>
                 <a:spcPct val="110000"/>
               </a:lnSpc>
@@ -8119,7 +7939,7 @@
           <a:bodyPr wrap="square" lIns="0" tIns="0" rIns="0" bIns="0" rtlCol="0" anchor="ctr"/>
           <a:lstStyle/>
           <a:p>
-            <a:pPr indent="0" marL="0">
+            <a:pPr marL="0" indent="0">
               <a:buNone/>
             </a:pPr>
             <a:r>
@@ -8158,7 +7978,7 @@
           <a:bodyPr wrap="square" lIns="0" tIns="0" rIns="0" bIns="0" rtlCol="0" anchor="t"/>
           <a:lstStyle/>
           <a:p>
-            <a:pPr algn="l" indent="0" marL="0">
+            <a:pPr marL="0" indent="0" algn="l">
               <a:lnSpc>
                 <a:spcPct val="106000"/>
               </a:lnSpc>
@@ -8254,7 +8074,7 @@
           <a:bodyPr wrap="square" lIns="0" tIns="0" rIns="0" bIns="0" rtlCol="0" anchor="ctr"/>
           <a:lstStyle/>
           <a:p>
-            <a:pPr indent="0" marL="0">
+            <a:pPr marL="0" indent="0">
               <a:buNone/>
             </a:pPr>
             <a:r>
@@ -8293,7 +8113,7 @@
           <a:bodyPr wrap="square" lIns="0" tIns="0" rIns="0" bIns="0" rtlCol="0" anchor="t"/>
           <a:lstStyle/>
           <a:p>
-            <a:pPr algn="l" indent="0" marL="0">
+            <a:pPr marL="0" indent="0" algn="l">
               <a:lnSpc>
                 <a:spcPct val="106000"/>
               </a:lnSpc>
@@ -8389,7 +8209,7 @@
           <a:bodyPr wrap="square" lIns="0" tIns="0" rIns="0" bIns="0" rtlCol="0" anchor="ctr"/>
           <a:lstStyle/>
           <a:p>
-            <a:pPr indent="0" marL="0">
+            <a:pPr marL="0" indent="0">
               <a:buNone/>
             </a:pPr>
             <a:r>
@@ -8428,7 +8248,7 @@
           <a:bodyPr wrap="square" lIns="0" tIns="0" rIns="0" bIns="0" rtlCol="0" anchor="t"/>
           <a:lstStyle/>
           <a:p>
-            <a:pPr algn="l" indent="0" marL="0">
+            <a:pPr marL="0" indent="0" algn="l">
               <a:lnSpc>
                 <a:spcPct val="110000"/>
               </a:lnSpc>
@@ -8470,7 +8290,7 @@
           <a:bodyPr wrap="square" lIns="0" tIns="0" rIns="0" bIns="0" rtlCol="0" anchor="ctr"/>
           <a:lstStyle/>
           <a:p>
-            <a:pPr indent="0" marL="0">
+            <a:pPr marL="0" indent="0">
               <a:buNone/>
             </a:pPr>
             <a:r>
@@ -8504,6 +8324,7 @@
         <a:solidFill>
           <a:srgbClr val="F5F7FB"/>
         </a:solidFill>
+        <a:effectLst/>
       </p:bgPr>
     </p:bg>
     <p:spTree>
@@ -8568,11 +8389,11 @@
           <a:bodyPr wrap="square" lIns="0" tIns="0" rIns="0" bIns="0" rtlCol="0" anchor="ctr"/>
           <a:lstStyle/>
           <a:p>
-            <a:pPr algn="ctr" indent="0" marL="0">
-              <a:buNone/>
-            </a:pPr>
-            <a:r>
-              <a:rPr lang="en-US" sz="1150" b="1" spc="100" kern="0" dirty="0">
+            <a:pPr marL="0" indent="0" algn="ctr">
+              <a:buNone/>
+            </a:pPr>
+            <a:r>
+              <a:rPr lang="en-US" sz="1150" b="1" kern="0" spc="100" dirty="0">
                 <a:solidFill>
                   <a:srgbClr val="FFFFFF"/>
                 </a:solidFill>
@@ -8607,7 +8428,7 @@
           <a:bodyPr wrap="square" lIns="0" tIns="0" rIns="0" bIns="0" rtlCol="0" anchor="ctr"/>
           <a:lstStyle/>
           <a:p>
-            <a:pPr indent="0" marL="0">
+            <a:pPr marL="0" indent="0">
               <a:buNone/>
             </a:pPr>
             <a:r>
@@ -8646,7 +8467,7 @@
           <a:bodyPr wrap="square" lIns="0" tIns="0" rIns="0" bIns="0" rtlCol="0" anchor="ctr"/>
           <a:lstStyle/>
           <a:p>
-            <a:pPr indent="0" marL="0">
+            <a:pPr marL="0" indent="0">
               <a:buNone/>
             </a:pPr>
             <a:r>
@@ -8739,11 +8560,11 @@
           <a:bodyPr wrap="square" lIns="0" tIns="0" rIns="0" bIns="0" rtlCol="0" anchor="ctr"/>
           <a:lstStyle/>
           <a:p>
-            <a:pPr algn="ctr" indent="0" marL="0">
-              <a:buNone/>
-            </a:pPr>
-            <a:r>
-              <a:rPr lang="en-US" sz="1300" b="1" spc="100" kern="0" dirty="0">
+            <a:pPr marL="0" indent="0" algn="ctr">
+              <a:buNone/>
+            </a:pPr>
+            <a:r>
+              <a:rPr lang="en-US" sz="1300" b="1" kern="0" spc="100" dirty="0">
                 <a:solidFill>
                   <a:srgbClr val="FFFFFF"/>
                 </a:solidFill>
@@ -8778,7 +8599,7 @@
           <a:bodyPr wrap="square" lIns="0" tIns="0" rIns="0" bIns="0" rtlCol="0" anchor="ctr"/>
           <a:lstStyle/>
           <a:p>
-            <a:pPr indent="0" marL="0">
+            <a:pPr marL="0" indent="0">
               <a:buNone/>
             </a:pPr>
             <a:r>
@@ -8817,7 +8638,7 @@
           <a:bodyPr wrap="square" lIns="0" tIns="0" rIns="0" bIns="0" rtlCol="0" anchor="ctr"/>
           <a:lstStyle/>
           <a:p>
-            <a:pPr algn="l" indent="0" marL="0">
+            <a:pPr marL="0" indent="0" algn="l">
               <a:lnSpc>
                 <a:spcPct val="108000"/>
               </a:lnSpc>
@@ -8859,7 +8680,7 @@
           <a:bodyPr wrap="square" lIns="0" tIns="0" rIns="0" bIns="0" rtlCol="0" anchor="ctr"/>
           <a:lstStyle/>
           <a:p>
-            <a:pPr indent="0" marL="0">
+            <a:pPr marL="0" indent="0">
               <a:buNone/>
             </a:pPr>
             <a:r>
@@ -8952,11 +8773,11 @@
           <a:bodyPr wrap="square" lIns="0" tIns="0" rIns="0" bIns="0" rtlCol="0" anchor="ctr"/>
           <a:lstStyle/>
           <a:p>
-            <a:pPr algn="ctr" indent="0" marL="0">
-              <a:buNone/>
-            </a:pPr>
-            <a:r>
-              <a:rPr lang="en-US" sz="1300" b="1" spc="100" kern="0" dirty="0">
+            <a:pPr marL="0" indent="0" algn="ctr">
+              <a:buNone/>
+            </a:pPr>
+            <a:r>
+              <a:rPr lang="en-US" sz="1300" b="1" kern="0" spc="100" dirty="0">
                 <a:solidFill>
                   <a:srgbClr val="FFFFFF"/>
                 </a:solidFill>
@@ -8991,7 +8812,7 @@
           <a:bodyPr wrap="square" lIns="0" tIns="0" rIns="0" bIns="0" rtlCol="0" anchor="ctr"/>
           <a:lstStyle/>
           <a:p>
-            <a:pPr indent="0" marL="0">
+            <a:pPr marL="0" indent="0">
               <a:buNone/>
             </a:pPr>
             <a:r>
@@ -9030,7 +8851,7 @@
           <a:bodyPr wrap="square" lIns="0" tIns="0" rIns="0" bIns="0" rtlCol="0" anchor="ctr"/>
           <a:lstStyle/>
           <a:p>
-            <a:pPr algn="l" indent="0" marL="0">
+            <a:pPr marL="0" indent="0" algn="l">
               <a:lnSpc>
                 <a:spcPct val="108000"/>
               </a:lnSpc>
@@ -9072,7 +8893,7 @@
           <a:bodyPr wrap="square" lIns="0" tIns="0" rIns="0" bIns="0" rtlCol="0" anchor="ctr"/>
           <a:lstStyle/>
           <a:p>
-            <a:pPr indent="0" marL="0">
+            <a:pPr marL="0" indent="0">
               <a:buNone/>
             </a:pPr>
             <a:r>
@@ -9165,11 +8986,11 @@
           <a:bodyPr wrap="square" lIns="0" tIns="0" rIns="0" bIns="0" rtlCol="0" anchor="ctr"/>
           <a:lstStyle/>
           <a:p>
-            <a:pPr algn="ctr" indent="0" marL="0">
-              <a:buNone/>
-            </a:pPr>
-            <a:r>
-              <a:rPr lang="en-US" sz="1300" b="1" spc="100" kern="0" dirty="0">
+            <a:pPr marL="0" indent="0" algn="ctr">
+              <a:buNone/>
+            </a:pPr>
+            <a:r>
+              <a:rPr lang="en-US" sz="1300" b="1" kern="0" spc="100" dirty="0">
                 <a:solidFill>
                   <a:srgbClr val="FFFFFF"/>
                 </a:solidFill>
@@ -9204,7 +9025,7 @@
           <a:bodyPr wrap="square" lIns="0" tIns="0" rIns="0" bIns="0" rtlCol="0" anchor="ctr"/>
           <a:lstStyle/>
           <a:p>
-            <a:pPr indent="0" marL="0">
+            <a:pPr marL="0" indent="0">
               <a:buNone/>
             </a:pPr>
             <a:r>
@@ -9243,7 +9064,7 @@
           <a:bodyPr wrap="square" lIns="0" tIns="0" rIns="0" bIns="0" rtlCol="0" anchor="ctr"/>
           <a:lstStyle/>
           <a:p>
-            <a:pPr algn="l" indent="0" marL="0">
+            <a:pPr marL="0" indent="0" algn="l">
               <a:lnSpc>
                 <a:spcPct val="108000"/>
               </a:lnSpc>
@@ -9285,7 +9106,7 @@
           <a:bodyPr wrap="square" lIns="0" tIns="0" rIns="0" bIns="0" rtlCol="0" anchor="ctr"/>
           <a:lstStyle/>
           <a:p>
-            <a:pPr indent="0" marL="0">
+            <a:pPr marL="0" indent="0">
               <a:buNone/>
             </a:pPr>
             <a:r>
@@ -9378,11 +9199,11 @@
           <a:bodyPr wrap="square" lIns="0" tIns="0" rIns="0" bIns="0" rtlCol="0" anchor="ctr"/>
           <a:lstStyle/>
           <a:p>
-            <a:pPr algn="ctr" indent="0" marL="0">
-              <a:buNone/>
-            </a:pPr>
-            <a:r>
-              <a:rPr lang="en-US" sz="1300" b="1" spc="100" kern="0" dirty="0">
+            <a:pPr marL="0" indent="0" algn="ctr">
+              <a:buNone/>
+            </a:pPr>
+            <a:r>
+              <a:rPr lang="en-US" sz="1300" b="1" kern="0" spc="100" dirty="0">
                 <a:solidFill>
                   <a:srgbClr val="FFFFFF"/>
                 </a:solidFill>
@@ -9417,7 +9238,7 @@
           <a:bodyPr wrap="square" lIns="0" tIns="0" rIns="0" bIns="0" rtlCol="0" anchor="ctr"/>
           <a:lstStyle/>
           <a:p>
-            <a:pPr indent="0" marL="0">
+            <a:pPr marL="0" indent="0">
               <a:buNone/>
             </a:pPr>
             <a:r>
@@ -9456,7 +9277,7 @@
           <a:bodyPr wrap="square" lIns="0" tIns="0" rIns="0" bIns="0" rtlCol="0" anchor="ctr"/>
           <a:lstStyle/>
           <a:p>
-            <a:pPr algn="l" indent="0" marL="0">
+            <a:pPr marL="0" indent="0" algn="l">
               <a:lnSpc>
                 <a:spcPct val="108000"/>
               </a:lnSpc>
@@ -9498,7 +9319,7 @@
           <a:bodyPr wrap="square" lIns="0" tIns="0" rIns="0" bIns="0" rtlCol="0" anchor="ctr"/>
           <a:lstStyle/>
           <a:p>
-            <a:pPr indent="0" marL="0">
+            <a:pPr marL="0" indent="0">
               <a:buNone/>
             </a:pPr>
             <a:r>
@@ -9564,7 +9385,7 @@
           <a:bodyPr wrap="square" lIns="0" tIns="0" rIns="0" bIns="0" rtlCol="0" anchor="ctr"/>
           <a:lstStyle/>
           <a:p>
-            <a:pPr algn="l" indent="0" marL="0">
+            <a:pPr marL="0" indent="0" algn="l">
               <a:lnSpc>
                 <a:spcPct val="108000"/>
               </a:lnSpc>
@@ -9601,6 +9422,7 @@
         <a:solidFill>
           <a:srgbClr val="F5F7FB"/>
         </a:solidFill>
+        <a:effectLst/>
       </p:bgPr>
     </p:bg>
     <p:spTree>
@@ -9665,11 +9487,11 @@
           <a:bodyPr wrap="square" lIns="0" tIns="0" rIns="0" bIns="0" rtlCol="0" anchor="ctr"/>
           <a:lstStyle/>
           <a:p>
-            <a:pPr algn="ctr" indent="0" marL="0">
-              <a:buNone/>
-            </a:pPr>
-            <a:r>
-              <a:rPr lang="en-US" sz="1150" b="1" spc="100" kern="0" dirty="0">
+            <a:pPr marL="0" indent="0" algn="ctr">
+              <a:buNone/>
+            </a:pPr>
+            <a:r>
+              <a:rPr lang="en-US" sz="1150" b="1" kern="0" spc="100" dirty="0">
                 <a:solidFill>
                   <a:srgbClr val="FFFFFF"/>
                 </a:solidFill>
@@ -9704,7 +9526,7 @@
           <a:bodyPr wrap="square" lIns="0" tIns="0" rIns="0" bIns="0" rtlCol="0" anchor="ctr"/>
           <a:lstStyle/>
           <a:p>
-            <a:pPr indent="0" marL="0">
+            <a:pPr marL="0" indent="0">
               <a:buNone/>
             </a:pPr>
             <a:r>
@@ -9743,7 +9565,7 @@
           <a:bodyPr wrap="square" lIns="0" tIns="0" rIns="0" bIns="0" rtlCol="0" anchor="ctr"/>
           <a:lstStyle/>
           <a:p>
-            <a:pPr indent="0" marL="0">
+            <a:pPr marL="0" indent="0">
               <a:buNone/>
             </a:pPr>
             <a:r>
@@ -9836,11 +9658,11 @@
           <a:bodyPr wrap="square" lIns="0" tIns="0" rIns="0" bIns="0" rtlCol="0" anchor="ctr"/>
           <a:lstStyle/>
           <a:p>
-            <a:pPr algn="ctr" indent="0" marL="0">
-              <a:buNone/>
-            </a:pPr>
-            <a:r>
-              <a:rPr lang="en-US" sz="1300" b="1" spc="100" kern="0" dirty="0">
+            <a:pPr marL="0" indent="0" algn="ctr">
+              <a:buNone/>
+            </a:pPr>
+            <a:r>
+              <a:rPr lang="en-US" sz="1300" b="1" kern="0" spc="100" dirty="0">
                 <a:solidFill>
                   <a:srgbClr val="FFFFFF"/>
                 </a:solidFill>
@@ -9875,7 +9697,7 @@
           <a:bodyPr wrap="square" lIns="0" tIns="0" rIns="0" bIns="0" rtlCol="0" anchor="ctr"/>
           <a:lstStyle/>
           <a:p>
-            <a:pPr indent="0" marL="0">
+            <a:pPr marL="0" indent="0">
               <a:buNone/>
             </a:pPr>
             <a:r>
@@ -9914,7 +9736,7 @@
           <a:bodyPr wrap="square" lIns="0" tIns="0" rIns="0" bIns="0" rtlCol="0" anchor="ctr"/>
           <a:lstStyle/>
           <a:p>
-            <a:pPr indent="0" marL="0">
+            <a:pPr marL="0" indent="0">
               <a:buNone/>
             </a:pPr>
             <a:r>
@@ -9953,7 +9775,7 @@
           <a:bodyPr wrap="square" lIns="0" tIns="0" rIns="0" bIns="0" rtlCol="0" anchor="ctr"/>
           <a:lstStyle/>
           <a:p>
-            <a:pPr algn="l" indent="0" marL="0">
+            <a:pPr marL="0" indent="0" algn="l">
               <a:lnSpc>
                 <a:spcPct val="106000"/>
               </a:lnSpc>
@@ -10049,11 +9871,11 @@
           <a:bodyPr wrap="square" lIns="0" tIns="0" rIns="0" bIns="0" rtlCol="0" anchor="ctr"/>
           <a:lstStyle/>
           <a:p>
-            <a:pPr algn="ctr" indent="0" marL="0">
-              <a:buNone/>
-            </a:pPr>
-            <a:r>
-              <a:rPr lang="en-US" sz="1300" b="1" spc="100" kern="0" dirty="0">
+            <a:pPr marL="0" indent="0" algn="ctr">
+              <a:buNone/>
+            </a:pPr>
+            <a:r>
+              <a:rPr lang="en-US" sz="1300" b="1" kern="0" spc="100" dirty="0">
                 <a:solidFill>
                   <a:srgbClr val="FFFFFF"/>
                 </a:solidFill>
@@ -10088,7 +9910,7 @@
           <a:bodyPr wrap="square" lIns="0" tIns="0" rIns="0" bIns="0" rtlCol="0" anchor="ctr"/>
           <a:lstStyle/>
           <a:p>
-            <a:pPr indent="0" marL="0">
+            <a:pPr marL="0" indent="0">
               <a:buNone/>
             </a:pPr>
             <a:r>
@@ -10127,7 +9949,7 @@
           <a:bodyPr wrap="square" lIns="0" tIns="0" rIns="0" bIns="0" rtlCol="0" anchor="ctr"/>
           <a:lstStyle/>
           <a:p>
-            <a:pPr indent="0" marL="0">
+            <a:pPr marL="0" indent="0">
               <a:buNone/>
             </a:pPr>
             <a:r>
@@ -10166,7 +9988,7 @@
           <a:bodyPr wrap="square" lIns="0" tIns="0" rIns="0" bIns="0" rtlCol="0" anchor="ctr"/>
           <a:lstStyle/>
           <a:p>
-            <a:pPr algn="l" indent="0" marL="0">
+            <a:pPr marL="0" indent="0" algn="l">
               <a:lnSpc>
                 <a:spcPct val="106000"/>
               </a:lnSpc>
@@ -10262,11 +10084,11 @@
           <a:bodyPr wrap="square" lIns="0" tIns="0" rIns="0" bIns="0" rtlCol="0" anchor="ctr"/>
           <a:lstStyle/>
           <a:p>
-            <a:pPr algn="ctr" indent="0" marL="0">
-              <a:buNone/>
-            </a:pPr>
-            <a:r>
-              <a:rPr lang="en-US" sz="1300" b="1" spc="100" kern="0" dirty="0">
+            <a:pPr marL="0" indent="0" algn="ctr">
+              <a:buNone/>
+            </a:pPr>
+            <a:r>
+              <a:rPr lang="en-US" sz="1300" b="1" kern="0" spc="100" dirty="0">
                 <a:solidFill>
                   <a:srgbClr val="FFFFFF"/>
                 </a:solidFill>
@@ -10301,7 +10123,7 @@
           <a:bodyPr wrap="square" lIns="0" tIns="0" rIns="0" bIns="0" rtlCol="0" anchor="ctr"/>
           <a:lstStyle/>
           <a:p>
-            <a:pPr indent="0" marL="0">
+            <a:pPr marL="0" indent="0">
               <a:buNone/>
             </a:pPr>
             <a:r>
@@ -10340,7 +10162,7 @@
           <a:bodyPr wrap="square" lIns="0" tIns="0" rIns="0" bIns="0" rtlCol="0" anchor="ctr"/>
           <a:lstStyle/>
           <a:p>
-            <a:pPr indent="0" marL="0">
+            <a:pPr marL="0" indent="0">
               <a:buNone/>
             </a:pPr>
             <a:r>
@@ -10379,7 +10201,7 @@
           <a:bodyPr wrap="square" lIns="0" tIns="0" rIns="0" bIns="0" rtlCol="0" anchor="ctr"/>
           <a:lstStyle/>
           <a:p>
-            <a:pPr algn="l" indent="0" marL="0">
+            <a:pPr marL="0" indent="0" algn="l">
               <a:lnSpc>
                 <a:spcPct val="106000"/>
               </a:lnSpc>
@@ -10475,11 +10297,11 @@
           <a:bodyPr wrap="square" lIns="0" tIns="0" rIns="0" bIns="0" rtlCol="0" anchor="ctr"/>
           <a:lstStyle/>
           <a:p>
-            <a:pPr algn="ctr" indent="0" marL="0">
-              <a:buNone/>
-            </a:pPr>
-            <a:r>
-              <a:rPr lang="en-US" sz="1300" b="1" spc="100" kern="0" dirty="0">
+            <a:pPr marL="0" indent="0" algn="ctr">
+              <a:buNone/>
+            </a:pPr>
+            <a:r>
+              <a:rPr lang="en-US" sz="1300" b="1" kern="0" spc="100" dirty="0">
                 <a:solidFill>
                   <a:srgbClr val="FFFFFF"/>
                 </a:solidFill>
@@ -10514,7 +10336,7 @@
           <a:bodyPr wrap="square" lIns="0" tIns="0" rIns="0" bIns="0" rtlCol="0" anchor="ctr"/>
           <a:lstStyle/>
           <a:p>
-            <a:pPr indent="0" marL="0">
+            <a:pPr marL="0" indent="0">
               <a:buNone/>
             </a:pPr>
             <a:r>
@@ -10553,7 +10375,7 @@
           <a:bodyPr wrap="square" lIns="0" tIns="0" rIns="0" bIns="0" rtlCol="0" anchor="ctr"/>
           <a:lstStyle/>
           <a:p>
-            <a:pPr indent="0" marL="0">
+            <a:pPr marL="0" indent="0">
               <a:buNone/>
             </a:pPr>
             <a:r>
@@ -10592,7 +10414,7 @@
           <a:bodyPr wrap="square" lIns="0" tIns="0" rIns="0" bIns="0" rtlCol="0" anchor="ctr"/>
           <a:lstStyle/>
           <a:p>
-            <a:pPr algn="l" indent="0" marL="0">
+            <a:pPr marL="0" indent="0" algn="l">
               <a:lnSpc>
                 <a:spcPct val="106000"/>
               </a:lnSpc>
@@ -10661,7 +10483,7 @@
           <a:bodyPr wrap="square" lIns="0" tIns="0" rIns="0" bIns="0" rtlCol="0" anchor="ctr"/>
           <a:lstStyle/>
           <a:p>
-            <a:pPr algn="l" indent="0" marL="0">
+            <a:pPr marL="0" indent="0" algn="l">
               <a:lnSpc>
                 <a:spcPct val="108000"/>
               </a:lnSpc>
@@ -10698,6 +10520,7 @@
         <a:solidFill>
           <a:srgbClr val="0A2559"/>
         </a:solidFill>
+        <a:effectLst/>
       </p:bgPr>
     </p:bg>
     <p:spTree>
@@ -10762,7 +10585,7 @@
           <a:bodyPr wrap="square" lIns="0" tIns="0" rIns="0" bIns="0" rtlCol="0" anchor="ctr"/>
           <a:lstStyle/>
           <a:p>
-            <a:pPr algn="ctr" indent="0" marL="0">
+            <a:pPr marL="0" indent="0" algn="ctr">
               <a:buNone/>
             </a:pPr>
             <a:r>
@@ -10828,7 +10651,7 @@
           <a:bodyPr wrap="square" lIns="0" tIns="0" rIns="0" bIns="0" rtlCol="0" anchor="ctr"/>
           <a:lstStyle/>
           <a:p>
-            <a:pPr algn="ctr" indent="0" marL="0">
+            <a:pPr marL="0" indent="0" algn="ctr">
               <a:buNone/>
             </a:pPr>
             <a:r>
@@ -10894,7 +10717,7 @@
           <a:bodyPr wrap="square" lIns="0" tIns="0" rIns="0" bIns="0" rtlCol="0" anchor="ctr"/>
           <a:lstStyle/>
           <a:p>
-            <a:pPr algn="ctr" indent="0" marL="0">
+            <a:pPr marL="0" indent="0" algn="ctr">
               <a:buNone/>
             </a:pPr>
             <a:r>
@@ -10960,7 +10783,7 @@
           <a:bodyPr wrap="square" lIns="0" tIns="0" rIns="0" bIns="0" rtlCol="0" anchor="ctr"/>
           <a:lstStyle/>
           <a:p>
-            <a:pPr algn="ctr" indent="0" marL="0">
+            <a:pPr marL="0" indent="0" algn="ctr">
               <a:buNone/>
             </a:pPr>
             <a:r>
@@ -11026,11 +10849,11 @@
           <a:bodyPr wrap="square" lIns="0" tIns="0" rIns="0" bIns="0" rtlCol="0" anchor="ctr"/>
           <a:lstStyle/>
           <a:p>
-            <a:pPr algn="ctr" indent="0" marL="0">
-              <a:buNone/>
-            </a:pPr>
-            <a:r>
-              <a:rPr lang="en-US" sz="1150" b="1" spc="100" kern="0" dirty="0">
+            <a:pPr marL="0" indent="0" algn="ctr">
+              <a:buNone/>
+            </a:pPr>
+            <a:r>
+              <a:rPr lang="en-US" sz="1150" b="1" kern="0" spc="100" dirty="0">
                 <a:solidFill>
                   <a:srgbClr val="FFFFFF"/>
                 </a:solidFill>
@@ -11065,7 +10888,7 @@
           <a:bodyPr wrap="square" lIns="0" tIns="0" rIns="0" bIns="0" rtlCol="0" anchor="ctr"/>
           <a:lstStyle/>
           <a:p>
-            <a:pPr indent="0" marL="0">
+            <a:pPr marL="0" indent="0">
               <a:buNone/>
             </a:pPr>
             <a:r>
@@ -11104,7 +10927,7 @@
           <a:bodyPr wrap="square" lIns="0" tIns="0" rIns="0" bIns="0" rtlCol="0" anchor="t"/>
           <a:lstStyle/>
           <a:p>
-            <a:pPr algn="l" indent="0" marL="0">
+            <a:pPr marL="0" indent="0" algn="l">
               <a:lnSpc>
                 <a:spcPct val="108000"/>
               </a:lnSpc>
@@ -11200,7 +11023,7 @@
           <a:bodyPr wrap="square" lIns="0" tIns="0" rIns="0" bIns="0" rtlCol="0" anchor="ctr"/>
           <a:lstStyle/>
           <a:p>
-            <a:pPr indent="0" marL="0">
+            <a:pPr marL="0" indent="0">
               <a:buNone/>
             </a:pPr>
             <a:r>
@@ -11420,7 +11243,7 @@
           <a:bodyPr wrap="square" lIns="0" tIns="0" rIns="0" bIns="0" rtlCol="0" anchor="ctr"/>
           <a:lstStyle/>
           <a:p>
-            <a:pPr indent="0" marL="0">
+            <a:pPr marL="0" indent="0">
               <a:buNone/>
             </a:pPr>
             <a:r>
@@ -11459,7 +11282,7 @@
           <a:bodyPr wrap="square" lIns="0" tIns="0" rIns="0" bIns="0" rtlCol="0" anchor="t"/>
           <a:lstStyle/>
           <a:p>
-            <a:pPr algn="l" indent="0" marL="0">
+            <a:pPr marL="0" indent="0" algn="l">
               <a:lnSpc>
                 <a:spcPct val="112000"/>
               </a:lnSpc>
@@ -11479,7 +11302,7 @@
             <a:endParaRPr lang="en-US" sz="1150" dirty="0"/>
           </a:p>
           <a:p>
-            <a:pPr algn="l" indent="0" marL="0">
+            <a:pPr marL="0" indent="0" algn="l">
               <a:lnSpc>
                 <a:spcPct val="112000"/>
               </a:lnSpc>
@@ -11488,7 +11311,7 @@
             <a:endParaRPr lang="en-US" sz="1150" dirty="0"/>
           </a:p>
           <a:p>
-            <a:pPr algn="l" indent="0" marL="0">
+            <a:pPr marL="0" indent="0" algn="l">
               <a:lnSpc>
                 <a:spcPct val="112000"/>
               </a:lnSpc>
@@ -11508,7 +11331,7 @@
             <a:endParaRPr lang="en-US" sz="1150" dirty="0"/>
           </a:p>
           <a:p>
-            <a:pPr algn="l" indent="0" marL="0">
+            <a:pPr marL="0" indent="0" algn="l">
               <a:lnSpc>
                 <a:spcPct val="112000"/>
               </a:lnSpc>
@@ -11517,7 +11340,7 @@
             <a:endParaRPr lang="en-US" sz="1150" dirty="0"/>
           </a:p>
           <a:p>
-            <a:pPr algn="l" indent="0" marL="0">
+            <a:pPr marL="0" indent="0" algn="l">
               <a:lnSpc>
                 <a:spcPct val="112000"/>
               </a:lnSpc>
@@ -11537,7 +11360,7 @@
             <a:endParaRPr lang="en-US" sz="1150" dirty="0"/>
           </a:p>
           <a:p>
-            <a:pPr algn="l" indent="0" marL="0">
+            <a:pPr marL="0" indent="0" algn="l">
               <a:lnSpc>
                 <a:spcPct val="112000"/>
               </a:lnSpc>
@@ -11546,7 +11369,7 @@
             <a:endParaRPr lang="en-US" sz="1150" dirty="0"/>
           </a:p>
           <a:p>
-            <a:pPr algn="l" indent="0" marL="0">
+            <a:pPr marL="0" indent="0" algn="l">
               <a:lnSpc>
                 <a:spcPct val="112000"/>
               </a:lnSpc>
@@ -11642,7 +11465,7 @@
           <a:bodyPr wrap="square" lIns="0" tIns="0" rIns="0" bIns="0" rtlCol="0" anchor="ctr"/>
           <a:lstStyle/>
           <a:p>
-            <a:pPr indent="0" marL="0">
+            <a:pPr marL="0" indent="0">
               <a:buNone/>
             </a:pPr>
             <a:r>
@@ -11681,7 +11504,7 @@
           <a:bodyPr wrap="square" lIns="0" tIns="0" rIns="0" bIns="0" rtlCol="0" anchor="t"/>
           <a:lstStyle/>
           <a:p>
-            <a:pPr algn="l" indent="0" marL="0">
+            <a:pPr marL="0" indent="0" algn="l">
               <a:lnSpc>
                 <a:spcPct val="110000"/>
               </a:lnSpc>
@@ -11723,7 +11546,7 @@
           <a:bodyPr wrap="square" lIns="0" tIns="0" rIns="0" bIns="0" rtlCol="0" anchor="ctr"/>
           <a:lstStyle/>
           <a:p>
-            <a:pPr indent="0" marL="0">
+            <a:pPr marL="0" indent="0">
               <a:buNone/>
             </a:pPr>
             <a:r>
@@ -11757,6 +11580,7 @@
         <a:solidFill>
           <a:srgbClr val="F5F7FB"/>
         </a:solidFill>
+        <a:effectLst/>
       </p:bgPr>
     </p:bg>
     <p:spTree>
@@ -11821,11 +11645,11 @@
           <a:bodyPr wrap="square" lIns="0" tIns="0" rIns="0" bIns="0" rtlCol="0" anchor="ctr"/>
           <a:lstStyle/>
           <a:p>
-            <a:pPr algn="ctr" indent="0" marL="0">
-              <a:buNone/>
-            </a:pPr>
-            <a:r>
-              <a:rPr lang="en-US" sz="1150" b="1" spc="100" kern="0" dirty="0">
+            <a:pPr marL="0" indent="0" algn="ctr">
+              <a:buNone/>
+            </a:pPr>
+            <a:r>
+              <a:rPr lang="en-US" sz="1150" b="1" kern="0" spc="100" dirty="0">
                 <a:solidFill>
                   <a:srgbClr val="FFFFFF"/>
                 </a:solidFill>
@@ -11860,7 +11684,7 @@
           <a:bodyPr wrap="square" lIns="0" tIns="0" rIns="0" bIns="0" rtlCol="0" anchor="ctr"/>
           <a:lstStyle/>
           <a:p>
-            <a:pPr indent="0" marL="0">
+            <a:pPr marL="0" indent="0">
               <a:buNone/>
             </a:pPr>
             <a:r>
@@ -11899,7 +11723,7 @@
           <a:bodyPr wrap="square" lIns="0" tIns="0" rIns="0" bIns="0" rtlCol="0" anchor="ctr"/>
           <a:lstStyle/>
           <a:p>
-            <a:pPr indent="0" marL="0">
+            <a:pPr marL="0" indent="0">
               <a:buNone/>
             </a:pPr>
             <a:r>
@@ -11919,7 +11743,7 @@
       </p:sp>
       <p:graphicFrame>
         <p:nvGraphicFramePr>
-          <p:cNvPr id="3" name="Table 0"/>
+          <p:cNvPr id="6" name="Table 0"/>
           <p:cNvGraphicFramePr>
             <a:graphicFrameLocks noGrp="1"/>
           </p:cNvGraphicFramePr>
@@ -11933,16 +11757,34 @@
         </p:nvGraphicFramePr>
         <p:xfrm>
           <a:off x="548640" y="2057400"/>
-          <a:ext cx="11091672" cy="914400"/>
+          <a:ext cx="11091672" cy="2514600"/>
         </p:xfrm>
         <a:graphic>
           <a:graphicData uri="http://schemas.openxmlformats.org/drawingml/2006/table">
             <a:tbl>
               <a:tblPr/>
               <a:tblGrid>
-                <a:gridCol w="2651760"/>
-                <a:gridCol w="4023360"/>
-                <a:gridCol w="4416552"/>
+                <a:gridCol w="2651760">
+                  <a:extLst>
+                    <a:ext uri="{9D8B030D-6E8A-4147-A177-3AD203B41FA5}">
+                      <a16:colId xmlns:a16="http://schemas.microsoft.com/office/drawing/2014/main" val="20000"/>
+                    </a:ext>
+                  </a:extLst>
+                </a:gridCol>
+                <a:gridCol w="4023360">
+                  <a:extLst>
+                    <a:ext uri="{9D8B030D-6E8A-4147-A177-3AD203B41FA5}">
+                      <a16:colId xmlns:a16="http://schemas.microsoft.com/office/drawing/2014/main" val="20001"/>
+                    </a:ext>
+                  </a:extLst>
+                </a:gridCol>
+                <a:gridCol w="4416552">
+                  <a:extLst>
+                    <a:ext uri="{9D8B030D-6E8A-4147-A177-3AD203B41FA5}">
+                      <a16:colId xmlns:a16="http://schemas.microsoft.com/office/drawing/2014/main" val="20002"/>
+                    </a:ext>
+                  </a:extLst>
+                </a:gridCol>
               </a:tblGrid>
               <a:tr h="502920">
                 <a:tc>
@@ -11950,7 +11792,7 @@
                     <a:bodyPr/>
                     <a:lstStyle/>
                     <a:p>
-                      <a:pPr indent="0" marL="0">
+                      <a:pPr marL="0" indent="0">
                         <a:buNone/>
                       </a:pPr>
                       <a:endParaRPr lang="en-US" sz="1150" dirty="0">
@@ -12007,7 +11849,7 @@
                     <a:bodyPr/>
                     <a:lstStyle/>
                     <a:p>
-                      <a:pPr indent="0" marL="0">
+                      <a:pPr marL="0" indent="0">
                         <a:buNone/>
                       </a:pPr>
                       <a:r>
@@ -12075,7 +11917,7 @@
                     <a:bodyPr/>
                     <a:lstStyle/>
                     <a:p>
-                      <a:pPr indent="0" marL="0">
+                      <a:pPr marL="0" indent="0">
                         <a:buNone/>
                       </a:pPr>
                       <a:r>
@@ -12138,6 +11980,11 @@
                     </a:solidFill>
                   </a:tcPr>
                 </a:tc>
+                <a:extLst>
+                  <a:ext uri="{0D108BD9-81ED-4DB2-BD59-A6C34878D82A}">
+                    <a16:rowId xmlns:a16="http://schemas.microsoft.com/office/drawing/2014/main" val="10000"/>
+                  </a:ext>
+                </a:extLst>
               </a:tr>
               <a:tr h="502920">
                 <a:tc>
@@ -12145,7 +11992,7 @@
                     <a:bodyPr/>
                     <a:lstStyle/>
                     <a:p>
-                      <a:pPr indent="0" marL="0">
+                      <a:pPr marL="0" indent="0">
                         <a:buNone/>
                       </a:pPr>
                       <a:r>
@@ -12213,7 +12060,7 @@
                     <a:bodyPr/>
                     <a:lstStyle/>
                     <a:p>
-                      <a:pPr indent="0" marL="0">
+                      <a:pPr marL="0" indent="0">
                         <a:buNone/>
                       </a:pPr>
                       <a:r>
@@ -12281,7 +12128,7 @@
                     <a:bodyPr/>
                     <a:lstStyle/>
                     <a:p>
-                      <a:pPr indent="0" marL="0">
+                      <a:pPr marL="0" indent="0">
                         <a:buNone/>
                       </a:pPr>
                       <a:r>
@@ -12344,6 +12191,11 @@
                     </a:solidFill>
                   </a:tcPr>
                 </a:tc>
+                <a:extLst>
+                  <a:ext uri="{0D108BD9-81ED-4DB2-BD59-A6C34878D82A}">
+                    <a16:rowId xmlns:a16="http://schemas.microsoft.com/office/drawing/2014/main" val="10001"/>
+                  </a:ext>
+                </a:extLst>
               </a:tr>
               <a:tr h="502920">
                 <a:tc>
@@ -12351,7 +12203,7 @@
                     <a:bodyPr/>
                     <a:lstStyle/>
                     <a:p>
-                      <a:pPr indent="0" marL="0">
+                      <a:pPr marL="0" indent="0">
                         <a:buNone/>
                       </a:pPr>
                       <a:r>
@@ -12419,7 +12271,7 @@
                     <a:bodyPr/>
                     <a:lstStyle/>
                     <a:p>
-                      <a:pPr indent="0" marL="0">
+                      <a:pPr marL="0" indent="0">
                         <a:buNone/>
                       </a:pPr>
                       <a:r>
@@ -12487,7 +12339,7 @@
                     <a:bodyPr/>
                     <a:lstStyle/>
                     <a:p>
-                      <a:pPr indent="0" marL="0">
+                      <a:pPr marL="0" indent="0">
                         <a:buNone/>
                       </a:pPr>
                       <a:r>
@@ -12550,6 +12402,11 @@
                     </a:solidFill>
                   </a:tcPr>
                 </a:tc>
+                <a:extLst>
+                  <a:ext uri="{0D108BD9-81ED-4DB2-BD59-A6C34878D82A}">
+                    <a16:rowId xmlns:a16="http://schemas.microsoft.com/office/drawing/2014/main" val="10002"/>
+                  </a:ext>
+                </a:extLst>
               </a:tr>
               <a:tr h="502920">
                 <a:tc>
@@ -12557,7 +12414,7 @@
                     <a:bodyPr/>
                     <a:lstStyle/>
                     <a:p>
-                      <a:pPr indent="0" marL="0">
+                      <a:pPr marL="0" indent="0">
                         <a:buNone/>
                       </a:pPr>
                       <a:r>
@@ -12625,7 +12482,7 @@
                     <a:bodyPr/>
                     <a:lstStyle/>
                     <a:p>
-                      <a:pPr indent="0" marL="0">
+                      <a:pPr marL="0" indent="0">
                         <a:buNone/>
                       </a:pPr>
                       <a:r>
@@ -12693,7 +12550,7 @@
                     <a:bodyPr/>
                     <a:lstStyle/>
                     <a:p>
-                      <a:pPr indent="0" marL="0">
+                      <a:pPr marL="0" indent="0">
                         <a:buNone/>
                       </a:pPr>
                       <a:r>
@@ -12756,6 +12613,11 @@
                     </a:solidFill>
                   </a:tcPr>
                 </a:tc>
+                <a:extLst>
+                  <a:ext uri="{0D108BD9-81ED-4DB2-BD59-A6C34878D82A}">
+                    <a16:rowId xmlns:a16="http://schemas.microsoft.com/office/drawing/2014/main" val="10003"/>
+                  </a:ext>
+                </a:extLst>
               </a:tr>
               <a:tr h="502920">
                 <a:tc>
@@ -12763,7 +12625,7 @@
                     <a:bodyPr/>
                     <a:lstStyle/>
                     <a:p>
-                      <a:pPr indent="0" marL="0">
+                      <a:pPr marL="0" indent="0">
                         <a:buNone/>
                       </a:pPr>
                       <a:r>
@@ -12831,7 +12693,7 @@
                     <a:bodyPr/>
                     <a:lstStyle/>
                     <a:p>
-                      <a:pPr indent="0" marL="0">
+                      <a:pPr marL="0" indent="0">
                         <a:buNone/>
                       </a:pPr>
                       <a:r>
@@ -12899,7 +12761,7 @@
                     <a:bodyPr/>
                     <a:lstStyle/>
                     <a:p>
-                      <a:pPr indent="0" marL="0">
+                      <a:pPr marL="0" indent="0">
                         <a:buNone/>
                       </a:pPr>
                       <a:r>
@@ -12962,6 +12824,11 @@
                     </a:solidFill>
                   </a:tcPr>
                 </a:tc>
+                <a:extLst>
+                  <a:ext uri="{0D108BD9-81ED-4DB2-BD59-A6C34878D82A}">
+                    <a16:rowId xmlns:a16="http://schemas.microsoft.com/office/drawing/2014/main" val="10004"/>
+                  </a:ext>
+                </a:extLst>
               </a:tr>
             </a:tbl>
           </a:graphicData>
@@ -12976,7 +12843,7 @@
         <p:spPr>
           <a:xfrm>
             <a:off x="548640" y="4892040"/>
-            <a:ext cx="11091672" cy="1298448"/>
+            <a:ext cx="11091672" cy="1518808"/>
           </a:xfrm>
           <a:prstGeom prst="roundRect">
             <a:avLst>
@@ -13042,7 +12909,7 @@
           <a:bodyPr wrap="square" lIns="0" tIns="0" rIns="0" bIns="0" rtlCol="0" anchor="ctr"/>
           <a:lstStyle/>
           <a:p>
-            <a:pPr indent="0" marL="0">
+            <a:pPr marL="0" indent="0">
               <a:buNone/>
             </a:pPr>
             <a:r>
@@ -13081,7 +12948,7 @@
           <a:bodyPr wrap="square" lIns="0" tIns="0" rIns="0" bIns="0" rtlCol="0" anchor="t"/>
           <a:lstStyle/>
           <a:p>
-            <a:pPr algn="l" indent="0" marL="0">
+            <a:pPr marL="0" indent="0" algn="l">
               <a:lnSpc>
                 <a:spcPct val="112000"/>
               </a:lnSpc>
@@ -13101,7 +12968,7 @@
             <a:endParaRPr lang="en-US" sz="1250" dirty="0"/>
           </a:p>
           <a:p>
-            <a:pPr algn="l" indent="0" marL="0">
+            <a:pPr marL="0" indent="0" algn="l">
               <a:lnSpc>
                 <a:spcPct val="112000"/>
               </a:lnSpc>
@@ -13110,7 +12977,7 @@
             <a:endParaRPr lang="en-US" sz="1250" dirty="0"/>
           </a:p>
           <a:p>
-            <a:pPr algn="l" indent="0" marL="0">
+            <a:pPr marL="0" indent="0" algn="l">
               <a:lnSpc>
                 <a:spcPct val="112000"/>
               </a:lnSpc>
@@ -13147,6 +13014,7 @@
         <a:solidFill>
           <a:srgbClr val="F5F7FB"/>
         </a:solidFill>
+        <a:effectLst/>
       </p:bgPr>
     </p:bg>
     <p:spTree>
@@ -13211,11 +13079,11 @@
           <a:bodyPr wrap="square" lIns="0" tIns="0" rIns="0" bIns="0" rtlCol="0" anchor="ctr"/>
           <a:lstStyle/>
           <a:p>
-            <a:pPr algn="ctr" indent="0" marL="0">
-              <a:buNone/>
-            </a:pPr>
-            <a:r>
-              <a:rPr lang="en-US" sz="1150" b="1" spc="100" kern="0" dirty="0">
+            <a:pPr marL="0" indent="0" algn="ctr">
+              <a:buNone/>
+            </a:pPr>
+            <a:r>
+              <a:rPr lang="en-US" sz="1150" b="1" kern="0" spc="100" dirty="0">
                 <a:solidFill>
                   <a:srgbClr val="FFFFFF"/>
                 </a:solidFill>
@@ -13250,7 +13118,7 @@
           <a:bodyPr wrap="square" lIns="0" tIns="0" rIns="0" bIns="0" rtlCol="0" anchor="ctr"/>
           <a:lstStyle/>
           <a:p>
-            <a:pPr indent="0" marL="0">
+            <a:pPr marL="0" indent="0">
               <a:buNone/>
             </a:pPr>
             <a:r>
@@ -13289,7 +13157,7 @@
           <a:bodyPr wrap="square" lIns="0" tIns="0" rIns="0" bIns="0" rtlCol="0" anchor="ctr"/>
           <a:lstStyle/>
           <a:p>
-            <a:pPr indent="0" marL="0">
+            <a:pPr marL="0" indent="0">
               <a:buNone/>
             </a:pPr>
             <a:r>
@@ -13309,7 +13177,7 @@
       </p:sp>
       <p:graphicFrame>
         <p:nvGraphicFramePr>
-          <p:cNvPr id="4" name="Table 0"/>
+          <p:cNvPr id="6" name="Table 0"/>
           <p:cNvGraphicFramePr>
             <a:graphicFrameLocks noGrp="1"/>
           </p:cNvGraphicFramePr>
@@ -13323,17 +13191,41 @@
         </p:nvGraphicFramePr>
         <p:xfrm>
           <a:off x="548640" y="2011680"/>
-          <a:ext cx="7223760" cy="914400"/>
+          <a:ext cx="7223760" cy="3127248"/>
         </p:xfrm>
         <a:graphic>
           <a:graphicData uri="http://schemas.openxmlformats.org/drawingml/2006/table">
             <a:tbl>
               <a:tblPr/>
               <a:tblGrid>
-                <a:gridCol w="731520"/>
-                <a:gridCol w="4114800"/>
-                <a:gridCol w="731520"/>
-                <a:gridCol w="1645920"/>
+                <a:gridCol w="731520">
+                  <a:extLst>
+                    <a:ext uri="{9D8B030D-6E8A-4147-A177-3AD203B41FA5}">
+                      <a16:colId xmlns:a16="http://schemas.microsoft.com/office/drawing/2014/main" val="20000"/>
+                    </a:ext>
+                  </a:extLst>
+                </a:gridCol>
+                <a:gridCol w="4114800">
+                  <a:extLst>
+                    <a:ext uri="{9D8B030D-6E8A-4147-A177-3AD203B41FA5}">
+                      <a16:colId xmlns:a16="http://schemas.microsoft.com/office/drawing/2014/main" val="20001"/>
+                    </a:ext>
+                  </a:extLst>
+                </a:gridCol>
+                <a:gridCol w="731520">
+                  <a:extLst>
+                    <a:ext uri="{9D8B030D-6E8A-4147-A177-3AD203B41FA5}">
+                      <a16:colId xmlns:a16="http://schemas.microsoft.com/office/drawing/2014/main" val="20002"/>
+                    </a:ext>
+                  </a:extLst>
+                </a:gridCol>
+                <a:gridCol w="1645920">
+                  <a:extLst>
+                    <a:ext uri="{9D8B030D-6E8A-4147-A177-3AD203B41FA5}">
+                      <a16:colId xmlns:a16="http://schemas.microsoft.com/office/drawing/2014/main" val="20003"/>
+                    </a:ext>
+                  </a:extLst>
+                </a:gridCol>
               </a:tblGrid>
               <a:tr h="347472">
                 <a:tc>
@@ -13341,7 +13233,7 @@
                     <a:bodyPr/>
                     <a:lstStyle/>
                     <a:p>
-                      <a:pPr indent="0" marL="0">
+                      <a:pPr marL="0" indent="0">
                         <a:buNone/>
                       </a:pPr>
                       <a:r>
@@ -13409,7 +13301,7 @@
                     <a:bodyPr/>
                     <a:lstStyle/>
                     <a:p>
-                      <a:pPr indent="0" marL="0">
+                      <a:pPr marL="0" indent="0">
                         <a:buNone/>
                       </a:pPr>
                       <a:r>
@@ -13477,7 +13369,7 @@
                     <a:bodyPr/>
                     <a:lstStyle/>
                     <a:p>
-                      <a:pPr indent="0" marL="0">
+                      <a:pPr marL="0" indent="0">
                         <a:buNone/>
                       </a:pPr>
                       <a:r>
@@ -13545,7 +13437,7 @@
                     <a:bodyPr/>
                     <a:lstStyle/>
                     <a:p>
-                      <a:pPr indent="0" marL="0">
+                      <a:pPr marL="0" indent="0">
                         <a:buNone/>
                       </a:pPr>
                       <a:r>
@@ -13608,6 +13500,11 @@
                     </a:solidFill>
                   </a:tcPr>
                 </a:tc>
+                <a:extLst>
+                  <a:ext uri="{0D108BD9-81ED-4DB2-BD59-A6C34878D82A}">
+                    <a16:rowId xmlns:a16="http://schemas.microsoft.com/office/drawing/2014/main" val="10000"/>
+                  </a:ext>
+                </a:extLst>
               </a:tr>
               <a:tr h="347472">
                 <a:tc>
@@ -13615,7 +13512,7 @@
                     <a:bodyPr/>
                     <a:lstStyle/>
                     <a:p>
-                      <a:pPr indent="0" marL="0">
+                      <a:pPr marL="0" indent="0">
                         <a:buNone/>
                       </a:pPr>
                       <a:r>
@@ -13683,7 +13580,7 @@
                     <a:bodyPr/>
                     <a:lstStyle/>
                     <a:p>
-                      <a:pPr indent="0" marL="0">
+                      <a:pPr marL="0" indent="0">
                         <a:buNone/>
                       </a:pPr>
                       <a:r>
@@ -13751,7 +13648,7 @@
                     <a:bodyPr/>
                     <a:lstStyle/>
                     <a:p>
-                      <a:pPr algn="ctr" indent="0" marL="0">
+                      <a:pPr marL="0" indent="0" algn="ctr">
                         <a:buNone/>
                       </a:pPr>
                       <a:r>
@@ -13819,7 +13716,7 @@
                     <a:bodyPr/>
                     <a:lstStyle/>
                     <a:p>
-                      <a:pPr indent="0" marL="0">
+                      <a:pPr marL="0" indent="0">
                         <a:buNone/>
                       </a:pPr>
                       <a:r>
@@ -13882,6 +13779,11 @@
                     </a:solidFill>
                   </a:tcPr>
                 </a:tc>
+                <a:extLst>
+                  <a:ext uri="{0D108BD9-81ED-4DB2-BD59-A6C34878D82A}">
+                    <a16:rowId xmlns:a16="http://schemas.microsoft.com/office/drawing/2014/main" val="10001"/>
+                  </a:ext>
+                </a:extLst>
               </a:tr>
               <a:tr h="347472">
                 <a:tc>
@@ -13889,7 +13791,7 @@
                     <a:bodyPr/>
                     <a:lstStyle/>
                     <a:p>
-                      <a:pPr indent="0" marL="0">
+                      <a:pPr marL="0" indent="0">
                         <a:buNone/>
                       </a:pPr>
                       <a:r>
@@ -13957,7 +13859,7 @@
                     <a:bodyPr/>
                     <a:lstStyle/>
                     <a:p>
-                      <a:pPr indent="0" marL="0">
+                      <a:pPr marL="0" indent="0">
                         <a:buNone/>
                       </a:pPr>
                       <a:r>
@@ -14025,7 +13927,7 @@
                     <a:bodyPr/>
                     <a:lstStyle/>
                     <a:p>
-                      <a:pPr algn="ctr" indent="0" marL="0">
+                      <a:pPr marL="0" indent="0" algn="ctr">
                         <a:buNone/>
                       </a:pPr>
                       <a:r>
@@ -14093,7 +13995,7 @@
                     <a:bodyPr/>
                     <a:lstStyle/>
                     <a:p>
-                      <a:pPr indent="0" marL="0">
+                      <a:pPr marL="0" indent="0">
                         <a:buNone/>
                       </a:pPr>
                       <a:r>
@@ -14156,6 +14058,11 @@
                     </a:solidFill>
                   </a:tcPr>
                 </a:tc>
+                <a:extLst>
+                  <a:ext uri="{0D108BD9-81ED-4DB2-BD59-A6C34878D82A}">
+                    <a16:rowId xmlns:a16="http://schemas.microsoft.com/office/drawing/2014/main" val="10002"/>
+                  </a:ext>
+                </a:extLst>
               </a:tr>
               <a:tr h="347472">
                 <a:tc>
@@ -14163,7 +14070,7 @@
                     <a:bodyPr/>
                     <a:lstStyle/>
                     <a:p>
-                      <a:pPr indent="0" marL="0">
+                      <a:pPr marL="0" indent="0">
                         <a:buNone/>
                       </a:pPr>
                       <a:r>
@@ -14231,7 +14138,7 @@
                     <a:bodyPr/>
                     <a:lstStyle/>
                     <a:p>
-                      <a:pPr indent="0" marL="0">
+                      <a:pPr marL="0" indent="0">
                         <a:buNone/>
                       </a:pPr>
                       <a:r>
@@ -14299,7 +14206,7 @@
                     <a:bodyPr/>
                     <a:lstStyle/>
                     <a:p>
-                      <a:pPr algn="ctr" indent="0" marL="0">
+                      <a:pPr marL="0" indent="0" algn="ctr">
                         <a:buNone/>
                       </a:pPr>
                       <a:r>
@@ -14367,7 +14274,7 @@
                     <a:bodyPr/>
                     <a:lstStyle/>
                     <a:p>
-                      <a:pPr indent="0" marL="0">
+                      <a:pPr marL="0" indent="0">
                         <a:buNone/>
                       </a:pPr>
                       <a:r>
@@ -14430,6 +14337,11 @@
                     </a:solidFill>
                   </a:tcPr>
                 </a:tc>
+                <a:extLst>
+                  <a:ext uri="{0D108BD9-81ED-4DB2-BD59-A6C34878D82A}">
+                    <a16:rowId xmlns:a16="http://schemas.microsoft.com/office/drawing/2014/main" val="10003"/>
+                  </a:ext>
+                </a:extLst>
               </a:tr>
               <a:tr h="347472">
                 <a:tc>
@@ -14437,7 +14349,7 @@
                     <a:bodyPr/>
                     <a:lstStyle/>
                     <a:p>
-                      <a:pPr indent="0" marL="0">
+                      <a:pPr marL="0" indent="0">
                         <a:buNone/>
                       </a:pPr>
                       <a:r>
@@ -14505,7 +14417,7 @@
                     <a:bodyPr/>
                     <a:lstStyle/>
                     <a:p>
-                      <a:pPr indent="0" marL="0">
+                      <a:pPr marL="0" indent="0">
                         <a:buNone/>
                       </a:pPr>
                       <a:r>
@@ -14573,7 +14485,7 @@
                     <a:bodyPr/>
                     <a:lstStyle/>
                     <a:p>
-                      <a:pPr algn="ctr" indent="0" marL="0">
+                      <a:pPr marL="0" indent="0" algn="ctr">
                         <a:buNone/>
                       </a:pPr>
                       <a:r>
@@ -14641,7 +14553,7 @@
                     <a:bodyPr/>
                     <a:lstStyle/>
                     <a:p>
-                      <a:pPr indent="0" marL="0">
+                      <a:pPr marL="0" indent="0">
                         <a:buNone/>
                       </a:pPr>
                       <a:r>
@@ -14704,6 +14616,11 @@
                     </a:solidFill>
                   </a:tcPr>
                 </a:tc>
+                <a:extLst>
+                  <a:ext uri="{0D108BD9-81ED-4DB2-BD59-A6C34878D82A}">
+                    <a16:rowId xmlns:a16="http://schemas.microsoft.com/office/drawing/2014/main" val="10004"/>
+                  </a:ext>
+                </a:extLst>
               </a:tr>
               <a:tr h="347472">
                 <a:tc>
@@ -14711,7 +14628,7 @@
                     <a:bodyPr/>
                     <a:lstStyle/>
                     <a:p>
-                      <a:pPr indent="0" marL="0">
+                      <a:pPr marL="0" indent="0">
                         <a:buNone/>
                       </a:pPr>
                       <a:r>
@@ -14779,7 +14696,7 @@
                     <a:bodyPr/>
                     <a:lstStyle/>
                     <a:p>
-                      <a:pPr indent="0" marL="0">
+                      <a:pPr marL="0" indent="0">
                         <a:buNone/>
                       </a:pPr>
                       <a:r>
@@ -14847,7 +14764,7 @@
                     <a:bodyPr/>
                     <a:lstStyle/>
                     <a:p>
-                      <a:pPr algn="ctr" indent="0" marL="0">
+                      <a:pPr marL="0" indent="0" algn="ctr">
                         <a:buNone/>
                       </a:pPr>
                       <a:r>
@@ -14915,7 +14832,7 @@
                     <a:bodyPr/>
                     <a:lstStyle/>
                     <a:p>
-                      <a:pPr indent="0" marL="0">
+                      <a:pPr marL="0" indent="0">
                         <a:buNone/>
                       </a:pPr>
                       <a:r>
@@ -14978,6 +14895,11 @@
                     </a:solidFill>
                   </a:tcPr>
                 </a:tc>
+                <a:extLst>
+                  <a:ext uri="{0D108BD9-81ED-4DB2-BD59-A6C34878D82A}">
+                    <a16:rowId xmlns:a16="http://schemas.microsoft.com/office/drawing/2014/main" val="10005"/>
+                  </a:ext>
+                </a:extLst>
               </a:tr>
               <a:tr h="347472">
                 <a:tc>
@@ -14985,7 +14907,7 @@
                     <a:bodyPr/>
                     <a:lstStyle/>
                     <a:p>
-                      <a:pPr indent="0" marL="0">
+                      <a:pPr marL="0" indent="0">
                         <a:buNone/>
                       </a:pPr>
                       <a:r>
@@ -15053,7 +14975,7 @@
                     <a:bodyPr/>
                     <a:lstStyle/>
                     <a:p>
-                      <a:pPr indent="0" marL="0">
+                      <a:pPr marL="0" indent="0">
                         <a:buNone/>
                       </a:pPr>
                       <a:r>
@@ -15121,7 +15043,7 @@
                     <a:bodyPr/>
                     <a:lstStyle/>
                     <a:p>
-                      <a:pPr algn="ctr" indent="0" marL="0">
+                      <a:pPr marL="0" indent="0" algn="ctr">
                         <a:buNone/>
                       </a:pPr>
                       <a:r>
@@ -15189,7 +15111,7 @@
                     <a:bodyPr/>
                     <a:lstStyle/>
                     <a:p>
-                      <a:pPr indent="0" marL="0">
+                      <a:pPr marL="0" indent="0">
                         <a:buNone/>
                       </a:pPr>
                       <a:r>
@@ -15252,6 +15174,11 @@
                     </a:solidFill>
                   </a:tcPr>
                 </a:tc>
+                <a:extLst>
+                  <a:ext uri="{0D108BD9-81ED-4DB2-BD59-A6C34878D82A}">
+                    <a16:rowId xmlns:a16="http://schemas.microsoft.com/office/drawing/2014/main" val="10006"/>
+                  </a:ext>
+                </a:extLst>
               </a:tr>
               <a:tr h="347472">
                 <a:tc>
@@ -15259,7 +15186,7 @@
                     <a:bodyPr/>
                     <a:lstStyle/>
                     <a:p>
-                      <a:pPr indent="0" marL="0">
+                      <a:pPr marL="0" indent="0">
                         <a:buNone/>
                       </a:pPr>
                       <a:r>
@@ -15327,7 +15254,7 @@
                     <a:bodyPr/>
                     <a:lstStyle/>
                     <a:p>
-                      <a:pPr indent="0" marL="0">
+                      <a:pPr marL="0" indent="0">
                         <a:buNone/>
                       </a:pPr>
                       <a:r>
@@ -15395,7 +15322,7 @@
                     <a:bodyPr/>
                     <a:lstStyle/>
                     <a:p>
-                      <a:pPr algn="ctr" indent="0" marL="0">
+                      <a:pPr marL="0" indent="0" algn="ctr">
                         <a:buNone/>
                       </a:pPr>
                       <a:r>
@@ -15463,7 +15390,7 @@
                     <a:bodyPr/>
                     <a:lstStyle/>
                     <a:p>
-                      <a:pPr indent="0" marL="0">
+                      <a:pPr marL="0" indent="0">
                         <a:buNone/>
                       </a:pPr>
                       <a:r>
@@ -15526,6 +15453,11 @@
                     </a:solidFill>
                   </a:tcPr>
                 </a:tc>
+                <a:extLst>
+                  <a:ext uri="{0D108BD9-81ED-4DB2-BD59-A6C34878D82A}">
+                    <a16:rowId xmlns:a16="http://schemas.microsoft.com/office/drawing/2014/main" val="10007"/>
+                  </a:ext>
+                </a:extLst>
               </a:tr>
               <a:tr h="347472">
                 <a:tc>
@@ -15533,7 +15465,7 @@
                     <a:bodyPr/>
                     <a:lstStyle/>
                     <a:p>
-                      <a:pPr indent="0" marL="0">
+                      <a:pPr marL="0" indent="0">
                         <a:buNone/>
                       </a:pPr>
                       <a:r>
@@ -15601,7 +15533,7 @@
                     <a:bodyPr/>
                     <a:lstStyle/>
                     <a:p>
-                      <a:pPr indent="0" marL="0">
+                      <a:pPr marL="0" indent="0">
                         <a:buNone/>
                       </a:pPr>
                       <a:r>
@@ -15669,7 +15601,7 @@
                     <a:bodyPr/>
                     <a:lstStyle/>
                     <a:p>
-                      <a:pPr algn="ctr" indent="0" marL="0">
+                      <a:pPr marL="0" indent="0" algn="ctr">
                         <a:buNone/>
                       </a:pPr>
                       <a:r>
@@ -15737,7 +15669,7 @@
                     <a:bodyPr/>
                     <a:lstStyle/>
                     <a:p>
-                      <a:pPr indent="0" marL="0">
+                      <a:pPr marL="0" indent="0">
                         <a:buNone/>
                       </a:pPr>
                       <a:r>
@@ -15800,6 +15732,11 @@
                     </a:solidFill>
                   </a:tcPr>
                 </a:tc>
+                <a:extLst>
+                  <a:ext uri="{0D108BD9-81ED-4DB2-BD59-A6C34878D82A}">
+                    <a16:rowId xmlns:a16="http://schemas.microsoft.com/office/drawing/2014/main" val="10008"/>
+                  </a:ext>
+                </a:extLst>
               </a:tr>
             </a:tbl>
           </a:graphicData>
@@ -15880,7 +15817,7 @@
           <a:bodyPr wrap="square" lIns="0" tIns="0" rIns="0" bIns="0" rtlCol="0" anchor="ctr"/>
           <a:lstStyle/>
           <a:p>
-            <a:pPr indent="0" marL="0">
+            <a:pPr marL="0" indent="0">
               <a:buNone/>
             </a:pPr>
             <a:r>
@@ -16079,7 +16016,7 @@
           <a:bodyPr wrap="square" lIns="0" tIns="0" rIns="0" bIns="0" rtlCol="0" anchor="ctr"/>
           <a:lstStyle/>
           <a:p>
-            <a:pPr indent="0" marL="0">
+            <a:pPr marL="0" indent="0">
               <a:buNone/>
             </a:pPr>
             <a:r>
@@ -16118,7 +16055,7 @@
           <a:bodyPr wrap="square" lIns="0" tIns="0" rIns="0" bIns="0" rtlCol="0" anchor="t"/>
           <a:lstStyle/>
           <a:p>
-            <a:pPr algn="l" indent="0" marL="0">
+            <a:pPr marL="0" indent="0" algn="l">
               <a:lnSpc>
                 <a:spcPct val="115000"/>
               </a:lnSpc>
@@ -16138,7 +16075,7 @@
             <a:endParaRPr lang="en-US" sz="1200" dirty="0"/>
           </a:p>
           <a:p>
-            <a:pPr algn="l" indent="0" marL="0">
+            <a:pPr marL="0" indent="0" algn="l">
               <a:lnSpc>
                 <a:spcPct val="115000"/>
               </a:lnSpc>
@@ -16147,7 +16084,7 @@
             <a:endParaRPr lang="en-US" sz="1200" dirty="0"/>
           </a:p>
           <a:p>
-            <a:pPr algn="l" indent="0" marL="0">
+            <a:pPr marL="0" indent="0" algn="l">
               <a:lnSpc>
                 <a:spcPct val="115000"/>
               </a:lnSpc>
@@ -16167,7 +16104,7 @@
             <a:endParaRPr lang="en-US" sz="1200" dirty="0"/>
           </a:p>
           <a:p>
-            <a:pPr algn="l" indent="0" marL="0">
+            <a:pPr marL="0" indent="0" algn="l">
               <a:lnSpc>
                 <a:spcPct val="115000"/>
               </a:lnSpc>
@@ -16176,7 +16113,7 @@
             <a:endParaRPr lang="en-US" sz="1200" dirty="0"/>
           </a:p>
           <a:p>
-            <a:pPr algn="l" indent="0" marL="0">
+            <a:pPr marL="0" indent="0" algn="l">
               <a:lnSpc>
                 <a:spcPct val="115000"/>
               </a:lnSpc>
@@ -16218,7 +16155,7 @@
           <a:bodyPr wrap="square" lIns="0" tIns="0" rIns="0" bIns="0" rtlCol="0" anchor="ctr"/>
           <a:lstStyle/>
           <a:p>
-            <a:pPr indent="0" marL="0">
+            <a:pPr marL="0" indent="0">
               <a:buNone/>
             </a:pPr>
             <a:r>
@@ -16252,6 +16189,7 @@
         <a:solidFill>
           <a:srgbClr val="F5F7FB"/>
         </a:solidFill>
+        <a:effectLst/>
       </p:bgPr>
     </p:bg>
     <p:spTree>
@@ -16316,11 +16254,11 @@
           <a:bodyPr wrap="square" lIns="0" tIns="0" rIns="0" bIns="0" rtlCol="0" anchor="ctr"/>
           <a:lstStyle/>
           <a:p>
-            <a:pPr algn="ctr" indent="0" marL="0">
-              <a:buNone/>
-            </a:pPr>
-            <a:r>
-              <a:rPr lang="en-US" sz="1150" b="1" spc="100" kern="0" dirty="0">
+            <a:pPr marL="0" indent="0" algn="ctr">
+              <a:buNone/>
+            </a:pPr>
+            <a:r>
+              <a:rPr lang="en-US" sz="1150" b="1" kern="0" spc="100" dirty="0">
                 <a:solidFill>
                   <a:srgbClr val="FFFFFF"/>
                 </a:solidFill>
@@ -16355,7 +16293,7 @@
           <a:bodyPr wrap="square" lIns="0" tIns="0" rIns="0" bIns="0" rtlCol="0" anchor="ctr"/>
           <a:lstStyle/>
           <a:p>
-            <a:pPr indent="0" marL="0">
+            <a:pPr marL="0" indent="0">
               <a:buNone/>
             </a:pPr>
             <a:r>
@@ -16394,7 +16332,7 @@
           <a:bodyPr wrap="square" lIns="0" tIns="0" rIns="0" bIns="0" rtlCol="0" anchor="ctr"/>
           <a:lstStyle/>
           <a:p>
-            <a:pPr indent="0" marL="0">
+            <a:pPr marL="0" indent="0">
               <a:buNone/>
             </a:pPr>
             <a:r>
@@ -16458,7 +16396,7 @@
           <a:bodyPr wrap="square" lIns="0" tIns="0" rIns="0" bIns="0" rtlCol="0" anchor="ctr"/>
           <a:lstStyle/>
           <a:p>
-            <a:pPr algn="ctr" indent="0" marL="0">
+            <a:pPr marL="0" indent="0" algn="ctr">
               <a:buNone/>
             </a:pPr>
             <a:r>
@@ -16522,7 +16460,7 @@
           <a:bodyPr wrap="square" lIns="0" tIns="0" rIns="0" bIns="0" rtlCol="0" anchor="ctr"/>
           <a:lstStyle/>
           <a:p>
-            <a:pPr algn="ctr" indent="0" marL="0">
+            <a:pPr marL="0" indent="0" algn="ctr">
               <a:buNone/>
             </a:pPr>
             <a:r>
@@ -16586,7 +16524,7 @@
           <a:bodyPr wrap="square" lIns="0" tIns="0" rIns="0" bIns="0" rtlCol="0" anchor="ctr"/>
           <a:lstStyle/>
           <a:p>
-            <a:pPr algn="ctr" indent="0" marL="0">
+            <a:pPr marL="0" indent="0" algn="ctr">
               <a:buNone/>
             </a:pPr>
             <a:r>
@@ -16650,7 +16588,7 @@
           <a:bodyPr wrap="square" lIns="1270" tIns="1270" rIns="1270" bIns="1270" rtlCol="0" anchor="ctr"/>
           <a:lstStyle/>
           <a:p>
-            <a:pPr algn="l" indent="0" marL="0">
+            <a:pPr marL="0" indent="0" algn="l">
               <a:buNone/>
             </a:pPr>
             <a:r>
@@ -16714,7 +16652,7 @@
           <a:bodyPr wrap="square" lIns="0" tIns="0" rIns="0" bIns="0" rtlCol="0" anchor="ctr"/>
           <a:lstStyle/>
           <a:p>
-            <a:pPr algn="ctr" indent="0" marL="0">
+            <a:pPr marL="0" indent="0" algn="ctr">
               <a:buNone/>
             </a:pPr>
             <a:r>
@@ -16778,7 +16716,7 @@
           <a:bodyPr wrap="square" lIns="0" tIns="0" rIns="0" bIns="0" rtlCol="0" anchor="ctr"/>
           <a:lstStyle/>
           <a:p>
-            <a:pPr algn="ctr" indent="0" marL="0">
+            <a:pPr marL="0" indent="0" algn="ctr">
               <a:buNone/>
             </a:pPr>
             <a:r>
@@ -16842,7 +16780,7 @@
           <a:bodyPr wrap="square" lIns="0" tIns="0" rIns="0" bIns="0" rtlCol="0" anchor="ctr"/>
           <a:lstStyle/>
           <a:p>
-            <a:pPr algn="ctr" indent="0" marL="0">
+            <a:pPr marL="0" indent="0" algn="ctr">
               <a:buNone/>
             </a:pPr>
             <a:r>
@@ -16906,7 +16844,7 @@
           <a:bodyPr wrap="square" lIns="1270" tIns="1270" rIns="1270" bIns="1270" rtlCol="0" anchor="ctr"/>
           <a:lstStyle/>
           <a:p>
-            <a:pPr algn="l" indent="0" marL="0">
+            <a:pPr marL="0" indent="0" algn="l">
               <a:buNone/>
             </a:pPr>
             <a:r>
@@ -16970,7 +16908,7 @@
           <a:bodyPr wrap="square" lIns="0" tIns="0" rIns="0" bIns="0" rtlCol="0" anchor="ctr"/>
           <a:lstStyle/>
           <a:p>
-            <a:pPr algn="ctr" indent="0" marL="0">
+            <a:pPr marL="0" indent="0" algn="ctr">
               <a:buNone/>
             </a:pPr>
             <a:r>
@@ -17034,7 +16972,7 @@
           <a:bodyPr wrap="square" lIns="0" tIns="0" rIns="0" bIns="0" rtlCol="0" anchor="ctr"/>
           <a:lstStyle/>
           <a:p>
-            <a:pPr algn="ctr" indent="0" marL="0">
+            <a:pPr marL="0" indent="0" algn="ctr">
               <a:buNone/>
             </a:pPr>
             <a:r>
@@ -17098,7 +17036,7 @@
           <a:bodyPr wrap="square" lIns="0" tIns="0" rIns="0" bIns="0" rtlCol="0" anchor="ctr"/>
           <a:lstStyle/>
           <a:p>
-            <a:pPr algn="ctr" indent="0" marL="0">
+            <a:pPr marL="0" indent="0" algn="ctr">
               <a:buNone/>
             </a:pPr>
             <a:r>
@@ -17162,7 +17100,7 @@
           <a:bodyPr wrap="square" lIns="1270" tIns="1270" rIns="1270" bIns="1270" rtlCol="0" anchor="ctr"/>
           <a:lstStyle/>
           <a:p>
-            <a:pPr algn="l" indent="0" marL="0">
+            <a:pPr marL="0" indent="0" algn="l">
               <a:buNone/>
             </a:pPr>
             <a:r>
@@ -17226,7 +17164,7 @@
           <a:bodyPr wrap="square" lIns="0" tIns="0" rIns="0" bIns="0" rtlCol="0" anchor="ctr"/>
           <a:lstStyle/>
           <a:p>
-            <a:pPr algn="ctr" indent="0" marL="0">
+            <a:pPr marL="0" indent="0" algn="ctr">
               <a:buNone/>
             </a:pPr>
             <a:r>
@@ -17290,7 +17228,7 @@
           <a:bodyPr wrap="square" lIns="0" tIns="0" rIns="0" bIns="0" rtlCol="0" anchor="ctr"/>
           <a:lstStyle/>
           <a:p>
-            <a:pPr algn="ctr" indent="0" marL="0">
+            <a:pPr marL="0" indent="0" algn="ctr">
               <a:buNone/>
             </a:pPr>
             <a:r>
@@ -17354,7 +17292,7 @@
           <a:bodyPr wrap="square" lIns="0" tIns="0" rIns="0" bIns="0" rtlCol="0" anchor="ctr"/>
           <a:lstStyle/>
           <a:p>
-            <a:pPr algn="ctr" indent="0" marL="0">
+            <a:pPr marL="0" indent="0" algn="ctr">
               <a:buNone/>
             </a:pPr>
             <a:r>
@@ -17380,7 +17318,7 @@
         </p:nvSpPr>
         <p:spPr>
           <a:xfrm>
-            <a:off x="6355080" y="2148840"/>
+            <a:off x="6501384" y="2162556"/>
             <a:ext cx="5285232" cy="1371600"/>
           </a:xfrm>
           <a:prstGeom prst="roundRect">
@@ -17447,7 +17385,7 @@
           <a:bodyPr wrap="square" lIns="0" tIns="0" rIns="0" bIns="0" rtlCol="0" anchor="ctr"/>
           <a:lstStyle/>
           <a:p>
-            <a:pPr indent="0" marL="0">
+            <a:pPr marL="0" indent="0">
               <a:buNone/>
             </a:pPr>
             <a:r>
@@ -17486,7 +17424,7 @@
           <a:bodyPr wrap="square" lIns="0" tIns="0" rIns="0" bIns="0" rtlCol="0" anchor="t"/>
           <a:lstStyle/>
           <a:p>
-            <a:pPr algn="l" indent="0" marL="0">
+            <a:pPr marL="0" indent="0" algn="l">
               <a:lnSpc>
                 <a:spcPct val="110000"/>
               </a:lnSpc>
@@ -17515,7 +17453,7 @@
         </p:nvSpPr>
         <p:spPr>
           <a:xfrm>
-            <a:off x="6355080" y="3657600"/>
+            <a:off x="6501384" y="3666744"/>
             <a:ext cx="5285232" cy="1463040"/>
           </a:xfrm>
           <a:prstGeom prst="roundRect">
@@ -17582,7 +17520,7 @@
           <a:bodyPr wrap="square" lIns="0" tIns="0" rIns="0" bIns="0" rtlCol="0" anchor="ctr"/>
           <a:lstStyle/>
           <a:p>
-            <a:pPr indent="0" marL="0">
+            <a:pPr marL="0" indent="0">
               <a:buNone/>
             </a:pPr>
             <a:r>
@@ -17621,7 +17559,7 @@
           <a:bodyPr wrap="square" lIns="0" tIns="0" rIns="0" bIns="0" rtlCol="0" anchor="t"/>
           <a:lstStyle/>
           <a:p>
-            <a:pPr algn="l" indent="0" marL="0">
+            <a:pPr marL="0" indent="0" algn="l">
               <a:lnSpc>
                 <a:spcPct val="120000"/>
               </a:lnSpc>
@@ -17641,7 +17579,7 @@
             <a:endParaRPr lang="en-US" sz="1250" dirty="0"/>
           </a:p>
           <a:p>
-            <a:pPr algn="l" indent="0" marL="0">
+            <a:pPr marL="0" indent="0" algn="l">
               <a:lnSpc>
                 <a:spcPct val="120000"/>
               </a:lnSpc>
@@ -17661,7 +17599,7 @@
             <a:endParaRPr lang="en-US" sz="1250" dirty="0"/>
           </a:p>
           <a:p>
-            <a:pPr algn="l" indent="0" marL="0">
+            <a:pPr marL="0" indent="0" algn="l">
               <a:lnSpc>
                 <a:spcPct val="120000"/>
               </a:lnSpc>
@@ -17670,7 +17608,7 @@
             <a:endParaRPr lang="en-US" sz="1250" dirty="0"/>
           </a:p>
           <a:p>
-            <a:pPr algn="l" indent="0" marL="0">
+            <a:pPr marL="0" indent="0" algn="l">
               <a:lnSpc>
                 <a:spcPct val="120000"/>
               </a:lnSpc>
@@ -17766,7 +17704,7 @@
           <a:bodyPr wrap="square" lIns="0" tIns="0" rIns="0" bIns="0" rtlCol="0" anchor="ctr"/>
           <a:lstStyle/>
           <a:p>
-            <a:pPr indent="0" marL="0">
+            <a:pPr marL="0" indent="0">
               <a:buNone/>
             </a:pPr>
             <a:r>
@@ -17805,7 +17743,7 @@
           <a:bodyPr wrap="square" lIns="0" tIns="0" rIns="0" bIns="0" rtlCol="0" anchor="t"/>
           <a:lstStyle/>
           <a:p>
-            <a:pPr algn="l" indent="0" marL="0">
+            <a:pPr marL="0" indent="0" algn="l">
               <a:lnSpc>
                 <a:spcPct val="108000"/>
               </a:lnSpc>
@@ -17825,7 +17763,7 @@
             <a:endParaRPr lang="en-US" sz="1150" dirty="0"/>
           </a:p>
           <a:p>
-            <a:pPr algn="l" indent="0" marL="0">
+            <a:pPr marL="0" indent="0" algn="l">
               <a:lnSpc>
                 <a:spcPct val="108000"/>
               </a:lnSpc>
@@ -17834,7 +17772,7 @@
             <a:endParaRPr lang="en-US" sz="1150" dirty="0"/>
           </a:p>
           <a:p>
-            <a:pPr algn="l" indent="0" marL="0">
+            <a:pPr marL="0" indent="0" algn="l">
               <a:lnSpc>
                 <a:spcPct val="108000"/>
               </a:lnSpc>
@@ -17871,6 +17809,7 @@
         <a:solidFill>
           <a:srgbClr val="F5F7FB"/>
         </a:solidFill>
+        <a:effectLst/>
       </p:bgPr>
     </p:bg>
     <p:spTree>
@@ -17935,11 +17874,11 @@
           <a:bodyPr wrap="square" lIns="0" tIns="0" rIns="0" bIns="0" rtlCol="0" anchor="ctr"/>
           <a:lstStyle/>
           <a:p>
-            <a:pPr algn="ctr" indent="0" marL="0">
-              <a:buNone/>
-            </a:pPr>
-            <a:r>
-              <a:rPr lang="en-US" sz="1150" b="1" spc="100" kern="0" dirty="0">
+            <a:pPr marL="0" indent="0" algn="ctr">
+              <a:buNone/>
+            </a:pPr>
+            <a:r>
+              <a:rPr lang="en-US" sz="1150" b="1" kern="0" spc="100" dirty="0">
                 <a:solidFill>
                   <a:srgbClr val="FFFFFF"/>
                 </a:solidFill>
@@ -17974,7 +17913,7 @@
           <a:bodyPr wrap="square" lIns="0" tIns="0" rIns="0" bIns="0" rtlCol="0" anchor="ctr"/>
           <a:lstStyle/>
           <a:p>
-            <a:pPr indent="0" marL="0">
+            <a:pPr marL="0" indent="0">
               <a:buNone/>
             </a:pPr>
             <a:r>
@@ -18013,7 +17952,7 @@
           <a:bodyPr wrap="square" lIns="0" tIns="0" rIns="0" bIns="0" rtlCol="0" anchor="ctr"/>
           <a:lstStyle/>
           <a:p>
-            <a:pPr indent="0" marL="0">
+            <a:pPr marL="0" indent="0">
               <a:buNone/>
             </a:pPr>
             <a:r>
@@ -18106,7 +18045,7 @@
           <a:bodyPr wrap="square" lIns="0" tIns="0" rIns="0" bIns="0" rtlCol="0" anchor="ctr"/>
           <a:lstStyle/>
           <a:p>
-            <a:pPr indent="0" marL="0">
+            <a:pPr marL="0" indent="0">
               <a:buNone/>
             </a:pPr>
             <a:r>
@@ -18145,7 +18084,7 @@
           <a:bodyPr wrap="square" lIns="0" tIns="0" rIns="0" bIns="0" rtlCol="0" anchor="t"/>
           <a:lstStyle/>
           <a:p>
-            <a:pPr algn="l" indent="0" marL="0">
+            <a:pPr marL="0" indent="0" algn="l">
               <a:lnSpc>
                 <a:spcPct val="108000"/>
               </a:lnSpc>
@@ -18187,7 +18126,7 @@
           <a:bodyPr wrap="square" lIns="0" tIns="0" rIns="0" bIns="0" rtlCol="0" anchor="t"/>
           <a:lstStyle/>
           <a:p>
-            <a:pPr algn="l" indent="0" marL="0">
+            <a:pPr marL="0" indent="0" algn="l">
               <a:lnSpc>
                 <a:spcPct val="125000"/>
               </a:lnSpc>
@@ -18207,7 +18146,7 @@
             <a:endParaRPr lang="en-US" sz="1300" dirty="0"/>
           </a:p>
           <a:p>
-            <a:pPr algn="l" indent="0" marL="0">
+            <a:pPr marL="0" indent="0" algn="l">
               <a:lnSpc>
                 <a:spcPct val="125000"/>
               </a:lnSpc>
@@ -18227,7 +18166,7 @@
             <a:endParaRPr lang="en-US" sz="1300" dirty="0"/>
           </a:p>
           <a:p>
-            <a:pPr algn="l" indent="0" marL="0">
+            <a:pPr marL="0" indent="0" algn="l">
               <a:lnSpc>
                 <a:spcPct val="125000"/>
               </a:lnSpc>
@@ -18269,7 +18208,7 @@
           <a:bodyPr wrap="square" lIns="0" tIns="0" rIns="0" bIns="0" rtlCol="0" anchor="t"/>
           <a:lstStyle/>
           <a:p>
-            <a:pPr algn="l" indent="0" marL="0">
+            <a:pPr marL="0" indent="0" algn="l">
               <a:lnSpc>
                 <a:spcPct val="108000"/>
               </a:lnSpc>
@@ -18365,7 +18304,7 @@
           <a:bodyPr wrap="square" lIns="0" tIns="0" rIns="0" bIns="0" rtlCol="0" anchor="ctr"/>
           <a:lstStyle/>
           <a:p>
-            <a:pPr indent="0" marL="0">
+            <a:pPr marL="0" indent="0">
               <a:buNone/>
             </a:pPr>
             <a:r>
@@ -18404,7 +18343,7 @@
           <a:bodyPr wrap="square" lIns="0" tIns="0" rIns="0" bIns="0" rtlCol="0" anchor="t"/>
           <a:lstStyle/>
           <a:p>
-            <a:pPr algn="l" indent="0" marL="0">
+            <a:pPr marL="0" indent="0" algn="l">
               <a:lnSpc>
                 <a:spcPct val="108000"/>
               </a:lnSpc>
@@ -18446,7 +18385,7 @@
           <a:bodyPr wrap="square" lIns="0" tIns="0" rIns="0" bIns="0" rtlCol="0" anchor="t"/>
           <a:lstStyle/>
           <a:p>
-            <a:pPr algn="l" indent="0" marL="0">
+            <a:pPr marL="0" indent="0" algn="l">
               <a:lnSpc>
                 <a:spcPct val="125000"/>
               </a:lnSpc>
@@ -18466,7 +18405,7 @@
             <a:endParaRPr lang="en-US" sz="1300" dirty="0"/>
           </a:p>
           <a:p>
-            <a:pPr algn="l" indent="0" marL="0">
+            <a:pPr marL="0" indent="0" algn="l">
               <a:lnSpc>
                 <a:spcPct val="125000"/>
               </a:lnSpc>
@@ -18486,7 +18425,7 @@
             <a:endParaRPr lang="en-US" sz="1300" dirty="0"/>
           </a:p>
           <a:p>
-            <a:pPr algn="l" indent="0" marL="0">
+            <a:pPr marL="0" indent="0" algn="l">
               <a:lnSpc>
                 <a:spcPct val="125000"/>
               </a:lnSpc>
@@ -18528,7 +18467,7 @@
           <a:bodyPr wrap="square" lIns="0" tIns="0" rIns="0" bIns="0" rtlCol="0" anchor="t"/>
           <a:lstStyle/>
           <a:p>
-            <a:pPr algn="l" indent="0" marL="0">
+            <a:pPr marL="0" indent="0" algn="l">
               <a:lnSpc>
                 <a:spcPct val="108000"/>
               </a:lnSpc>
@@ -18624,7 +18563,7 @@
           <a:bodyPr wrap="square" lIns="0" tIns="0" rIns="0" bIns="0" rtlCol="0" anchor="ctr"/>
           <a:lstStyle/>
           <a:p>
-            <a:pPr indent="0" marL="0">
+            <a:pPr marL="0" indent="0">
               <a:buNone/>
             </a:pPr>
             <a:r>
@@ -18663,7 +18602,7 @@
           <a:bodyPr wrap="square" lIns="0" tIns="0" rIns="0" bIns="0" rtlCol="0" anchor="t"/>
           <a:lstStyle/>
           <a:p>
-            <a:pPr algn="l" indent="0" marL="0">
+            <a:pPr marL="0" indent="0" algn="l">
               <a:lnSpc>
                 <a:spcPct val="108000"/>
               </a:lnSpc>
@@ -18683,7 +18622,7 @@
             <a:endParaRPr lang="en-US" sz="1150" dirty="0"/>
           </a:p>
           <a:p>
-            <a:pPr algn="l" indent="0" marL="0">
+            <a:pPr marL="0" indent="0" algn="l">
               <a:lnSpc>
                 <a:spcPct val="108000"/>
               </a:lnSpc>
@@ -18692,7 +18631,7 @@
             <a:endParaRPr lang="en-US" sz="1150" dirty="0"/>
           </a:p>
           <a:p>
-            <a:pPr algn="l" indent="0" marL="0">
+            <a:pPr marL="0" indent="0" algn="l">
               <a:lnSpc>
                 <a:spcPct val="108000"/>
               </a:lnSpc>
@@ -18761,7 +18700,7 @@
           <a:bodyPr wrap="square" lIns="0" tIns="0" rIns="0" bIns="0" rtlCol="0" anchor="ctr"/>
           <a:lstStyle/>
           <a:p>
-            <a:pPr algn="l" indent="0" marL="0">
+            <a:pPr marL="0" indent="0" algn="l">
               <a:lnSpc>
                 <a:spcPct val="108000"/>
               </a:lnSpc>
@@ -18798,6 +18737,7 @@
         <a:solidFill>
           <a:srgbClr val="F5F7FB"/>
         </a:solidFill>
+        <a:effectLst/>
       </p:bgPr>
     </p:bg>
     <p:spTree>
@@ -18862,11 +18802,11 @@
           <a:bodyPr wrap="square" lIns="0" tIns="0" rIns="0" bIns="0" rtlCol="0" anchor="ctr"/>
           <a:lstStyle/>
           <a:p>
-            <a:pPr algn="ctr" indent="0" marL="0">
-              <a:buNone/>
-            </a:pPr>
-            <a:r>
-              <a:rPr lang="en-US" sz="1150" b="1" spc="100" kern="0" dirty="0">
+            <a:pPr marL="0" indent="0" algn="ctr">
+              <a:buNone/>
+            </a:pPr>
+            <a:r>
+              <a:rPr lang="en-US" sz="1150" b="1" kern="0" spc="100" dirty="0">
                 <a:solidFill>
                   <a:srgbClr val="FFFFFF"/>
                 </a:solidFill>
@@ -18901,7 +18841,7 @@
           <a:bodyPr wrap="square" lIns="0" tIns="0" rIns="0" bIns="0" rtlCol="0" anchor="ctr"/>
           <a:lstStyle/>
           <a:p>
-            <a:pPr indent="0" marL="0">
+            <a:pPr marL="0" indent="0">
               <a:buNone/>
             </a:pPr>
             <a:r>
@@ -18940,7 +18880,7 @@
           <a:bodyPr wrap="square" lIns="0" tIns="0" rIns="0" bIns="0" rtlCol="0" anchor="ctr"/>
           <a:lstStyle/>
           <a:p>
-            <a:pPr indent="0" marL="0">
+            <a:pPr marL="0" indent="0">
               <a:buNone/>
             </a:pPr>
             <a:r>
@@ -19006,7 +18946,7 @@
           <a:bodyPr wrap="square" lIns="0" tIns="0" rIns="0" bIns="0" rtlCol="0" anchor="ctr"/>
           <a:lstStyle/>
           <a:p>
-            <a:pPr algn="ctr" indent="0" marL="0">
+            <a:pPr marL="0" indent="0" algn="ctr">
               <a:lnSpc>
                 <a:spcPct val="125000"/>
               </a:lnSpc>
@@ -19026,7 +18966,7 @@
             <a:endParaRPr lang="en-US" sz="1400" dirty="0"/>
           </a:p>
           <a:p>
-            <a:pPr algn="ctr" indent="0" marL="0">
+            <a:pPr marL="0" indent="0" algn="ctr">
               <a:lnSpc>
                 <a:spcPct val="125000"/>
               </a:lnSpc>
@@ -19068,7 +19008,7 @@
           <a:bodyPr wrap="square" lIns="0" tIns="0" rIns="0" bIns="0" rtlCol="0" anchor="t"/>
           <a:lstStyle/>
           <a:p>
-            <a:pPr algn="l" indent="0" marL="0">
+            <a:pPr marL="0" indent="0" algn="l">
               <a:lnSpc>
                 <a:spcPct val="108000"/>
               </a:lnSpc>
@@ -19135,7 +19075,7 @@
           <a:bodyPr wrap="square" lIns="0" tIns="0" rIns="0" bIns="0" rtlCol="0" anchor="ctr"/>
           <a:lstStyle/>
           <a:p>
-            <a:pPr algn="ctr" indent="0" marL="0">
+            <a:pPr marL="0" indent="0" algn="ctr">
               <a:buNone/>
             </a:pPr>
             <a:r>
@@ -19199,7 +19139,7 @@
           <a:bodyPr wrap="square" lIns="0" tIns="0" rIns="0" bIns="0" rtlCol="0" anchor="ctr"/>
           <a:lstStyle/>
           <a:p>
-            <a:pPr algn="ctr" indent="0" marL="0">
+            <a:pPr marL="0" indent="0" algn="ctr">
               <a:buNone/>
             </a:pPr>
             <a:r>
@@ -19263,7 +19203,7 @@
           <a:bodyPr wrap="square" lIns="0" tIns="0" rIns="0" bIns="0" rtlCol="0" anchor="ctr"/>
           <a:lstStyle/>
           <a:p>
-            <a:pPr algn="ctr" indent="0" marL="0">
+            <a:pPr marL="0" indent="0" algn="ctr">
               <a:buNone/>
             </a:pPr>
             <a:r>
@@ -19327,7 +19267,7 @@
           <a:bodyPr wrap="square" lIns="1270" tIns="1270" rIns="1270" bIns="1270" rtlCol="0" anchor="ctr"/>
           <a:lstStyle/>
           <a:p>
-            <a:pPr algn="l" indent="0" marL="0">
+            <a:pPr marL="0" indent="0" algn="l">
               <a:buNone/>
             </a:pPr>
             <a:r>
@@ -19391,7 +19331,7 @@
           <a:bodyPr wrap="square" lIns="0" tIns="0" rIns="0" bIns="0" rtlCol="0" anchor="ctr"/>
           <a:lstStyle/>
           <a:p>
-            <a:pPr algn="ctr" indent="0" marL="0">
+            <a:pPr marL="0" indent="0" algn="ctr">
               <a:buNone/>
             </a:pPr>
             <a:r>
@@ -19455,7 +19395,7 @@
           <a:bodyPr wrap="square" lIns="0" tIns="0" rIns="0" bIns="0" rtlCol="0" anchor="ctr"/>
           <a:lstStyle/>
           <a:p>
-            <a:pPr algn="ctr" indent="0" marL="0">
+            <a:pPr marL="0" indent="0" algn="ctr">
               <a:buNone/>
             </a:pPr>
             <a:r>
@@ -19519,7 +19459,7 @@
           <a:bodyPr wrap="square" lIns="0" tIns="0" rIns="0" bIns="0" rtlCol="0" anchor="ctr"/>
           <a:lstStyle/>
           <a:p>
-            <a:pPr algn="ctr" indent="0" marL="0">
+            <a:pPr marL="0" indent="0" algn="ctr">
               <a:buNone/>
             </a:pPr>
             <a:r>
@@ -19583,7 +19523,7 @@
           <a:bodyPr wrap="square" lIns="1270" tIns="1270" rIns="1270" bIns="1270" rtlCol="0" anchor="ctr"/>
           <a:lstStyle/>
           <a:p>
-            <a:pPr algn="l" indent="0" marL="0">
+            <a:pPr marL="0" indent="0" algn="l">
               <a:buNone/>
             </a:pPr>
             <a:r>
@@ -19647,7 +19587,7 @@
           <a:bodyPr wrap="square" lIns="0" tIns="0" rIns="0" bIns="0" rtlCol="0" anchor="ctr"/>
           <a:lstStyle/>
           <a:p>
-            <a:pPr algn="ctr" indent="0" marL="0">
+            <a:pPr marL="0" indent="0" algn="ctr">
               <a:buNone/>
             </a:pPr>
             <a:r>
@@ -19711,7 +19651,7 @@
           <a:bodyPr wrap="square" lIns="0" tIns="0" rIns="0" bIns="0" rtlCol="0" anchor="ctr"/>
           <a:lstStyle/>
           <a:p>
-            <a:pPr algn="ctr" indent="0" marL="0">
+            <a:pPr marL="0" indent="0" algn="ctr">
               <a:buNone/>
             </a:pPr>
             <a:r>
@@ -19775,7 +19715,7 @@
           <a:bodyPr wrap="square" lIns="0" tIns="0" rIns="0" bIns="0" rtlCol="0" anchor="ctr"/>
           <a:lstStyle/>
           <a:p>
-            <a:pPr algn="ctr" indent="0" marL="0">
+            <a:pPr marL="0" indent="0" algn="ctr">
               <a:buNone/>
             </a:pPr>
             <a:r>
@@ -19839,7 +19779,7 @@
           <a:bodyPr wrap="square" lIns="1270" tIns="1270" rIns="1270" bIns="1270" rtlCol="0" anchor="ctr"/>
           <a:lstStyle/>
           <a:p>
-            <a:pPr algn="l" indent="0" marL="0">
+            <a:pPr marL="0" indent="0" algn="l">
               <a:buNone/>
             </a:pPr>
             <a:r>
@@ -19903,7 +19843,7 @@
           <a:bodyPr wrap="square" lIns="0" tIns="0" rIns="0" bIns="0" rtlCol="0" anchor="ctr"/>
           <a:lstStyle/>
           <a:p>
-            <a:pPr algn="ctr" indent="0" marL="0">
+            <a:pPr marL="0" indent="0" algn="ctr">
               <a:buNone/>
             </a:pPr>
             <a:r>
@@ -19967,7 +19907,7 @@
           <a:bodyPr wrap="square" lIns="0" tIns="0" rIns="0" bIns="0" rtlCol="0" anchor="ctr"/>
           <a:lstStyle/>
           <a:p>
-            <a:pPr algn="ctr" indent="0" marL="0">
+            <a:pPr marL="0" indent="0" algn="ctr">
               <a:buNone/>
             </a:pPr>
             <a:r>
@@ -20031,7 +19971,7 @@
           <a:bodyPr wrap="square" lIns="0" tIns="0" rIns="0" bIns="0" rtlCol="0" anchor="ctr"/>
           <a:lstStyle/>
           <a:p>
-            <a:pPr algn="ctr" indent="0" marL="0">
+            <a:pPr marL="0" indent="0" algn="ctr">
               <a:buNone/>
             </a:pPr>
             <a:r>
@@ -20070,7 +20010,7 @@
           <a:bodyPr wrap="square" lIns="0" tIns="0" rIns="0" bIns="0" rtlCol="0" anchor="ctr"/>
           <a:lstStyle/>
           <a:p>
-            <a:pPr algn="ctr" indent="0" marL="0">
+            <a:pPr marL="0" indent="0" algn="ctr">
               <a:buNone/>
             </a:pPr>
             <a:r>
@@ -20109,7 +20049,7 @@
           <a:bodyPr wrap="square" lIns="0" tIns="0" rIns="0" bIns="0" rtlCol="0" anchor="t"/>
           <a:lstStyle/>
           <a:p>
-            <a:pPr algn="l" indent="0" marL="0">
+            <a:pPr marL="0" indent="0" algn="l">
               <a:lnSpc>
                 <a:spcPct val="108000"/>
               </a:lnSpc>
@@ -20176,7 +20116,7 @@
           <a:bodyPr wrap="square" lIns="0" tIns="0" rIns="0" bIns="0" rtlCol="0" anchor="ctr"/>
           <a:lstStyle/>
           <a:p>
-            <a:pPr algn="ctr" indent="0" marL="0">
+            <a:pPr marL="0" indent="0" algn="ctr">
               <a:buNone/>
             </a:pPr>
             <a:r>
@@ -20240,7 +20180,7 @@
           <a:bodyPr wrap="square" lIns="0" tIns="0" rIns="0" bIns="0" rtlCol="0" anchor="ctr"/>
           <a:lstStyle/>
           <a:p>
-            <a:pPr algn="ctr" indent="0" marL="0">
+            <a:pPr marL="0" indent="0" algn="ctr">
               <a:buNone/>
             </a:pPr>
             <a:r>
@@ -20304,7 +20244,7 @@
           <a:bodyPr wrap="square" lIns="0" tIns="0" rIns="0" bIns="0" rtlCol="0" anchor="ctr"/>
           <a:lstStyle/>
           <a:p>
-            <a:pPr algn="ctr" indent="0" marL="0">
+            <a:pPr marL="0" indent="0" algn="ctr">
               <a:buNone/>
             </a:pPr>
             <a:r>
@@ -20368,7 +20308,7 @@
           <a:bodyPr wrap="square" lIns="1270" tIns="1270" rIns="1270" bIns="1270" rtlCol="0" anchor="ctr"/>
           <a:lstStyle/>
           <a:p>
-            <a:pPr algn="l" indent="0" marL="0">
+            <a:pPr marL="0" indent="0" algn="l">
               <a:buNone/>
             </a:pPr>
             <a:r>
@@ -20432,7 +20372,7 @@
           <a:bodyPr wrap="square" lIns="0" tIns="0" rIns="0" bIns="0" rtlCol="0" anchor="ctr"/>
           <a:lstStyle/>
           <a:p>
-            <a:pPr algn="ctr" indent="0" marL="0">
+            <a:pPr marL="0" indent="0" algn="ctr">
               <a:buNone/>
             </a:pPr>
             <a:r>
@@ -20496,7 +20436,7 @@
           <a:bodyPr wrap="square" lIns="0" tIns="0" rIns="0" bIns="0" rtlCol="0" anchor="ctr"/>
           <a:lstStyle/>
           <a:p>
-            <a:pPr algn="ctr" indent="0" marL="0">
+            <a:pPr marL="0" indent="0" algn="ctr">
               <a:buNone/>
             </a:pPr>
             <a:r>
@@ -20560,7 +20500,7 @@
           <a:bodyPr wrap="square" lIns="0" tIns="0" rIns="0" bIns="0" rtlCol="0" anchor="ctr"/>
           <a:lstStyle/>
           <a:p>
-            <a:pPr algn="ctr" indent="0" marL="0">
+            <a:pPr marL="0" indent="0" algn="ctr">
               <a:buNone/>
             </a:pPr>
             <a:r>
@@ -20624,7 +20564,7 @@
           <a:bodyPr wrap="square" lIns="1270" tIns="1270" rIns="1270" bIns="1270" rtlCol="0" anchor="ctr"/>
           <a:lstStyle/>
           <a:p>
-            <a:pPr algn="l" indent="0" marL="0">
+            <a:pPr marL="0" indent="0" algn="l">
               <a:buNone/>
             </a:pPr>
             <a:r>
@@ -20688,7 +20628,7 @@
           <a:bodyPr wrap="square" lIns="0" tIns="0" rIns="0" bIns="0" rtlCol="0" anchor="ctr"/>
           <a:lstStyle/>
           <a:p>
-            <a:pPr algn="ctr" indent="0" marL="0">
+            <a:pPr marL="0" indent="0" algn="ctr">
               <a:buNone/>
             </a:pPr>
             <a:r>
@@ -20752,7 +20692,7 @@
           <a:bodyPr wrap="square" lIns="0" tIns="0" rIns="0" bIns="0" rtlCol="0" anchor="ctr"/>
           <a:lstStyle/>
           <a:p>
-            <a:pPr algn="ctr" indent="0" marL="0">
+            <a:pPr marL="0" indent="0" algn="ctr">
               <a:buNone/>
             </a:pPr>
             <a:r>
@@ -20816,7 +20756,7 @@
           <a:bodyPr wrap="square" lIns="0" tIns="0" rIns="0" bIns="0" rtlCol="0" anchor="ctr"/>
           <a:lstStyle/>
           <a:p>
-            <a:pPr algn="ctr" indent="0" marL="0">
+            <a:pPr marL="0" indent="0" algn="ctr">
               <a:buNone/>
             </a:pPr>
             <a:r>
@@ -20880,7 +20820,7 @@
           <a:bodyPr wrap="square" lIns="1270" tIns="1270" rIns="1270" bIns="1270" rtlCol="0" anchor="ctr"/>
           <a:lstStyle/>
           <a:p>
-            <a:pPr algn="l" indent="0" marL="0">
+            <a:pPr marL="0" indent="0" algn="l">
               <a:buNone/>
             </a:pPr>
             <a:r>
@@ -20944,7 +20884,7 @@
           <a:bodyPr wrap="square" lIns="0" tIns="0" rIns="0" bIns="0" rtlCol="0" anchor="ctr"/>
           <a:lstStyle/>
           <a:p>
-            <a:pPr algn="ctr" indent="0" marL="0">
+            <a:pPr marL="0" indent="0" algn="ctr">
               <a:buNone/>
             </a:pPr>
             <a:r>
@@ -21008,7 +20948,7 @@
           <a:bodyPr wrap="square" lIns="0" tIns="0" rIns="0" bIns="0" rtlCol="0" anchor="ctr"/>
           <a:lstStyle/>
           <a:p>
-            <a:pPr algn="ctr" indent="0" marL="0">
+            <a:pPr marL="0" indent="0" algn="ctr">
               <a:buNone/>
             </a:pPr>
             <a:r>
@@ -21072,7 +21012,7 @@
           <a:bodyPr wrap="square" lIns="0" tIns="0" rIns="0" bIns="0" rtlCol="0" anchor="ctr"/>
           <a:lstStyle/>
           <a:p>
-            <a:pPr algn="ctr" indent="0" marL="0">
+            <a:pPr marL="0" indent="0" algn="ctr">
               <a:buNone/>
             </a:pPr>
             <a:r>
@@ -21138,7 +21078,7 @@
           <a:bodyPr wrap="square" lIns="0" tIns="0" rIns="0" bIns="0" rtlCol="0" anchor="ctr"/>
           <a:lstStyle/>
           <a:p>
-            <a:pPr algn="ctr" indent="0" marL="0">
+            <a:pPr marL="0" indent="0" algn="ctr">
               <a:lnSpc>
                 <a:spcPct val="108000"/>
               </a:lnSpc>
@@ -21175,6 +21115,7 @@
         <a:solidFill>
           <a:srgbClr val="F5F7FB"/>
         </a:solidFill>
+        <a:effectLst/>
       </p:bgPr>
     </p:bg>
     <p:spTree>
@@ -21239,11 +21180,11 @@
           <a:bodyPr wrap="square" lIns="0" tIns="0" rIns="0" bIns="0" rtlCol="0" anchor="ctr"/>
           <a:lstStyle/>
           <a:p>
-            <a:pPr algn="ctr" indent="0" marL="0">
-              <a:buNone/>
-            </a:pPr>
-            <a:r>
-              <a:rPr lang="en-US" sz="1150" b="1" spc="100" kern="0" dirty="0">
+            <a:pPr marL="0" indent="0" algn="ctr">
+              <a:buNone/>
+            </a:pPr>
+            <a:r>
+              <a:rPr lang="en-US" sz="1150" b="1" kern="0" spc="100" dirty="0">
                 <a:solidFill>
                   <a:srgbClr val="FFFFFF"/>
                 </a:solidFill>
@@ -21278,7 +21219,7 @@
           <a:bodyPr wrap="square" lIns="0" tIns="0" rIns="0" bIns="0" rtlCol="0" anchor="ctr"/>
           <a:lstStyle/>
           <a:p>
-            <a:pPr indent="0" marL="0">
+            <a:pPr marL="0" indent="0">
               <a:buNone/>
             </a:pPr>
             <a:r>
@@ -21317,7 +21258,7 @@
           <a:bodyPr wrap="square" lIns="0" tIns="0" rIns="0" bIns="0" rtlCol="0" anchor="ctr"/>
           <a:lstStyle/>
           <a:p>
-            <a:pPr indent="0" marL="0">
+            <a:pPr marL="0" indent="0">
               <a:buNone/>
             </a:pPr>
             <a:r>
@@ -21383,7 +21324,7 @@
           <a:bodyPr wrap="square" lIns="0" tIns="0" rIns="0" bIns="0" rtlCol="0" anchor="ctr"/>
           <a:lstStyle/>
           <a:p>
-            <a:pPr algn="ctr" indent="0" marL="0">
+            <a:pPr marL="0" indent="0" algn="ctr">
               <a:buNone/>
             </a:pPr>
             <a:r>
@@ -21417,16 +21358,34 @@
         </p:nvGraphicFramePr>
         <p:xfrm>
           <a:off x="548640" y="3108960"/>
-          <a:ext cx="6400800" cy="914400"/>
+          <a:ext cx="6400800" cy="2011680"/>
         </p:xfrm>
         <a:graphic>
           <a:graphicData uri="http://schemas.openxmlformats.org/drawingml/2006/table">
             <a:tbl>
               <a:tblPr/>
               <a:tblGrid>
-                <a:gridCol w="2743200"/>
-                <a:gridCol w="2194560"/>
-                <a:gridCol w="1463040"/>
+                <a:gridCol w="2743200">
+                  <a:extLst>
+                    <a:ext uri="{9D8B030D-6E8A-4147-A177-3AD203B41FA5}">
+                      <a16:colId xmlns:a16="http://schemas.microsoft.com/office/drawing/2014/main" val="20000"/>
+                    </a:ext>
+                  </a:extLst>
+                </a:gridCol>
+                <a:gridCol w="2194560">
+                  <a:extLst>
+                    <a:ext uri="{9D8B030D-6E8A-4147-A177-3AD203B41FA5}">
+                      <a16:colId xmlns:a16="http://schemas.microsoft.com/office/drawing/2014/main" val="20001"/>
+                    </a:ext>
+                  </a:extLst>
+                </a:gridCol>
+                <a:gridCol w="1463040">
+                  <a:extLst>
+                    <a:ext uri="{9D8B030D-6E8A-4147-A177-3AD203B41FA5}">
+                      <a16:colId xmlns:a16="http://schemas.microsoft.com/office/drawing/2014/main" val="20002"/>
+                    </a:ext>
+                  </a:extLst>
+                </a:gridCol>
               </a:tblGrid>
               <a:tr h="402336">
                 <a:tc>
@@ -21434,7 +21393,7 @@
                     <a:bodyPr/>
                     <a:lstStyle/>
                     <a:p>
-                      <a:pPr indent="0" marL="0">
+                      <a:pPr marL="0" indent="0">
                         <a:buNone/>
                       </a:pPr>
                       <a:r>
@@ -21502,7 +21461,7 @@
                     <a:bodyPr/>
                     <a:lstStyle/>
                     <a:p>
-                      <a:pPr indent="0" marL="0">
+                      <a:pPr marL="0" indent="0">
                         <a:buNone/>
                       </a:pPr>
                       <a:r>
@@ -21570,7 +21529,7 @@
                     <a:bodyPr/>
                     <a:lstStyle/>
                     <a:p>
-                      <a:pPr indent="0" marL="0">
+                      <a:pPr marL="0" indent="0">
                         <a:buNone/>
                       </a:pPr>
                       <a:r>
@@ -21633,6 +21592,11 @@
                     </a:solidFill>
                   </a:tcPr>
                 </a:tc>
+                <a:extLst>
+                  <a:ext uri="{0D108BD9-81ED-4DB2-BD59-A6C34878D82A}">
+                    <a16:rowId xmlns:a16="http://schemas.microsoft.com/office/drawing/2014/main" val="10000"/>
+                  </a:ext>
+                </a:extLst>
               </a:tr>
               <a:tr h="402336">
                 <a:tc>
@@ -21640,7 +21604,7 @@
                     <a:bodyPr/>
                     <a:lstStyle/>
                     <a:p>
-                      <a:pPr indent="0" marL="0">
+                      <a:pPr marL="0" indent="0">
                         <a:buNone/>
                       </a:pPr>
                       <a:r>
@@ -21708,7 +21672,7 @@
                     <a:bodyPr/>
                     <a:lstStyle/>
                     <a:p>
-                      <a:pPr algn="ctr" indent="0" marL="0">
+                      <a:pPr marL="0" indent="0" algn="ctr">
                         <a:buNone/>
                       </a:pPr>
                       <a:r>
@@ -21776,7 +21740,7 @@
                     <a:bodyPr/>
                     <a:lstStyle/>
                     <a:p>
-                      <a:pPr algn="ctr" indent="0" marL="0">
+                      <a:pPr marL="0" indent="0" algn="ctr">
                         <a:buNone/>
                       </a:pPr>
                       <a:r>
@@ -21839,6 +21803,11 @@
                     </a:solidFill>
                   </a:tcPr>
                 </a:tc>
+                <a:extLst>
+                  <a:ext uri="{0D108BD9-81ED-4DB2-BD59-A6C34878D82A}">
+                    <a16:rowId xmlns:a16="http://schemas.microsoft.com/office/drawing/2014/main" val="10001"/>
+                  </a:ext>
+                </a:extLst>
               </a:tr>
               <a:tr h="402336">
                 <a:tc>
@@ -21846,7 +21815,7 @@
                     <a:bodyPr/>
                     <a:lstStyle/>
                     <a:p>
-                      <a:pPr indent="0" marL="0">
+                      <a:pPr marL="0" indent="0">
                         <a:buNone/>
                       </a:pPr>
                       <a:r>
@@ -21914,7 +21883,7 @@
                     <a:bodyPr/>
                     <a:lstStyle/>
                     <a:p>
-                      <a:pPr algn="ctr" indent="0" marL="0">
+                      <a:pPr marL="0" indent="0" algn="ctr">
                         <a:buNone/>
                       </a:pPr>
                       <a:r>
@@ -21982,7 +21951,7 @@
                     <a:bodyPr/>
                     <a:lstStyle/>
                     <a:p>
-                      <a:pPr algn="ctr" indent="0" marL="0">
+                      <a:pPr marL="0" indent="0" algn="ctr">
                         <a:buNone/>
                       </a:pPr>
                       <a:r>
@@ -22045,6 +22014,11 @@
                     </a:solidFill>
                   </a:tcPr>
                 </a:tc>
+                <a:extLst>
+                  <a:ext uri="{0D108BD9-81ED-4DB2-BD59-A6C34878D82A}">
+                    <a16:rowId xmlns:a16="http://schemas.microsoft.com/office/drawing/2014/main" val="10002"/>
+                  </a:ext>
+                </a:extLst>
               </a:tr>
               <a:tr h="402336">
                 <a:tc>
@@ -22052,7 +22026,7 @@
                     <a:bodyPr/>
                     <a:lstStyle/>
                     <a:p>
-                      <a:pPr indent="0" marL="0">
+                      <a:pPr marL="0" indent="0">
                         <a:buNone/>
                       </a:pPr>
                       <a:r>
@@ -22120,7 +22094,7 @@
                     <a:bodyPr/>
                     <a:lstStyle/>
                     <a:p>
-                      <a:pPr algn="ctr" indent="0" marL="0">
+                      <a:pPr marL="0" indent="0" algn="ctr">
                         <a:buNone/>
                       </a:pPr>
                       <a:r>
@@ -22188,7 +22162,7 @@
                     <a:bodyPr/>
                     <a:lstStyle/>
                     <a:p>
-                      <a:pPr algn="ctr" indent="0" marL="0">
+                      <a:pPr marL="0" indent="0" algn="ctr">
                         <a:buNone/>
                       </a:pPr>
                       <a:r>
@@ -22251,6 +22225,11 @@
                     </a:solidFill>
                   </a:tcPr>
                 </a:tc>
+                <a:extLst>
+                  <a:ext uri="{0D108BD9-81ED-4DB2-BD59-A6C34878D82A}">
+                    <a16:rowId xmlns:a16="http://schemas.microsoft.com/office/drawing/2014/main" val="10003"/>
+                  </a:ext>
+                </a:extLst>
               </a:tr>
               <a:tr h="402336">
                 <a:tc>
@@ -22258,7 +22237,7 @@
                     <a:bodyPr/>
                     <a:lstStyle/>
                     <a:p>
-                      <a:pPr indent="0" marL="0">
+                      <a:pPr marL="0" indent="0">
                         <a:buNone/>
                       </a:pPr>
                       <a:r>
@@ -22326,7 +22305,7 @@
                     <a:bodyPr/>
                     <a:lstStyle/>
                     <a:p>
-                      <a:pPr algn="ctr" indent="0" marL="0">
+                      <a:pPr marL="0" indent="0" algn="ctr">
                         <a:buNone/>
                       </a:pPr>
                       <a:r>
@@ -22394,7 +22373,7 @@
                     <a:bodyPr/>
                     <a:lstStyle/>
                     <a:p>
-                      <a:pPr algn="ctr" indent="0" marL="0">
+                      <a:pPr marL="0" indent="0" algn="ctr">
                         <a:buNone/>
                       </a:pPr>
                       <a:r>
@@ -22457,6 +22436,11 @@
                     </a:solidFill>
                   </a:tcPr>
                 </a:tc>
+                <a:extLst>
+                  <a:ext uri="{0D108BD9-81ED-4DB2-BD59-A6C34878D82A}">
+                    <a16:rowId xmlns:a16="http://schemas.microsoft.com/office/drawing/2014/main" val="10004"/>
+                  </a:ext>
+                </a:extLst>
               </a:tr>
             </a:tbl>
           </a:graphicData>
@@ -22537,7 +22521,7 @@
           <a:bodyPr wrap="square" lIns="0" tIns="0" rIns="0" bIns="0" rtlCol="0" anchor="ctr"/>
           <a:lstStyle/>
           <a:p>
-            <a:pPr indent="0" marL="0">
+            <a:pPr marL="0" indent="0">
               <a:buNone/>
             </a:pPr>
             <a:r>
@@ -22576,7 +22560,7 @@
           <a:bodyPr wrap="square" lIns="0" tIns="0" rIns="0" bIns="0" rtlCol="0" anchor="t"/>
           <a:lstStyle/>
           <a:p>
-            <a:pPr algn="l" indent="0" marL="0">
+            <a:pPr marL="0" indent="0" algn="l">
               <a:lnSpc>
                 <a:spcPct val="110000"/>
               </a:lnSpc>
@@ -22672,7 +22656,7 @@
           <a:bodyPr wrap="square" lIns="0" tIns="0" rIns="0" bIns="0" rtlCol="0" anchor="ctr"/>
           <a:lstStyle/>
           <a:p>
-            <a:pPr indent="0" marL="0">
+            <a:pPr marL="0" indent="0">
               <a:buNone/>
             </a:pPr>
             <a:r>
@@ -22711,7 +22695,7 @@
           <a:bodyPr wrap="square" lIns="0" tIns="0" rIns="0" bIns="0" rtlCol="0" anchor="t"/>
           <a:lstStyle/>
           <a:p>
-            <a:pPr algn="l" indent="0" marL="0">
+            <a:pPr marL="0" indent="0" algn="l">
               <a:lnSpc>
                 <a:spcPct val="110000"/>
               </a:lnSpc>
@@ -22731,7 +22715,7 @@
             <a:endParaRPr lang="en-US" sz="1200" dirty="0"/>
           </a:p>
           <a:p>
-            <a:pPr algn="l" indent="0" marL="0">
+            <a:pPr marL="0" indent="0" algn="l">
               <a:lnSpc>
                 <a:spcPct val="110000"/>
               </a:lnSpc>
@@ -22740,7 +22724,7 @@
             <a:endParaRPr lang="en-US" sz="1200" dirty="0"/>
           </a:p>
           <a:p>
-            <a:pPr algn="l" indent="0" marL="0">
+            <a:pPr marL="0" indent="0" algn="l">
               <a:lnSpc>
                 <a:spcPct val="110000"/>
               </a:lnSpc>
@@ -22809,7 +22793,7 @@
           <a:bodyPr wrap="square" lIns="0" tIns="0" rIns="0" bIns="0" rtlCol="0" anchor="ctr"/>
           <a:lstStyle/>
           <a:p>
-            <a:pPr algn="l" indent="0" marL="0">
+            <a:pPr marL="0" indent="0" algn="l">
               <a:lnSpc>
                 <a:spcPct val="110000"/>
               </a:lnSpc>
@@ -22846,6 +22830,7 @@
         <a:solidFill>
           <a:srgbClr val="F5F7FB"/>
         </a:solidFill>
+        <a:effectLst/>
       </p:bgPr>
     </p:bg>
     <p:spTree>
@@ -22910,11 +22895,11 @@
           <a:bodyPr wrap="square" lIns="0" tIns="0" rIns="0" bIns="0" rtlCol="0" anchor="ctr"/>
           <a:lstStyle/>
           <a:p>
-            <a:pPr algn="ctr" indent="0" marL="0">
-              <a:buNone/>
-            </a:pPr>
-            <a:r>
-              <a:rPr lang="en-US" sz="1150" b="1" spc="100" kern="0" dirty="0">
+            <a:pPr marL="0" indent="0" algn="ctr">
+              <a:buNone/>
+            </a:pPr>
+            <a:r>
+              <a:rPr lang="en-US" sz="1150" b="1" kern="0" spc="100" dirty="0">
                 <a:solidFill>
                   <a:srgbClr val="FFFFFF"/>
                 </a:solidFill>
@@ -22949,7 +22934,7 @@
           <a:bodyPr wrap="square" lIns="0" tIns="0" rIns="0" bIns="0" rtlCol="0" anchor="ctr"/>
           <a:lstStyle/>
           <a:p>
-            <a:pPr indent="0" marL="0">
+            <a:pPr marL="0" indent="0">
               <a:buNone/>
             </a:pPr>
             <a:r>
@@ -22988,7 +22973,7 @@
           <a:bodyPr wrap="square" lIns="0" tIns="0" rIns="0" bIns="0" rtlCol="0" anchor="ctr"/>
           <a:lstStyle/>
           <a:p>
-            <a:pPr indent="0" marL="0">
+            <a:pPr marL="0" indent="0">
               <a:buNone/>
             </a:pPr>
             <a:r>
@@ -23054,7 +23039,7 @@
           <a:bodyPr wrap="square" lIns="0" tIns="0" rIns="0" bIns="0" rtlCol="0" anchor="ctr"/>
           <a:lstStyle/>
           <a:p>
-            <a:pPr algn="ctr" indent="0" marL="0">
+            <a:pPr marL="0" indent="0" algn="ctr">
               <a:buNone/>
             </a:pPr>
             <a:r>
@@ -23088,18 +23073,48 @@
         </p:nvGraphicFramePr>
         <p:xfrm>
           <a:off x="548640" y="3063240"/>
-          <a:ext cx="11091672" cy="914400"/>
+          <a:ext cx="11091672" cy="2304288"/>
         </p:xfrm>
         <a:graphic>
           <a:graphicData uri="http://schemas.openxmlformats.org/drawingml/2006/table">
             <a:tbl>
               <a:tblPr/>
               <a:tblGrid>
-                <a:gridCol w="3108960"/>
-                <a:gridCol w="1645920"/>
-                <a:gridCol w="1645920"/>
-                <a:gridCol w="2468880"/>
-                <a:gridCol w="2221992"/>
+                <a:gridCol w="3108960">
+                  <a:extLst>
+                    <a:ext uri="{9D8B030D-6E8A-4147-A177-3AD203B41FA5}">
+                      <a16:colId xmlns:a16="http://schemas.microsoft.com/office/drawing/2014/main" val="20000"/>
+                    </a:ext>
+                  </a:extLst>
+                </a:gridCol>
+                <a:gridCol w="1645920">
+                  <a:extLst>
+                    <a:ext uri="{9D8B030D-6E8A-4147-A177-3AD203B41FA5}">
+                      <a16:colId xmlns:a16="http://schemas.microsoft.com/office/drawing/2014/main" val="20001"/>
+                    </a:ext>
+                  </a:extLst>
+                </a:gridCol>
+                <a:gridCol w="1645920">
+                  <a:extLst>
+                    <a:ext uri="{9D8B030D-6E8A-4147-A177-3AD203B41FA5}">
+                      <a16:colId xmlns:a16="http://schemas.microsoft.com/office/drawing/2014/main" val="20002"/>
+                    </a:ext>
+                  </a:extLst>
+                </a:gridCol>
+                <a:gridCol w="2468880">
+                  <a:extLst>
+                    <a:ext uri="{9D8B030D-6E8A-4147-A177-3AD203B41FA5}">
+                      <a16:colId xmlns:a16="http://schemas.microsoft.com/office/drawing/2014/main" val="20003"/>
+                    </a:ext>
+                  </a:extLst>
+                </a:gridCol>
+                <a:gridCol w="2221992">
+                  <a:extLst>
+                    <a:ext uri="{9D8B030D-6E8A-4147-A177-3AD203B41FA5}">
+                      <a16:colId xmlns:a16="http://schemas.microsoft.com/office/drawing/2014/main" val="20004"/>
+                    </a:ext>
+                  </a:extLst>
+                </a:gridCol>
               </a:tblGrid>
               <a:tr h="384048">
                 <a:tc>
@@ -23107,7 +23122,7 @@
                     <a:bodyPr/>
                     <a:lstStyle/>
                     <a:p>
-                      <a:pPr indent="0" marL="0">
+                      <a:pPr marL="0" indent="0">
                         <a:buNone/>
                       </a:pPr>
                       <a:r>
@@ -23175,7 +23190,7 @@
                     <a:bodyPr/>
                     <a:lstStyle/>
                     <a:p>
-                      <a:pPr indent="0" marL="0">
+                      <a:pPr marL="0" indent="0">
                         <a:buNone/>
                       </a:pPr>
                       <a:r>
@@ -23243,7 +23258,7 @@
                     <a:bodyPr/>
                     <a:lstStyle/>
                     <a:p>
-                      <a:pPr indent="0" marL="0">
+                      <a:pPr marL="0" indent="0">
                         <a:buNone/>
                       </a:pPr>
                       <a:r>
@@ -23311,7 +23326,7 @@
                     <a:bodyPr/>
                     <a:lstStyle/>
                     <a:p>
-                      <a:pPr indent="0" marL="0">
+                      <a:pPr marL="0" indent="0">
                         <a:buNone/>
                       </a:pPr>
                       <a:r>
@@ -23379,7 +23394,7 @@
                     <a:bodyPr/>
                     <a:lstStyle/>
                     <a:p>
-                      <a:pPr indent="0" marL="0">
+                      <a:pPr marL="0" indent="0">
                         <a:buNone/>
                       </a:pPr>
                       <a:r>
@@ -23442,6 +23457,11 @@
                     </a:solidFill>
                   </a:tcPr>
                 </a:tc>
+                <a:extLst>
+                  <a:ext uri="{0D108BD9-81ED-4DB2-BD59-A6C34878D82A}">
+                    <a16:rowId xmlns:a16="http://schemas.microsoft.com/office/drawing/2014/main" val="10000"/>
+                  </a:ext>
+                </a:extLst>
               </a:tr>
               <a:tr h="384048">
                 <a:tc>
@@ -23449,7 +23469,7 @@
                     <a:bodyPr/>
                     <a:lstStyle/>
                     <a:p>
-                      <a:pPr indent="0" marL="0">
+                      <a:pPr marL="0" indent="0">
                         <a:buNone/>
                       </a:pPr>
                       <a:r>
@@ -23517,7 +23537,7 @@
                     <a:bodyPr/>
                     <a:lstStyle/>
                     <a:p>
-                      <a:pPr algn="ctr" indent="0" marL="0">
+                      <a:pPr marL="0" indent="0" algn="ctr">
                         <a:buNone/>
                       </a:pPr>
                       <a:r>
@@ -23585,7 +23605,7 @@
                     <a:bodyPr/>
                     <a:lstStyle/>
                     <a:p>
-                      <a:pPr algn="ctr" indent="0" marL="0">
+                      <a:pPr marL="0" indent="0" algn="ctr">
                         <a:buNone/>
                       </a:pPr>
                       <a:r>
@@ -23653,7 +23673,7 @@
                     <a:bodyPr/>
                     <a:lstStyle/>
                     <a:p>
-                      <a:pPr algn="ctr" indent="0" marL="0">
+                      <a:pPr marL="0" indent="0" algn="ctr">
                         <a:buNone/>
                       </a:pPr>
                       <a:r>
@@ -23721,7 +23741,7 @@
                     <a:bodyPr/>
                     <a:lstStyle/>
                     <a:p>
-                      <a:pPr algn="ctr" indent="0" marL="0">
+                      <a:pPr marL="0" indent="0" algn="ctr">
                         <a:buNone/>
                       </a:pPr>
                       <a:r>
@@ -23784,6 +23804,11 @@
                     </a:solidFill>
                   </a:tcPr>
                 </a:tc>
+                <a:extLst>
+                  <a:ext uri="{0D108BD9-81ED-4DB2-BD59-A6C34878D82A}">
+                    <a16:rowId xmlns:a16="http://schemas.microsoft.com/office/drawing/2014/main" val="10001"/>
+                  </a:ext>
+                </a:extLst>
               </a:tr>
               <a:tr h="384048">
                 <a:tc>
@@ -23791,7 +23816,7 @@
                     <a:bodyPr/>
                     <a:lstStyle/>
                     <a:p>
-                      <a:pPr indent="0" marL="0">
+                      <a:pPr marL="0" indent="0">
                         <a:buNone/>
                       </a:pPr>
                       <a:r>
@@ -23859,7 +23884,7 @@
                     <a:bodyPr/>
                     <a:lstStyle/>
                     <a:p>
-                      <a:pPr algn="ctr" indent="0" marL="0">
+                      <a:pPr marL="0" indent="0" algn="ctr">
                         <a:buNone/>
                       </a:pPr>
                       <a:r>
@@ -23927,7 +23952,7 @@
                     <a:bodyPr/>
                     <a:lstStyle/>
                     <a:p>
-                      <a:pPr algn="ctr" indent="0" marL="0">
+                      <a:pPr marL="0" indent="0" algn="ctr">
                         <a:buNone/>
                       </a:pPr>
                       <a:r>
@@ -23995,7 +24020,7 @@
                     <a:bodyPr/>
                     <a:lstStyle/>
                     <a:p>
-                      <a:pPr algn="ctr" indent="0" marL="0">
+                      <a:pPr marL="0" indent="0" algn="ctr">
                         <a:buNone/>
                       </a:pPr>
                       <a:r>
@@ -24063,7 +24088,7 @@
                     <a:bodyPr/>
                     <a:lstStyle/>
                     <a:p>
-                      <a:pPr algn="ctr" indent="0" marL="0">
+                      <a:pPr marL="0" indent="0" algn="ctr">
                         <a:buNone/>
                       </a:pPr>
                       <a:r>
@@ -24126,6 +24151,11 @@
                     </a:solidFill>
                   </a:tcPr>
                 </a:tc>
+                <a:extLst>
+                  <a:ext uri="{0D108BD9-81ED-4DB2-BD59-A6C34878D82A}">
+                    <a16:rowId xmlns:a16="http://schemas.microsoft.com/office/drawing/2014/main" val="10002"/>
+                  </a:ext>
+                </a:extLst>
               </a:tr>
               <a:tr h="384048">
                 <a:tc>
@@ -24133,7 +24163,7 @@
                     <a:bodyPr/>
                     <a:lstStyle/>
                     <a:p>
-                      <a:pPr indent="0" marL="0">
+                      <a:pPr marL="0" indent="0">
                         <a:buNone/>
                       </a:pPr>
                       <a:r>
@@ -24201,7 +24231,7 @@
                     <a:bodyPr/>
                     <a:lstStyle/>
                     <a:p>
-                      <a:pPr algn="ctr" indent="0" marL="0">
+                      <a:pPr marL="0" indent="0" algn="ctr">
                         <a:buNone/>
                       </a:pPr>
                       <a:r>
@@ -24269,7 +24299,7 @@
                     <a:bodyPr/>
                     <a:lstStyle/>
                     <a:p>
-                      <a:pPr algn="ctr" indent="0" marL="0">
+                      <a:pPr marL="0" indent="0" algn="ctr">
                         <a:buNone/>
                       </a:pPr>
                       <a:r>
@@ -24337,7 +24367,7 @@
                     <a:bodyPr/>
                     <a:lstStyle/>
                     <a:p>
-                      <a:pPr algn="ctr" indent="0" marL="0">
+                      <a:pPr marL="0" indent="0" algn="ctr">
                         <a:buNone/>
                       </a:pPr>
                       <a:r>
@@ -24405,7 +24435,7 @@
                     <a:bodyPr/>
                     <a:lstStyle/>
                     <a:p>
-                      <a:pPr algn="ctr" indent="0" marL="0">
+                      <a:pPr marL="0" indent="0" algn="ctr">
                         <a:buNone/>
                       </a:pPr>
                       <a:r>
@@ -24468,6 +24498,11 @@
                     </a:solidFill>
                   </a:tcPr>
                 </a:tc>
+                <a:extLst>
+                  <a:ext uri="{0D108BD9-81ED-4DB2-BD59-A6C34878D82A}">
+                    <a16:rowId xmlns:a16="http://schemas.microsoft.com/office/drawing/2014/main" val="10003"/>
+                  </a:ext>
+                </a:extLst>
               </a:tr>
               <a:tr h="384048">
                 <a:tc>
@@ -24475,7 +24510,7 @@
                     <a:bodyPr/>
                     <a:lstStyle/>
                     <a:p>
-                      <a:pPr indent="0" marL="0">
+                      <a:pPr marL="0" indent="0">
                         <a:buNone/>
                       </a:pPr>
                       <a:r>
@@ -24543,7 +24578,7 @@
                     <a:bodyPr/>
                     <a:lstStyle/>
                     <a:p>
-                      <a:pPr algn="ctr" indent="0" marL="0">
+                      <a:pPr marL="0" indent="0" algn="ctr">
                         <a:buNone/>
                       </a:pPr>
                       <a:r>
@@ -24611,7 +24646,7 @@
                     <a:bodyPr/>
                     <a:lstStyle/>
                     <a:p>
-                      <a:pPr algn="ctr" indent="0" marL="0">
+                      <a:pPr marL="0" indent="0" algn="ctr">
                         <a:buNone/>
                       </a:pPr>
                       <a:r>
@@ -24679,7 +24714,7 @@
                     <a:bodyPr/>
                     <a:lstStyle/>
                     <a:p>
-                      <a:pPr algn="ctr" indent="0" marL="0">
+                      <a:pPr marL="0" indent="0" algn="ctr">
                         <a:buNone/>
                       </a:pPr>
                       <a:r>
@@ -24747,7 +24782,7 @@
                     <a:bodyPr/>
                     <a:lstStyle/>
                     <a:p>
-                      <a:pPr algn="ctr" indent="0" marL="0">
+                      <a:pPr marL="0" indent="0" algn="ctr">
                         <a:buNone/>
                       </a:pPr>
                       <a:r>
@@ -24810,6 +24845,11 @@
                     </a:solidFill>
                   </a:tcPr>
                 </a:tc>
+                <a:extLst>
+                  <a:ext uri="{0D108BD9-81ED-4DB2-BD59-A6C34878D82A}">
+                    <a16:rowId xmlns:a16="http://schemas.microsoft.com/office/drawing/2014/main" val="10004"/>
+                  </a:ext>
+                </a:extLst>
               </a:tr>
               <a:tr h="384048">
                 <a:tc>
@@ -24817,7 +24857,7 @@
                     <a:bodyPr/>
                     <a:lstStyle/>
                     <a:p>
-                      <a:pPr indent="0" marL="0">
+                      <a:pPr marL="0" indent="0">
                         <a:buNone/>
                       </a:pPr>
                       <a:r>
@@ -24885,7 +24925,7 @@
                     <a:bodyPr/>
                     <a:lstStyle/>
                     <a:p>
-                      <a:pPr indent="0" marL="0">
+                      <a:pPr marL="0" indent="0">
                         <a:buNone/>
                       </a:pPr>
                       <a:endParaRPr lang="en-US" sz="1150" dirty="0">
@@ -24942,7 +24982,7 @@
                     <a:bodyPr/>
                     <a:lstStyle/>
                     <a:p>
-                      <a:pPr indent="0" marL="0">
+                      <a:pPr marL="0" indent="0">
                         <a:buNone/>
                       </a:pPr>
                       <a:endParaRPr lang="en-US" sz="1150" dirty="0">
@@ -24999,7 +25039,7 @@
                     <a:bodyPr/>
                     <a:lstStyle/>
                     <a:p>
-                      <a:pPr indent="0" marL="0">
+                      <a:pPr marL="0" indent="0">
                         <a:buNone/>
                       </a:pPr>
                       <a:endParaRPr lang="en-US" sz="1150" dirty="0">
@@ -25056,7 +25096,7 @@
                     <a:bodyPr/>
                     <a:lstStyle/>
                     <a:p>
-                      <a:pPr algn="ctr" indent="0" marL="0">
+                      <a:pPr marL="0" indent="0" algn="ctr">
                         <a:buNone/>
                       </a:pPr>
                       <a:r>
@@ -25119,6 +25159,11 @@
                     </a:solidFill>
                   </a:tcPr>
                 </a:tc>
+                <a:extLst>
+                  <a:ext uri="{0D108BD9-81ED-4DB2-BD59-A6C34878D82A}">
+                    <a16:rowId xmlns:a16="http://schemas.microsoft.com/office/drawing/2014/main" val="10005"/>
+                  </a:ext>
+                </a:extLst>
               </a:tr>
             </a:tbl>
           </a:graphicData>
@@ -25126,7 +25171,7 @@
       </p:graphicFrame>
       <p:sp>
         <p:nvSpPr>
-          <p:cNvPr id="9" name="Shape 6"/>
+          <p:cNvPr id="8" name="Shape 6"/>
           <p:cNvSpPr/>
           <p:nvPr/>
         </p:nvSpPr>
@@ -25199,7 +25244,7 @@
           <a:bodyPr wrap="square" lIns="0" tIns="0" rIns="0" bIns="0" rtlCol="0" anchor="ctr"/>
           <a:lstStyle/>
           <a:p>
-            <a:pPr indent="0" marL="0">
+            <a:pPr marL="0" indent="0">
               <a:buNone/>
             </a:pPr>
             <a:r>
@@ -25238,7 +25283,7 @@
           <a:bodyPr wrap="square" lIns="0" tIns="0" rIns="0" bIns="0" rtlCol="0" anchor="t"/>
           <a:lstStyle/>
           <a:p>
-            <a:pPr algn="l" indent="0" marL="0">
+            <a:pPr marL="0" indent="0" algn="l">
               <a:lnSpc>
                 <a:spcPct val="108000"/>
               </a:lnSpc>
@@ -25334,7 +25379,7 @@
           <a:bodyPr wrap="square" lIns="0" tIns="0" rIns="0" bIns="0" rtlCol="0" anchor="ctr"/>
           <a:lstStyle/>
           <a:p>
-            <a:pPr indent="0" marL="0">
+            <a:pPr marL="0" indent="0">
               <a:buNone/>
             </a:pPr>
             <a:r>
@@ -25373,7 +25418,7 @@
           <a:bodyPr wrap="square" lIns="0" tIns="0" rIns="0" bIns="0" rtlCol="0" anchor="t"/>
           <a:lstStyle/>
           <a:p>
-            <a:pPr algn="l" indent="0" marL="0">
+            <a:pPr marL="0" indent="0" algn="l">
               <a:lnSpc>
                 <a:spcPct val="108000"/>
               </a:lnSpc>
@@ -25410,6 +25455,7 @@
         <a:solidFill>
           <a:srgbClr val="F5F7FB"/>
         </a:solidFill>
+        <a:effectLst/>
       </p:bgPr>
     </p:bg>
     <p:spTree>
@@ -25474,11 +25520,11 @@
           <a:bodyPr wrap="square" lIns="0" tIns="0" rIns="0" bIns="0" rtlCol="0" anchor="ctr"/>
           <a:lstStyle/>
           <a:p>
-            <a:pPr algn="ctr" indent="0" marL="0">
-              <a:buNone/>
-            </a:pPr>
-            <a:r>
-              <a:rPr lang="en-US" sz="1150" b="1" spc="100" kern="0" dirty="0">
+            <a:pPr marL="0" indent="0" algn="ctr">
+              <a:buNone/>
+            </a:pPr>
+            <a:r>
+              <a:rPr lang="en-US" sz="1150" b="1" kern="0" spc="100" dirty="0">
                 <a:solidFill>
                   <a:srgbClr val="FFFFFF"/>
                 </a:solidFill>
@@ -25513,7 +25559,7 @@
           <a:bodyPr wrap="square" lIns="0" tIns="0" rIns="0" bIns="0" rtlCol="0" anchor="ctr"/>
           <a:lstStyle/>
           <a:p>
-            <a:pPr indent="0" marL="0">
+            <a:pPr marL="0" indent="0">
               <a:buNone/>
             </a:pPr>
             <a:r>
@@ -25552,7 +25598,7 @@
           <a:bodyPr wrap="square" lIns="0" tIns="0" rIns="0" bIns="0" rtlCol="0" anchor="ctr"/>
           <a:lstStyle/>
           <a:p>
-            <a:pPr indent="0" marL="0">
+            <a:pPr marL="0" indent="0">
               <a:buNone/>
             </a:pPr>
             <a:r>
@@ -25645,7 +25691,7 @@
           <a:bodyPr wrap="square" lIns="0" tIns="0" rIns="0" bIns="0" rtlCol="0" anchor="ctr"/>
           <a:lstStyle/>
           <a:p>
-            <a:pPr indent="0" marL="0">
+            <a:pPr marL="0" indent="0">
               <a:buNone/>
             </a:pPr>
             <a:r>
@@ -25684,7 +25730,7 @@
           <a:bodyPr wrap="square" lIns="0" tIns="0" rIns="0" bIns="0" rtlCol="0" anchor="ctr"/>
           <a:lstStyle/>
           <a:p>
-            <a:pPr indent="0" marL="0">
+            <a:pPr marL="0" indent="0">
               <a:buNone/>
             </a:pPr>
             <a:r>
@@ -25723,7 +25769,7 @@
           <a:bodyPr wrap="square" lIns="0" tIns="0" rIns="0" bIns="0" rtlCol="0" anchor="t"/>
           <a:lstStyle/>
           <a:p>
-            <a:pPr algn="l" indent="0" marL="0">
+            <a:pPr marL="0" indent="0" algn="l">
               <a:lnSpc>
                 <a:spcPct val="110000"/>
               </a:lnSpc>
@@ -25743,7 +25789,7 @@
             <a:endParaRPr lang="en-US" sz="1150" dirty="0"/>
           </a:p>
           <a:p>
-            <a:pPr algn="l" indent="0" marL="0">
+            <a:pPr marL="0" indent="0" algn="l">
               <a:lnSpc>
                 <a:spcPct val="110000"/>
               </a:lnSpc>
@@ -25752,7 +25798,7 @@
             <a:endParaRPr lang="en-US" sz="1150" dirty="0"/>
           </a:p>
           <a:p>
-            <a:pPr algn="l" indent="0" marL="0">
+            <a:pPr marL="0" indent="0" algn="l">
               <a:lnSpc>
                 <a:spcPct val="110000"/>
               </a:lnSpc>
@@ -25848,7 +25894,7 @@
           <a:bodyPr wrap="square" lIns="0" tIns="0" rIns="0" bIns="0" rtlCol="0" anchor="ctr"/>
           <a:lstStyle/>
           <a:p>
-            <a:pPr indent="0" marL="0">
+            <a:pPr marL="0" indent="0">
               <a:buNone/>
             </a:pPr>
             <a:r>
@@ -25887,7 +25933,7 @@
           <a:bodyPr wrap="square" lIns="0" tIns="0" rIns="0" bIns="0" rtlCol="0" anchor="t"/>
           <a:lstStyle/>
           <a:p>
-            <a:pPr algn="l" indent="0" marL="0">
+            <a:pPr marL="0" indent="0" algn="l">
               <a:lnSpc>
                 <a:spcPct val="110000"/>
               </a:lnSpc>
@@ -25907,7 +25953,7 @@
             <a:endParaRPr lang="en-US" sz="1150" dirty="0"/>
           </a:p>
           <a:p>
-            <a:pPr algn="l" indent="0" marL="0">
+            <a:pPr marL="0" indent="0" algn="l">
               <a:lnSpc>
                 <a:spcPct val="110000"/>
               </a:lnSpc>
@@ -25916,7 +25962,7 @@
             <a:endParaRPr lang="en-US" sz="1150" dirty="0"/>
           </a:p>
           <a:p>
-            <a:pPr algn="l" indent="0" marL="0">
+            <a:pPr marL="0" indent="0" algn="l">
               <a:lnSpc>
                 <a:spcPct val="110000"/>
               </a:lnSpc>
@@ -25958,7 +26004,7 @@
           <a:bodyPr wrap="square" lIns="0" tIns="0" rIns="0" bIns="0" rtlCol="0" anchor="ctr"/>
           <a:lstStyle/>
           <a:p>
-            <a:pPr algn="l" indent="0" marL="0">
+            <a:pPr marL="0" indent="0" algn="l">
               <a:buNone/>
             </a:pPr>
             <a:r>
@@ -25997,7 +26043,7 @@
           <a:bodyPr wrap="square" lIns="0" tIns="0" rIns="0" bIns="0" rtlCol="0" anchor="t"/>
           <a:lstStyle/>
           <a:p>
-            <a:pPr indent="0" marL="0">
+            <a:pPr marL="0" indent="0">
               <a:buNone/>
             </a:pPr>
             <a:r>
@@ -26036,7 +26082,7 @@
           <a:bodyPr wrap="square" lIns="0" tIns="0" rIns="0" bIns="0" rtlCol="0" anchor="ctr"/>
           <a:lstStyle/>
           <a:p>
-            <a:pPr algn="l" indent="0" marL="0">
+            <a:pPr marL="0" indent="0" algn="l">
               <a:buNone/>
             </a:pPr>
             <a:r>
@@ -26075,7 +26121,7 @@
           <a:bodyPr wrap="square" lIns="0" tIns="0" rIns="0" bIns="0" rtlCol="0" anchor="t"/>
           <a:lstStyle/>
           <a:p>
-            <a:pPr indent="0" marL="0">
+            <a:pPr marL="0" indent="0">
               <a:buNone/>
             </a:pPr>
             <a:r>
@@ -26092,7 +26138,7 @@
             <a:endParaRPr lang="en-US" sz="1150" dirty="0"/>
           </a:p>
           <a:p>
-            <a:pPr indent="0" marL="0">
+            <a:pPr marL="0" indent="0">
               <a:buNone/>
             </a:pPr>
             <a:r>
@@ -26131,7 +26177,7 @@
           <a:bodyPr wrap="square" lIns="0" tIns="0" rIns="0" bIns="0" rtlCol="0" anchor="ctr"/>
           <a:lstStyle/>
           <a:p>
-            <a:pPr algn="l" indent="0" marL="0">
+            <a:pPr marL="0" indent="0" algn="l">
               <a:buNone/>
             </a:pPr>
             <a:r>
@@ -26170,7 +26216,7 @@
           <a:bodyPr wrap="square" lIns="0" tIns="0" rIns="0" bIns="0" rtlCol="0" anchor="t"/>
           <a:lstStyle/>
           <a:p>
-            <a:pPr indent="0" marL="0">
+            <a:pPr marL="0" indent="0">
               <a:buNone/>
             </a:pPr>
             <a:r>
@@ -26259,7 +26305,7 @@
           <a:bodyPr wrap="square" lIns="0" tIns="0" rIns="0" bIns="0" rtlCol="0" anchor="ctr"/>
           <a:lstStyle/>
           <a:p>
-            <a:pPr algn="ctr" indent="0" marL="0">
+            <a:pPr marL="0" indent="0" algn="ctr">
               <a:lnSpc>
                 <a:spcPct val="108000"/>
               </a:lnSpc>
@@ -26581,4 +26627,319 @@
     </a:ext>
   </a:extLst>
 </a:theme>
+</file>
+
+<file path=ppt/theme/theme2.xml><?xml version="1.0" encoding="utf-8"?>
+<a:theme xmlns:a="http://schemas.openxmlformats.org/drawingml/2006/main" name="Office Theme">
+  <a:themeElements>
+    <a:clrScheme name="Office">
+      <a:dk1>
+        <a:sysClr val="windowText" lastClr="000000"/>
+      </a:dk1>
+      <a:lt1>
+        <a:sysClr val="window" lastClr="FFFFFF"/>
+      </a:lt1>
+      <a:dk2>
+        <a:srgbClr val="0E2841"/>
+      </a:dk2>
+      <a:lt2>
+        <a:srgbClr val="E8E8E8"/>
+      </a:lt2>
+      <a:accent1>
+        <a:srgbClr val="156082"/>
+      </a:accent1>
+      <a:accent2>
+        <a:srgbClr val="E97132"/>
+      </a:accent2>
+      <a:accent3>
+        <a:srgbClr val="196B24"/>
+      </a:accent3>
+      <a:accent4>
+        <a:srgbClr val="0F9ED5"/>
+      </a:accent4>
+      <a:accent5>
+        <a:srgbClr val="A02B93"/>
+      </a:accent5>
+      <a:accent6>
+        <a:srgbClr val="4EA72E"/>
+      </a:accent6>
+      <a:hlink>
+        <a:srgbClr val="467886"/>
+      </a:hlink>
+      <a:folHlink>
+        <a:srgbClr val="96607D"/>
+      </a:folHlink>
+    </a:clrScheme>
+    <a:fontScheme name="Office">
+      <a:majorFont>
+        <a:latin typeface="Aptos Display" panose="02110004020202020204"/>
+        <a:ea typeface=""/>
+        <a:cs typeface=""/>
+        <a:font script="Jpan" typeface="游ゴシック Light"/>
+        <a:font script="Hang" typeface="맑은 고딕"/>
+        <a:font script="Hans" typeface="等线 Light"/>
+        <a:font script="Hant" typeface="新細明體"/>
+        <a:font script="Arab" typeface="Times New Roman"/>
+        <a:font script="Hebr" typeface="Times New Roman"/>
+        <a:font script="Thai" typeface="Angsana New"/>
+        <a:font script="Ethi" typeface="Nyala"/>
+        <a:font script="Beng" typeface="Vrinda"/>
+        <a:font script="Gujr" typeface="Shruti"/>
+        <a:font script="Khmr" typeface="MoolBoran"/>
+        <a:font script="Knda" typeface="Tunga"/>
+        <a:font script="Guru" typeface="Raavi"/>
+        <a:font script="Cans" typeface="Euphemia"/>
+        <a:font script="Cher" typeface="Plantagenet Cherokee"/>
+        <a:font script="Yiii" typeface="Microsoft Yi Baiti"/>
+        <a:font script="Tibt" typeface="Microsoft Himalaya"/>
+        <a:font script="Thaa" typeface="MV Boli"/>
+        <a:font script="Deva" typeface="Mangal"/>
+        <a:font script="Telu" typeface="Gautami"/>
+        <a:font script="Taml" typeface="Latha"/>
+        <a:font script="Syrc" typeface="Estrangelo Edessa"/>
+        <a:font script="Orya" typeface="Kalinga"/>
+        <a:font script="Mlym" typeface="Kartika"/>
+        <a:font script="Laoo" typeface="DokChampa"/>
+        <a:font script="Sinh" typeface="Iskoola Pota"/>
+        <a:font script="Mong" typeface="Mongolian Baiti"/>
+        <a:font script="Viet" typeface="Times New Roman"/>
+        <a:font script="Uigh" typeface="Microsoft Uighur"/>
+        <a:font script="Geor" typeface="Sylfaen"/>
+        <a:font script="Armn" typeface="Arial"/>
+        <a:font script="Bugi" typeface="Leelawadee UI"/>
+        <a:font script="Bopo" typeface="Microsoft JhengHei"/>
+        <a:font script="Java" typeface="Javanese Text"/>
+        <a:font script="Lisu" typeface="Segoe UI"/>
+        <a:font script="Mymr" typeface="Myanmar Text"/>
+        <a:font script="Nkoo" typeface="Ebrima"/>
+        <a:font script="Olck" typeface="Nirmala UI"/>
+        <a:font script="Osma" typeface="Ebrima"/>
+        <a:font script="Phag" typeface="Phagspa"/>
+        <a:font script="Syrn" typeface="Estrangelo Edessa"/>
+        <a:font script="Syrj" typeface="Estrangelo Edessa"/>
+        <a:font script="Syre" typeface="Estrangelo Edessa"/>
+        <a:font script="Sora" typeface="Nirmala UI"/>
+        <a:font script="Tale" typeface="Microsoft Tai Le"/>
+        <a:font script="Talu" typeface="Microsoft New Tai Lue"/>
+        <a:font script="Tfng" typeface="Ebrima"/>
+      </a:majorFont>
+      <a:minorFont>
+        <a:latin typeface="Aptos" panose="02110004020202020204"/>
+        <a:ea typeface=""/>
+        <a:cs typeface=""/>
+        <a:font script="Jpan" typeface="游ゴシック"/>
+        <a:font script="Hang" typeface="맑은 고딕"/>
+        <a:font script="Hans" typeface="等线"/>
+        <a:font script="Hant" typeface="新細明體"/>
+        <a:font script="Arab" typeface="Arial"/>
+        <a:font script="Hebr" typeface="Arial"/>
+        <a:font script="Thai" typeface="Cordia New"/>
+        <a:font script="Ethi" typeface="Nyala"/>
+        <a:font script="Beng" typeface="Vrinda"/>
+        <a:font script="Gujr" typeface="Shruti"/>
+        <a:font script="Khmr" typeface="DaunPenh"/>
+        <a:font script="Knda" typeface="Tunga"/>
+        <a:font script="Guru" typeface="Raavi"/>
+        <a:font script="Cans" typeface="Euphemia"/>
+        <a:font script="Cher" typeface="Plantagenet Cherokee"/>
+        <a:font script="Yiii" typeface="Microsoft Yi Baiti"/>
+        <a:font script="Tibt" typeface="Microsoft Himalaya"/>
+        <a:font script="Thaa" typeface="MV Boli"/>
+        <a:font script="Deva" typeface="Mangal"/>
+        <a:font script="Telu" typeface="Gautami"/>
+        <a:font script="Taml" typeface="Latha"/>
+        <a:font script="Syrc" typeface="Estrangelo Edessa"/>
+        <a:font script="Orya" typeface="Kalinga"/>
+        <a:font script="Mlym" typeface="Kartika"/>
+        <a:font script="Laoo" typeface="DokChampa"/>
+        <a:font script="Sinh" typeface="Iskoola Pota"/>
+        <a:font script="Mong" typeface="Mongolian Baiti"/>
+        <a:font script="Viet" typeface="Arial"/>
+        <a:font script="Uigh" typeface="Microsoft Uighur"/>
+        <a:font script="Geor" typeface="Sylfaen"/>
+        <a:font script="Armn" typeface="Arial"/>
+        <a:font script="Bugi" typeface="Leelawadee UI"/>
+        <a:font script="Bopo" typeface="Microsoft JhengHei"/>
+        <a:font script="Java" typeface="Javanese Text"/>
+        <a:font script="Lisu" typeface="Segoe UI"/>
+        <a:font script="Mymr" typeface="Myanmar Text"/>
+        <a:font script="Nkoo" typeface="Ebrima"/>
+        <a:font script="Olck" typeface="Nirmala UI"/>
+        <a:font script="Osma" typeface="Ebrima"/>
+        <a:font script="Phag" typeface="Phagspa"/>
+        <a:font script="Syrn" typeface="Estrangelo Edessa"/>
+        <a:font script="Syrj" typeface="Estrangelo Edessa"/>
+        <a:font script="Syre" typeface="Estrangelo Edessa"/>
+        <a:font script="Sora" typeface="Nirmala UI"/>
+        <a:font script="Tale" typeface="Microsoft Tai Le"/>
+        <a:font script="Talu" typeface="Microsoft New Tai Lue"/>
+        <a:font script="Tfng" typeface="Ebrima"/>
+      </a:minorFont>
+    </a:fontScheme>
+    <a:fmtScheme name="Office">
+      <a:fillStyleLst>
+        <a:solidFill>
+          <a:schemeClr val="phClr"/>
+        </a:solidFill>
+        <a:gradFill rotWithShape="1">
+          <a:gsLst>
+            <a:gs pos="0">
+              <a:schemeClr val="phClr">
+                <a:lumMod val="110000"/>
+                <a:satMod val="105000"/>
+                <a:tint val="67000"/>
+              </a:schemeClr>
+            </a:gs>
+            <a:gs pos="50000">
+              <a:schemeClr val="phClr">
+                <a:lumMod val="105000"/>
+                <a:satMod val="103000"/>
+                <a:tint val="73000"/>
+              </a:schemeClr>
+            </a:gs>
+            <a:gs pos="100000">
+              <a:schemeClr val="phClr">
+                <a:lumMod val="105000"/>
+                <a:satMod val="109000"/>
+                <a:tint val="81000"/>
+              </a:schemeClr>
+            </a:gs>
+          </a:gsLst>
+          <a:lin ang="5400000" scaled="0"/>
+        </a:gradFill>
+        <a:gradFill rotWithShape="1">
+          <a:gsLst>
+            <a:gs pos="0">
+              <a:schemeClr val="phClr">
+                <a:satMod val="103000"/>
+                <a:lumMod val="102000"/>
+                <a:tint val="94000"/>
+              </a:schemeClr>
+            </a:gs>
+            <a:gs pos="50000">
+              <a:schemeClr val="phClr">
+                <a:satMod val="110000"/>
+                <a:lumMod val="100000"/>
+                <a:shade val="100000"/>
+              </a:schemeClr>
+            </a:gs>
+            <a:gs pos="100000">
+              <a:schemeClr val="phClr">
+                <a:lumMod val="99000"/>
+                <a:satMod val="120000"/>
+                <a:shade val="78000"/>
+              </a:schemeClr>
+            </a:gs>
+          </a:gsLst>
+          <a:lin ang="5400000" scaled="0"/>
+        </a:gradFill>
+      </a:fillStyleLst>
+      <a:lnStyleLst>
+        <a:ln w="12700" cap="flat" cmpd="sng" algn="ctr">
+          <a:solidFill>
+            <a:schemeClr val="phClr"/>
+          </a:solidFill>
+          <a:prstDash val="solid"/>
+          <a:miter lim="800000"/>
+        </a:ln>
+        <a:ln w="19050" cap="flat" cmpd="sng" algn="ctr">
+          <a:solidFill>
+            <a:schemeClr val="phClr"/>
+          </a:solidFill>
+          <a:prstDash val="solid"/>
+          <a:miter lim="800000"/>
+        </a:ln>
+        <a:ln w="25400" cap="flat" cmpd="sng" algn="ctr">
+          <a:solidFill>
+            <a:schemeClr val="phClr"/>
+          </a:solidFill>
+          <a:prstDash val="solid"/>
+          <a:miter lim="800000"/>
+        </a:ln>
+      </a:lnStyleLst>
+      <a:effectStyleLst>
+        <a:effectStyle>
+          <a:effectLst/>
+        </a:effectStyle>
+        <a:effectStyle>
+          <a:effectLst/>
+        </a:effectStyle>
+        <a:effectStyle>
+          <a:effectLst>
+            <a:outerShdw blurRad="57150" dist="19050" dir="5400000" algn="ctr" rotWithShape="0">
+              <a:srgbClr val="000000">
+                <a:alpha val="63000"/>
+              </a:srgbClr>
+            </a:outerShdw>
+          </a:effectLst>
+        </a:effectStyle>
+      </a:effectStyleLst>
+      <a:bgFillStyleLst>
+        <a:solidFill>
+          <a:schemeClr val="phClr"/>
+        </a:solidFill>
+        <a:solidFill>
+          <a:schemeClr val="phClr">
+            <a:tint val="95000"/>
+            <a:satMod val="170000"/>
+          </a:schemeClr>
+        </a:solidFill>
+        <a:gradFill rotWithShape="1">
+          <a:gsLst>
+            <a:gs pos="0">
+              <a:schemeClr val="phClr">
+                <a:tint val="93000"/>
+                <a:satMod val="150000"/>
+                <a:shade val="98000"/>
+                <a:lumMod val="102000"/>
+              </a:schemeClr>
+            </a:gs>
+            <a:gs pos="50000">
+              <a:schemeClr val="phClr">
+                <a:tint val="98000"/>
+                <a:satMod val="130000"/>
+                <a:shade val="90000"/>
+                <a:lumMod val="103000"/>
+              </a:schemeClr>
+            </a:gs>
+            <a:gs pos="100000">
+              <a:schemeClr val="phClr">
+                <a:shade val="63000"/>
+                <a:satMod val="120000"/>
+              </a:schemeClr>
+            </a:gs>
+          </a:gsLst>
+          <a:lin ang="5400000" scaled="0"/>
+        </a:gradFill>
+      </a:bgFillStyleLst>
+    </a:fmtScheme>
+  </a:themeElements>
+  <a:objectDefaults>
+    <a:lnDef>
+      <a:spPr/>
+      <a:bodyPr/>
+      <a:lstStyle/>
+      <a:style>
+        <a:lnRef idx="2">
+          <a:schemeClr val="accent1"/>
+        </a:lnRef>
+        <a:fillRef idx="0">
+          <a:schemeClr val="accent1"/>
+        </a:fillRef>
+        <a:effectRef idx="1">
+          <a:schemeClr val="accent1"/>
+        </a:effectRef>
+        <a:fontRef idx="minor">
+          <a:schemeClr val="tx1"/>
+        </a:fontRef>
+      </a:style>
+    </a:lnDef>
+  </a:objectDefaults>
+  <a:extraClrSchemeLst/>
+  <a:extLst>
+    <a:ext uri="{05A4C25C-085E-4340-85A3-A5531E510DB2}">
+      <thm15:themeFamily xmlns:thm15="http://schemas.microsoft.com/office/thememl/2012/main" name="Office Theme" id="{2E142A2C-CD16-42D6-873A-C26D2A0506FA}" vid="{1BDDFF52-6CD6-40A5-AB3C-68EB2F1E4D0A}"/>
+    </a:ext>
+  </a:extLst>
+</a:theme>
 </file>